--- a/presentacion/Del_Acero_al_Algoritmo_Estilo_Profesor.pptx
+++ b/presentacion/Del_Acero_al_Algoritmo_Estilo_Profesor.pptx
@@ -4202,7 +4202,7 @@
                 </a:solidFill>
                 <a:latin typeface="Aptos"/>
               </a:rPr>
-              <a:t>Pregunta 3 · ¿Cuándo un arancel es sustantivamente alto?</a:t>
+              <a:t>Pregunta 3 · ¿Qué aranceles están entre los más altos?</a:t>
             </a:r>
           </a:p>
         </p:txBody>
@@ -4237,7 +4237,7 @@
                 </a:solidFill>
                 <a:latin typeface="Aptos"/>
               </a:rPr>
-              <a:t>Criterio definitivo: valores atípicos superiores con Q3 + 1,5 × RIC sobre ofertas únicas.</a:t>
+              <a:t>Usamos el percentil 90 (P90): separa aproximadamente el 10% de ofertas con arancel más alto.</a:t>
             </a:r>
           </a:p>
         </p:txBody>
@@ -4352,7 +4352,7 @@
                 </a:solidFill>
                 <a:latin typeface="Aptos"/>
               </a:rPr>
-              <a:t>Q1</a:t>
+              <a:t>P90</a:t>
             </a:r>
           </a:p>
         </p:txBody>
@@ -4387,7 +4387,7 @@
                 </a:solidFill>
                 <a:latin typeface="Aptos"/>
               </a:rPr>
-              <a:t>$1.616.000</a:t>
+              <a:t>$4.106.400</a:t>
             </a:r>
           </a:p>
         </p:txBody>
@@ -4502,7 +4502,7 @@
                 </a:solidFill>
                 <a:latin typeface="Aptos"/>
               </a:rPr>
-              <a:t>Q3</a:t>
+              <a:t>SIGNIFICADO</a:t>
             </a:r>
           </a:p>
         </p:txBody>
@@ -4537,7 +4537,7 @@
                 </a:solidFill>
                 <a:latin typeface="Aptos"/>
               </a:rPr>
-              <a:t>$2.580.000</a:t>
+              <a:t>90%</a:t>
             </a:r>
           </a:p>
         </p:txBody>
@@ -4652,7 +4652,7 @@
                 </a:solidFill>
                 <a:latin typeface="Aptos"/>
               </a:rPr>
-              <a:t>RIC</a:t>
+              <a:t>GRUPO SUPERIOR</a:t>
             </a:r>
           </a:p>
         </p:txBody>
@@ -4687,7 +4687,7 @@
                 </a:solidFill>
                 <a:latin typeface="Aptos"/>
               </a:rPr>
-              <a:t>$964.000</a:t>
+              <a:t>≈ 10%</a:t>
             </a:r>
           </a:p>
         </p:txBody>
@@ -4802,7 +4802,7 @@
                 </a:solidFill>
                 <a:latin typeface="Aptos"/>
               </a:rPr>
-              <a:t>Límite superior</a:t>
+              <a:t>VALOR MÁXIMO</a:t>
             </a:r>
           </a:p>
         </p:txBody>
@@ -4837,7 +4837,7 @@
                 </a:solidFill>
                 <a:latin typeface="Aptos"/>
               </a:rPr>
-              <a:t>Q3 + 1,5 × RIC = $4.026.000</a:t>
+              <a:t>$8.783.670</a:t>
             </a:r>
           </a:p>
         </p:txBody>
@@ -4997,7 +4997,7 @@
                 </a:solidFill>
                 <a:latin typeface="Aptos"/>
               </a:rPr>
-              <a:t>OFERTAS SOBRE EL LÍMITE</a:t>
+              <a:t>OFERTAS SOBRE P90</a:t>
             </a:r>
           </a:p>
         </p:txBody>
@@ -5032,7 +5032,7 @@
                 </a:solidFill>
                 <a:latin typeface="Aptos"/>
               </a:rPr>
-              <a:t>135</a:t>
+              <a:t>128</a:t>
             </a:r>
           </a:p>
         </p:txBody>
@@ -5262,7 +5262,7 @@
                 </a:solidFill>
                 <a:latin typeface="Aptos"/>
               </a:rPr>
-              <a:t>10,6%</a:t>
+              <a:t>10,1%</a:t>
             </a:r>
           </a:p>
         </p:txBody>
@@ -5492,7 +5492,7 @@
                 </a:solidFill>
                 <a:latin typeface="Aptos"/>
               </a:rPr>
-              <a:t>73 / 62</a:t>
+              <a:t>73 / 55</a:t>
             </a:r>
           </a:p>
         </p:txBody>
@@ -5722,7 +5722,7 @@
                 </a:solidFill>
                 <a:latin typeface="Aptos"/>
               </a:rPr>
-              <a:t>129 / 6</a:t>
+              <a:t>123 / 5</a:t>
             </a:r>
           </a:p>
         </p:txBody>
@@ -5879,7 +5879,7 @@
                 </a:solidFill>
                 <a:latin typeface="Aptos"/>
               </a:rPr>
-              <a:t>Respuesta: </a:t>
+              <a:t>Respuesta: el P90 es $4.106.400. Lo superan 128 ofertas (10,1%). De ellas, 73 son CRUCH y 55 privadas; 123 están en Concepción y 5 en Biobío.</a:t>
             </a:r>
             <a:r>
               <a:rPr sz="960">
@@ -5888,7 +5888,7 @@
                 </a:solidFill>
                 <a:latin typeface="Aptos"/>
               </a:rPr>
-              <a:t>Sí. 135 ofertas superan el límite de $4.026.000. Salud y Tecnología concentran 39 ofertas altas cada una, y la duración mediana de este grupo es 10 semestres frente a 5 en el resto.</a:t>
+              <a:t/>
             </a:r>
           </a:p>
         </p:txBody>
@@ -6105,7 +6105,7 @@
                 </a:solidFill>
                 <a:latin typeface="Aptos"/>
               </a:rPr>
-              <a:t>¿Qué caracteriza a las ofertas de arancel alto?</a:t>
+              <a:t>¿Cómo es el grupo de ofertas sobre P90?</a:t>
             </a:r>
           </a:p>
         </p:txBody>
@@ -6140,7 +6140,7 @@
                 </a:solidFill>
                 <a:latin typeface="Aptos"/>
               </a:rPr>
-              <a:t>Estas variables describen el grupo detectado; no se interpretan como causas del precio.</a:t>
+              <a:t>Describimos el 10% superior de aranceles. Estas variables no explican la causa del precio.</a:t>
             </a:r>
           </a:p>
         </p:txBody>
@@ -6405,7 +6405,7 @@
                 </a:solidFill>
                 <a:latin typeface="Aptos"/>
               </a:rPr>
-              <a:t>62 privadas</a:t>
+              <a:t>55 privadas</a:t>
             </a:r>
           </a:p>
         </p:txBody>
@@ -6600,7 +6600,7 @@
                 </a:solidFill>
                 <a:latin typeface="Aptos"/>
               </a:rPr>
-              <a:t>39 Salud</a:t>
+              <a:t>38 Salud</a:t>
             </a:r>
           </a:p>
         </p:txBody>
@@ -6635,7 +6635,7 @@
                 </a:solidFill>
                 <a:latin typeface="Aptos"/>
               </a:rPr>
-              <a:t>39 Tecnología</a:t>
+              <a:t>38 Tecnología</a:t>
             </a:r>
           </a:p>
         </p:txBody>
@@ -6830,7 +6830,7 @@
                 </a:solidFill>
                 <a:latin typeface="Aptos"/>
               </a:rPr>
-              <a:t>129 Concepción</a:t>
+              <a:t>123 Concepción</a:t>
             </a:r>
           </a:p>
         </p:txBody>
@@ -6865,7 +6865,7 @@
                 </a:solidFill>
                 <a:latin typeface="Aptos"/>
               </a:rPr>
-              <a:t>6 Biobío</a:t>
+              <a:t>5 Biobío</a:t>
             </a:r>
           </a:p>
         </p:txBody>
@@ -7217,7 +7217,7 @@
                 </a:solidFill>
                 <a:latin typeface="Aptos"/>
               </a:rPr>
-              <a:t>Lectura: </a:t>
+              <a:t>Lectura: vemos diferencias por institución, área, provincia y duración, pero ninguna de ellas puede presentarse como causa del arancel.</a:t>
             </a:r>
             <a:r>
               <a:rPr sz="960">
@@ -7226,7 +7226,7 @@
                 </a:solidFill>
                 <a:latin typeface="Aptos"/>
               </a:rPr>
-              <a:t>Las ofertas altas aparecen asociadas con determinadas instituciones, áreas, territorio y duración. La base no permite afirmar que alguna de estas variables sea la causa del precio.</a:t>
+              <a:t/>
             </a:r>
           </a:p>
         </p:txBody>
@@ -7478,7 +7478,7 @@
                 </a:solidFill>
                 <a:latin typeface="Aptos"/>
               </a:rPr>
-              <a:t>La proporción y el volumen absoluto cuentan historias distintas.</a:t>
+              <a:t>Porcentaje y cantidad no significan lo mismo: debemos mirar ambos.</a:t>
             </a:r>
           </a:p>
         </p:txBody>
@@ -8355,7 +8355,7 @@
                 </a:solidFill>
                 <a:latin typeface="Aptos"/>
               </a:rPr>
-              <a:t>Hallazgo territorial: </a:t>
+              <a:t>En simple: Arauco tiene el mayor porcentaje dentro de su provincia, pero Concepción tiene muchas más matrículas transformadoras en cantidad total.</a:t>
             </a:r>
             <a:r>
               <a:rPr sz="960">
@@ -8364,7 +8364,7 @@
                 </a:solidFill>
                 <a:latin typeface="Aptos"/>
               </a:rPr>
-              <a:t>Arauco tiene la mayor proporción relativa de matrícula transformadora, pero Concepción concentra por lejos el mayor volumen absoluto. No confundimos porcentaje con cantidad.</a:t>
+              <a:t/>
             </a:r>
           </a:p>
         </p:txBody>
@@ -8581,7 +8581,7 @@
                 </a:solidFill>
                 <a:latin typeface="Aptos"/>
               </a:rPr>
-              <a:t>Interpretar bien también es parte de la nota</a:t>
+              <a:t>Qué podemos concluir y qué no</a:t>
             </a:r>
           </a:p>
         </p:txBody>
@@ -8616,7 +8616,7 @@
                 </a:solidFill>
                 <a:latin typeface="Aptos"/>
               </a:rPr>
-              <a:t>La rúbrica exige resultados correctos y una interpretación coherente con el análisis.</a:t>
+              <a:t>Los datos permiten describir diferencias y asociaciones, pero no demostrar causas.</a:t>
             </a:r>
           </a:p>
         </p:txBody>
@@ -9306,7 +9306,7 @@
                 </a:solidFill>
                 <a:latin typeface="Aptos"/>
               </a:rPr>
-              <a:t>Qué ofertas superan el criterio Q3 + 1,5 × RIC.</a:t>
+              <a:t>Qué ofertas quedan por sobre el percentil 90.</a:t>
             </a:r>
           </a:p>
         </p:txBody>
@@ -10833,7 +10833,7 @@
                 </a:solidFill>
                 <a:latin typeface="Aptos"/>
               </a:rPr>
-              <a:t>135 de 1.273 ofertas superan el límite de $4.026.000 definido con Q3 + 1,5 × RIC.</a:t>
+              <a:t>128 de 1.273 ofertas superan el P90 de $4.106.400, equivalente a 10,1% del total.</a:t>
             </a:r>
           </a:p>
         </p:txBody>
@@ -10955,7 +10955,7 @@
                 </a:solidFill>
                 <a:latin typeface="Aptos"/>
               </a:rPr>
-              <a:t>Respuesta a la pregunta central: </a:t>
+              <a:t>Respuesta central: en 2021 el bloque productivo tiene mayor peso que el transformador. Es una fotografía descriptiva de la matrícula, no una prueba de déficit ni de causalidad.</a:t>
             </a:r>
             <a:r>
               <a:rPr sz="960">
@@ -10964,7 +10964,7 @@
                 </a:solidFill>
                 <a:latin typeface="Aptos"/>
               </a:rPr>
-              <a:t>La línea base 2021 muestra un capital humano con mayor peso relativo en actividades productivas tradicionales que en capacidades transformadoras. La brecha observada es descriptiva y abre una pregunta futura, no una conclusión causal.</a:t>
+              <a:t/>
             </a:r>
           </a:p>
         </p:txBody>
@@ -11606,7 +11606,7 @@
                 </a:solidFill>
                 <a:latin typeface="Aptos"/>
               </a:rPr>
-              <a:t>Notebook final: 71/71 celdas ejecutadas · 0 errores</a:t>
+              <a:t>Notebook final ejecutado · 0 errores</a:t>
             </a:r>
           </a:p>
         </p:txBody>
@@ -12336,7 +12336,7 @@
                           </a:solidFill>
                           <a:latin typeface="Aptos"/>
                         </a:rPr>
-                        <a:t>Preguntas 1 y 2</a:t>
+                        <a:t>Preguntas 1, 2 y 3</a:t>
                       </a:r>
                     </a:p>
                   </a:txBody>
@@ -12384,7 +12384,7 @@
                           </a:solidFill>
                           <a:latin typeface="Aptos"/>
                         </a:rPr>
-                        <a:t>rango, varianza, std, CV, RIC, agg, isin</a:t>
+                        <a:t>rango, std, CV, agg, isin</a:t>
                       </a:r>
                     </a:p>
                   </a:txBody>
@@ -12407,7 +12407,7 @@
                           </a:solidFill>
                           <a:latin typeface="Aptos"/>
                         </a:rPr>
-                        <a:t>Pregunta 3 y comparación entre grupos</a:t>
+                        <a:t>Dispersión general y comparación entre grupos</a:t>
                       </a:r>
                     </a:p>
                   </a:txBody>
@@ -12634,7 +12634,7 @@
                 </a:solidFill>
                 <a:latin typeface="Aptos"/>
               </a:rPr>
-              <a:t>ANEXO · Fórmulas que debes saber explicar</a:t>
+              <a:t>ANEXO · Conceptos que debes saber explicar</a:t>
             </a:r>
           </a:p>
         </p:txBody>
@@ -12669,7 +12669,7 @@
                 </a:solidFill>
                 <a:latin typeface="Aptos"/>
               </a:rPr>
-              <a:t>No basta con leerlas: debes decir qué mide cada una y por qué se usa.</a:t>
+              <a:t>La clave es poder explicar qué mide cada concepto y cuándo lo usamos en el trabajo.</a:t>
             </a:r>
           </a:p>
         </p:txBody>
@@ -13234,7 +13234,7 @@
                 </a:solidFill>
                 <a:latin typeface="Aptos"/>
               </a:rPr>
-              <a:t>Rango intercuartílico</a:t>
+              <a:t>Percentil 90</a:t>
             </a:r>
           </a:p>
         </p:txBody>
@@ -13269,7 +13269,7 @@
                 </a:solidFill>
                 <a:latin typeface="Aptos"/>
               </a:rPr>
-              <a:t>RIC = Q3 − Q1</a:t>
+              <a:t>quantile(0.90)</a:t>
             </a:r>
           </a:p>
         </p:txBody>
@@ -13304,7 +13304,7 @@
                 </a:solidFill>
                 <a:latin typeface="Aptos"/>
               </a:rPr>
-              <a:t>Amplitud del 50% central de los datos.</a:t>
+              <a:t>Valor que deja aproximadamente 90% de los datos en o bajo ese punto.</a:t>
             </a:r>
           </a:p>
         </p:txBody>
@@ -13384,7 +13384,7 @@
                 </a:solidFill>
                 <a:latin typeface="Aptos"/>
               </a:rPr>
-              <a:t>Límite superior</a:t>
+              <a:t>Desviación estándar</a:t>
             </a:r>
           </a:p>
         </p:txBody>
@@ -13419,7 +13419,7 @@
                 </a:solidFill>
                 <a:latin typeface="Aptos"/>
               </a:rPr>
-              <a:t>Q3 + 1,5 × RIC</a:t>
+              <a:t>std()</a:t>
             </a:r>
           </a:p>
         </p:txBody>
@@ -13454,7 +13454,7 @@
                 </a:solidFill>
                 <a:latin typeface="Aptos"/>
               </a:rPr>
-              <a:t>Criterio para identificar valores atípicamente altos.</a:t>
+              <a:t>Mide cuánto se alejan los valores respecto de su media, en la escala original.</a:t>
             </a:r>
           </a:p>
         </p:txBody>
@@ -14431,7 +14431,7 @@
                 </a:solidFill>
                 <a:latin typeface="Aptos"/>
               </a:rPr>
-              <a:t>¿Qué es RIC?</a:t>
+              <a:t>¿Por qué usamos P90?</a:t>
             </a:r>
           </a:p>
         </p:txBody>
@@ -14466,7 +14466,7 @@
                 </a:solidFill>
                 <a:latin typeface="Aptos"/>
               </a:rPr>
-              <a:t>Es Q3 menos Q1: la amplitud que contiene el 50% central de los datos.</a:t>
+              <a:t>Porque permite separar de forma objetiva aproximadamente el 10% de ofertas con arancel más alto usando percentiles vistos en clase.</a:t>
             </a:r>
           </a:p>
         </p:txBody>
@@ -14833,7 +14833,7 @@
                 </a:solidFill>
                 <a:latin typeface="Aptos"/>
               </a:rPr>
-              <a:t>Una misma base exige distintas unidades de análisis según la pregunta.</a:t>
+              <a:t>Usamos la misma base, pero cada pregunta necesita una unidad de análisis distinta.</a:t>
             </a:r>
           </a:p>
         </p:txBody>
@@ -15328,7 +15328,7 @@
                 </a:solidFill>
                 <a:latin typeface="Aptos"/>
               </a:rPr>
-              <a:t>personas y estructura formativa</a:t>
+              <a:t>matrículas y estructura formativa</a:t>
             </a:r>
           </a:p>
         </p:txBody>
@@ -15558,7 +15558,7 @@
                 </a:solidFill>
                 <a:latin typeface="Aptos"/>
               </a:rPr>
-              <a:t>análisis de arancel asociado a matrículas</a:t>
+              <a:t>matrículas con arancel mayor que $0</a:t>
             </a:r>
           </a:p>
         </p:txBody>
@@ -15788,7 +15788,7 @@
                 </a:solidFill>
                 <a:latin typeface="Aptos"/>
               </a:rPr>
-              <a:t>comparación real de precios</a:t>
+              <a:t>precios sin repetir la misma oferta</a:t>
             </a:r>
           </a:p>
         </p:txBody>
@@ -15910,7 +15910,7 @@
                 </a:solidFill>
                 <a:latin typeface="Aptos"/>
               </a:rPr>
-              <a:t>Decisión metodológica: </a:t>
+              <a:t>En simple: para comparar precios, una misma carrera no puede repetir su arancel por cada estudiante. Por eso trabajamos con 1.273 ofertas únicas.</a:t>
             </a:r>
             <a:r>
               <a:rPr sz="960">
@@ -15919,7 +15919,7 @@
                 </a:solidFill>
                 <a:latin typeface="Aptos"/>
               </a:rPr>
-              <a:t>Para estudiar cuánto cuesta una carrera no contamos el mismo arancel una vez por cada estudiante. Por eso eliminamos ofertas repetidas y trabajamos con 1.273 ofertas únicas.</a:t>
+              <a:t/>
             </a:r>
           </a:p>
         </p:txBody>
@@ -16596,7 +16596,7 @@
                 </a:solidFill>
                 <a:latin typeface="Aptos"/>
               </a:rPr>
-              <a:t>Herramientas estadísticas utilizadas</a:t>
+              <a:t>Qué herramientas usamos y para qué</a:t>
             </a:r>
           </a:p>
         </p:txBody>
@@ -16631,7 +16631,7 @@
                 </a:solidFill>
                 <a:latin typeface="Aptos"/>
               </a:rPr>
-              <a:t>El notebook aplica los contenidos de los laboratorios del profesor, no técnicas externas al curso.</a:t>
+              <a:t>Cada herramienta del notebook corresponde a contenidos trabajados en los laboratorios del profesor.</a:t>
             </a:r>
           </a:p>
         </p:txBody>
@@ -16861,7 +16861,7 @@
                 </a:solidFill>
                 <a:latin typeface="Aptos"/>
               </a:rPr>
-              <a:t>fi · hi · acumuladas</a:t>
+              <a:t>cuántos · porcentajes · acumulados</a:t>
             </a:r>
           </a:p>
         </p:txBody>
@@ -17091,7 +17091,7 @@
                 </a:solidFill>
                 <a:latin typeface="Aptos"/>
               </a:rPr>
-              <a:t>media · mediana · moda</a:t>
+              <a:t>valor típico o central</a:t>
             </a:r>
           </a:p>
         </p:txBody>
@@ -17321,7 +17321,7 @@
                 </a:solidFill>
                 <a:latin typeface="Aptos"/>
               </a:rPr>
-              <a:t>P25 · P50 · P75 · P90</a:t>
+              <a:t>posición dentro de la distribución</a:t>
             </a:r>
           </a:p>
         </p:txBody>
@@ -17551,7 +17551,7 @@
                 </a:solidFill>
                 <a:latin typeface="Aptos"/>
               </a:rPr>
-              <a:t>rango · varianza · DE · CV · RIC</a:t>
+              <a:t>rango · desviación estándar · CV</a:t>
             </a:r>
           </a:p>
         </p:txBody>
@@ -17586,7 +17586,7 @@
                 </a:solidFill>
                 <a:latin typeface="Aptos"/>
               </a:rPr>
-              <a:t>var() · std()</a:t>
+              <a:t>std()</a:t>
             </a:r>
           </a:p>
         </p:txBody>
@@ -17781,7 +17781,7 @@
                 </a:solidFill>
                 <a:latin typeface="Aptos"/>
               </a:rPr>
-              <a:t>cruces y comparación entre grupos</a:t>
+              <a:t>comparar dos variables o grupos</a:t>
             </a:r>
           </a:p>
         </p:txBody>
@@ -17938,7 +17938,7 @@
                 </a:solidFill>
                 <a:latin typeface="Aptos"/>
               </a:rPr>
-              <a:t>Criterio de evaluación: </a:t>
+              <a:t>Idea clave: primero elegimos la herramienta, después calculamos, mostramos el resultado y finalmente lo interpretamos.</a:t>
             </a:r>
             <a:r>
               <a:rPr sz="960">
@@ -17947,7 +17947,7 @@
                 </a:solidFill>
                 <a:latin typeface="Aptos"/>
               </a:rPr>
-              <a:t>Cada resultado de la presentación sigue la secuencia que exige la rúbrica: herramienta seleccionada → cálculo → resultado → interpretación.</a:t>
+              <a:t/>
             </a:r>
           </a:p>
         </p:txBody>
@@ -18575,7 +18575,7 @@
                 </a:solidFill>
                 <a:latin typeface="Aptos"/>
               </a:rPr>
-              <a:t>La distribución global es relativamente equilibrada, aunque cambia según el área de estudio.</a:t>
+              <a:t>En total hay más mujeres (54,3%) que hombres (45,7%); la distribución cambia según el área.</a:t>
             </a:r>
           </a:p>
         </p:txBody>
@@ -19737,7 +19737,7 @@
                 </a:solidFill>
                 <a:latin typeface="Aptos"/>
               </a:rPr>
-              <a:t>Lectura descriptiva: </a:t>
+              <a:t>Lectura: Tecnología (27,6%) y Salud (24,3%) concentran 51,9% de la matrícula. La base muestra el patrón, no su causa.</a:t>
             </a:r>
             <a:r>
               <a:rPr sz="960">
@@ -19746,7 +19746,7 @@
                 </a:solidFill>
                 <a:latin typeface="Aptos"/>
               </a:rPr>
-              <a:t>Tecnología y Salud concentran más de la mitad de la matrícula observada. Esta es una descripción de la base, no una explicación causal de por qué ocurre.</a:t>
+              <a:t/>
             </a:r>
           </a:p>
         </p:txBody>
@@ -20869,7 +20869,7 @@
                 </a:solidFill>
                 <a:latin typeface="Aptos"/>
               </a:rPr>
-              <a:t>Agrupamos carreras en familias estratégicas para construir una lectura regional del capital humano.</a:t>
+              <a:t>Agrupamos carreras en 9 familias para comparar formación productiva y formación transformadora.</a:t>
             </a:r>
           </a:p>
         </p:txBody>
@@ -22466,7 +22466,7 @@
                 </a:solidFill>
                 <a:latin typeface="Aptos"/>
               </a:rPr>
-              <a:t>Regla de clasificación: </a:t>
+              <a:t>Importante: esta clasificación fue creada para el trabajo. No es oficial y cada carrera aparece en una sola familia para no contarla dos veces.</a:t>
             </a:r>
             <a:r>
               <a:rPr sz="960">
@@ -22475,7 +22475,7 @@
                 </a:solidFill>
                 <a:latin typeface="Aptos"/>
               </a:rPr>
-              <a:t>Es una taxonomía creada para este trabajo, no una clasificación oficial. Cada carrera se asigna a una sola familia para evitar doble conteo.</a:t>
+              <a:t/>
             </a:r>
           </a:p>
         </p:txBody>
@@ -22727,7 +22727,7 @@
                 </a:solidFill>
                 <a:latin typeface="Aptos"/>
               </a:rPr>
-              <a:t>La comparación describe la composición de la matrícula de pregrado en 2021.</a:t>
+              <a:t>Comparamos cuánto pesa cada bloque dentro de la matrícula de pregrado de 2021.</a:t>
             </a:r>
           </a:p>
         </p:txBody>
@@ -23434,7 +23434,7 @@
                 </a:solidFill>
                 <a:latin typeface="Aptos"/>
               </a:rPr>
-              <a:t>Interpretación correcta: </a:t>
+              <a:t>En simple: hay cerca de 2,9 matrículas productivas por cada transformadora. Es una diferencia descriptiva, no prueba un déficit profesional.</a:t>
             </a:r>
             <a:r>
               <a:rPr sz="960">
@@ -23443,7 +23443,7 @@
                 </a:solidFill>
                 <a:latin typeface="Aptos"/>
               </a:rPr>
-              <a:t>En la fotografía educativa de 2021, el bloque productivo tiene un peso cercano a tres veces el transformador. Esto no demuestra déficit de profesionales ni atraso de la educación.</a:t>
+              <a:t/>
             </a:r>
           </a:p>
         </p:txBody>
@@ -23695,7 +23695,7 @@
                 </a:solidFill>
                 <a:latin typeface="Aptos"/>
               </a:rPr>
-              <a:t>Criterio: comparar la mediana del arancel usando 1.273 ofertas académicas únicas.</a:t>
+              <a:t>Usamos 1.273 ofertas únicas y comparamos su arancel mediano por área.</a:t>
             </a:r>
           </a:p>
         </p:txBody>
@@ -25337,7 +25337,7 @@
                 </a:solidFill>
                 <a:latin typeface="Aptos"/>
               </a:rPr>
-              <a:t>Respuesta: </a:t>
+              <a:t>Respuesta: Sí. La mediana global es $2.030.000. Derecho, Ciencias Básicas y Agropecuaria están por encima. Usamos mediana porque los valores extremos la afectan menos.</a:t>
             </a:r>
             <a:r>
               <a:rPr sz="960">
@@ -25346,7 +25346,7 @@
                 </a:solidFill>
                 <a:latin typeface="Aptos"/>
               </a:rPr>
-              <a:t>Sí. Derecho, Ciencias Básicas y Agropecuaria presentan medianas superiores a la mediana global de $2.030.000. Usamos mediana porque es menos sensible a valores extremos.</a:t>
+              <a:t/>
             </a:r>
           </a:p>
         </p:txBody>
@@ -25598,7 +25598,7 @@
                 </a:solidFill>
                 <a:latin typeface="Aptos"/>
               </a:rPr>
-              <a:t>Comparamos grupos de edad con tablas de contingencia y frecuencias relativas.</a:t>
+              <a:t>Comparamos qué tipo de institución aparece con mayor frecuencia en dos grupos de edad.</a:t>
             </a:r>
           </a:p>
         </p:txBody>
@@ -26625,7 +26625,7 @@
                 </a:solidFill>
                 <a:latin typeface="Aptos"/>
               </a:rPr>
-              <a:t>Interpretación: </a:t>
+              <a:t>Respuesta: la composición institucional cambia según el grupo de edad. Observamos una asociación, pero no podemos decir que la edad cause la elección.</a:t>
             </a:r>
             <a:r>
               <a:rPr sz="960">
@@ -26634,7 +26634,7 @@
                 </a:solidFill>
                 <a:latin typeface="Aptos"/>
               </a:rPr>
-              <a:t>La distribución institucional cambia entre grupos de edad. La base permite describir asociación, pero no afirmar que la edad cause la elección de institución.</a:t>
+              <a:t/>
             </a:r>
           </a:p>
         </p:txBody>

--- a/presentacion/Del_Acero_al_Algoritmo_Estilo_Profesor.pptx
+++ b/presentacion/Del_Acero_al_Algoritmo_Estilo_Profesor.pptx
@@ -3737,7 +3737,7 @@
                 </a:solidFill>
                 <a:latin typeface="Noto Sans"/>
               </a:rPr>
-              <a:t>Usamos el percentil 90 (P90) para estudiar aproximadamente el 10% superior de las ofertas.</a:t>
+              <a:t>La pauta pide diseñar un criterio reproducible; usamos el percentil 90 (P90), trabajado en el Laboratorio 4.</a:t>
             </a:r>
           </a:p>
         </p:txBody>
@@ -9483,7 +9483,7 @@
                 </a:solidFill>
                 <a:latin typeface="Noto Sans"/>
               </a:rPr>
-              <a:t>read_excel, head, tail, info, filtros</a:t>
+              <a:t>read_excel, head, info, filtros</a:t>
             </a:r>
           </a:p>
         </p:txBody>
@@ -9563,7 +9563,7 @@
                 </a:solidFill>
                 <a:latin typeface="Noto Sans"/>
               </a:rPr>
-              <a:t>Carga y preparación de la base</a:t>
+              <a:t>Carga, revisión y preparación</a:t>
             </a:r>
           </a:p>
         </p:txBody>
@@ -9963,7 +9963,7 @@
                 </a:solidFill>
                 <a:latin typeface="Noto Sans"/>
               </a:rPr>
-              <a:t>groupby().size(), relativas, acumuladas</a:t>
+              <a:t>groupby().size(), relativas, cumsum()</a:t>
             </a:r>
           </a:p>
         </p:txBody>
@@ -10203,7 +10203,7 @@
                 </a:solidFill>
                 <a:latin typeface="Noto Sans"/>
               </a:rPr>
-              <a:t>barras, circular, histogramas, scatter</a:t>
+              <a:t>barras y subplots</a:t>
             </a:r>
           </a:p>
         </p:txBody>
@@ -10283,7 +10283,7 @@
                 </a:solidFill>
                 <a:latin typeface="Noto Sans"/>
               </a:rPr>
-              <a:t>Visualización de distribuciones</a:t>
+              <a:t>Distribuciones y comparación</a:t>
             </a:r>
           </a:p>
         </p:txBody>
@@ -11590,7 +11590,7 @@
                 </a:solidFill>
                 <a:latin typeface="Noto Sans"/>
               </a:rPr>
-              <a:t>Porque permite separar aproximadamente el 10% superior usando percentiles trabajados en clase.</a:t>
+              <a:t>Porque la pauta pide diseñar un criterio reproducible y el P90 usa percentiles trabajados en el Laboratorio 4.</a:t>
             </a:r>
           </a:p>
         </p:txBody>
@@ -14309,6 +14309,41 @@
                 <a:latin typeface="Noto Sans"/>
               </a:rPr>
               <a:t>No repetimos el mismo arancel una vez por cada estudiante. Las 1.273 ofertas únicas permiten comparar precios sin que una carrera con más matrícula pese artificialmente más.</a:t>
+            </a:r>
+          </a:p>
+        </p:txBody>
+      </p:sp>
+      <p:sp>
+        <p:nvSpPr>
+          <p:cNvPr id="39" name="TextBox 38"/>
+          <p:cNvSpPr txBox="1"/>
+          <p:nvPr/>
+        </p:nvSpPr>
+        <p:spPr>
+          <a:xfrm>
+            <a:off x="713232" y="5742432"/>
+            <a:ext cx="10899648" cy="310896"/>
+          </a:xfrm>
+          <a:prstGeom prst="rect">
+            <a:avLst/>
+          </a:prstGeom>
+          <a:noFill/>
+        </p:spPr>
+        <p:txBody>
+          <a:bodyPr wrap="square" anchor="ctr" lIns="18288" rIns="18288" tIns="18288" bIns="18288">
+            <a:spAutoFit/>
+          </a:bodyPr>
+          <a:lstStyle/>
+          <a:p>
+            <a:pPr algn="ctr"/>
+            <a:r>
+              <a:rPr sz="850" b="1">
+                <a:solidFill>
+                  <a:srgbClr val="596C82"/>
+                </a:solidFill>
+                <a:latin typeface="Noto Sans"/>
+              </a:rPr>
+              <a:t>Control de calidad: 0 duplicados completos · nulos solo en acreditación · 26 registros con arancel $0 excluidos del análisis de precios.</a:t>
             </a:r>
           </a:p>
         </p:txBody>

--- a/presentacion/Del_Acero_al_Algoritmo_Estilo_Profesor.pptx
+++ b/presentacion/Del_Acero_al_Algoritmo_Estilo_Profesor.pptx
@@ -11590,7 +11590,7 @@
                 </a:solidFill>
                 <a:latin typeface="Noto Sans"/>
               </a:rPr>
-              <a:t>Porque la pauta pide diseñar un criterio reproducible y el P90 usa percentiles trabajados en el Laboratorio 4.</a:t>
+              <a:t>Porque necesitábamos un umbral reproducible y P90 usa percentiles trabajados en el Laboratorio 4.</a:t>
             </a:r>
           </a:p>
         </p:txBody>

--- a/presentacion/Del_Acero_al_Algoritmo_Estilo_Profesor.pptx
+++ b/presentacion/Del_Acero_al_Algoritmo_Estilo_Profesor.pptx
@@ -3737,7 +3737,7 @@
                 </a:solidFill>
                 <a:latin typeface="Noto Sans"/>
               </a:rPr>
-              <a:t>La pauta pide diseñar un criterio reproducible; usamos el percentil 90 (P90), trabajado en el Laboratorio 4.</a:t>
+              <a:t>Para operacionalizar “sustantivamente más caro”, usamos el percentil 90 (P90), trabajado en el Laboratorio 4.</a:t>
             </a:r>
           </a:p>
         </p:txBody>

--- a/presentacion/Del_Acero_al_Algoritmo_Estilo_Profesor.pptx
+++ b/presentacion/Del_Acero_al_Algoritmo_Estilo_Profesor.pptx
@@ -5723,8 +5723,8 @@
         </p:nvSpPr>
         <p:spPr>
           <a:xfrm>
-            <a:off x="713232" y="4956048"/>
-            <a:ext cx="10625328" cy="804672"/>
+            <a:off x="713232" y="4828032"/>
+            <a:ext cx="10625328" cy="1051560"/>
           </a:xfrm>
           <a:prstGeom prst="roundRect">
             <a:avLst/>
@@ -5768,14 +5768,14 @@
         </p:nvSpPr>
         <p:spPr>
           <a:xfrm>
-            <a:off x="713232" y="4956048"/>
-            <a:ext cx="32004" cy="804672"/>
+            <a:off x="713232" y="4828032"/>
+            <a:ext cx="32004" cy="1051560"/>
           </a:xfrm>
           <a:prstGeom prst="rect">
             <a:avLst/>
           </a:prstGeom>
           <a:solidFill>
-            <a:srgbClr val="00AD9F"/>
+            <a:srgbClr val="F59753"/>
           </a:solidFill>
           <a:ln>
             <a:noFill/>
@@ -5811,7 +5811,7 @@
         </p:nvSpPr>
         <p:spPr>
           <a:xfrm>
-            <a:off x="941832" y="5065776"/>
+            <a:off x="941832" y="4937760"/>
             <a:ext cx="10213848" cy="219456"/>
           </a:xfrm>
           <a:prstGeom prst="rect">
@@ -5833,7 +5833,7 @@
                 </a:solidFill>
                 <a:latin typeface="Noto Sans"/>
               </a:rPr>
-              <a:t>LECTURA</a:t>
+              <a:t>EXPLICACIÓN ENCONTRADA</a:t>
             </a:r>
           </a:p>
         </p:txBody>
@@ -5846,8 +5846,8 @@
         </p:nvSpPr>
         <p:spPr>
           <a:xfrm>
-            <a:off x="941832" y="5303520"/>
-            <a:ext cx="10213848" cy="384048"/>
+            <a:off x="941832" y="5175504"/>
+            <a:ext cx="10213848" cy="630936"/>
           </a:xfrm>
           <a:prstGeom prst="rect">
             <a:avLst/>
@@ -5868,7 +5868,7 @@
                 </a:solidFill>
                 <a:latin typeface="Noto Sans"/>
               </a:rPr>
-              <a:t>Las ofertas altas se concentran en determinados tipos de institución, áreas y territorio, y tienen mayor duración mediana. La base no demuestra que estas variables causen el precio.</a:t>
+              <a:t>Las ofertas sobre P90 se concentran en universidades, Salud y Tecnología, carreras de mayor duración y especialmente en Concepción. La concentración territorial aporta contexto regional; estas asociaciones no demuestran causalidad.</a:t>
             </a:r>
           </a:p>
         </p:txBody>
@@ -23822,7 +23822,7 @@
                 </a:solidFill>
                 <a:latin typeface="Noto Sans"/>
               </a:rPr>
-              <a:t>RESPUESTA</a:t>
+              <a:t>CRITERIO Y RESPUESTA</a:t>
             </a:r>
           </a:p>
         </p:txBody>
@@ -23857,7 +23857,7 @@
                 </a:solidFill>
                 <a:latin typeface="Noto Sans"/>
               </a:rPr>
-              <a:t>Sí. Derecho, Ciencias Básicas y Agropecuaria presentan medianas por encima de la mediana global. Usamos mediana porque los valores extremos la afectan menos.</a:t>
+              <a:t>Criterio: comparar la mediana por área con la mediana global, porque la mediana es menos sensible a valores extremos. Resultado: Derecho, Ciencias Básicas y Agropecuaria quedan por encima de $2.030.000.</a:t>
             </a:r>
           </a:p>
         </p:txBody>

--- a/presentacion/Del_Acero_al_Algoritmo_Estilo_Profesor.pptx
+++ b/presentacion/Del_Acero_al_Algoritmo_Estilo_Profesor.pptx
@@ -22,6 +22,7 @@
     <p:sldId id="270" r:id="rId21"/>
     <p:sldId id="271" r:id="rId22"/>
     <p:sldId id="272" r:id="rId23"/>
+    <p:sldId id="273" r:id="rId24"/>
   </p:sldIdLst>
   <p:sldSz cx="12191695" cy="6858000" type="screen4x3"/>
   <p:notesSz cx="6858000" cy="9144000"/>
@@ -12888,6 +12889,1864 @@
                 <a:latin typeface="Noto Sans"/>
               </a:rPr>
               <a:t>Resultado observado ≠ causa demostrada. En la defensa, usa “se observa”, “se asocia” o “la base muestra”.</a:t>
+            </a:r>
+          </a:p>
+        </p:txBody>
+      </p:sp>
+    </p:spTree>
+  </p:cSld>
+  <p:clrMapOvr>
+    <a:masterClrMapping/>
+  </p:clrMapOvr>
+</p:sld>
+</file>
+
+<file path=ppt/slides/slide18.xml><?xml version="1.0" encoding="utf-8"?>
+<p:sld xmlns:a="http://schemas.openxmlformats.org/drawingml/2006/main" xmlns:p="http://schemas.openxmlformats.org/presentationml/2006/main" xmlns:r="http://schemas.openxmlformats.org/officeDocument/2006/relationships">
+  <p:cSld>
+    <p:bg>
+      <p:bgPr>
+        <a:solidFill>
+          <a:srgbClr val="FFFFFF"/>
+        </a:solidFill>
+        <a:effectLst/>
+      </p:bgPr>
+    </p:bg>
+    <p:spTree>
+      <p:nvGrpSpPr>
+        <p:cNvPr id="1" name=""/>
+        <p:cNvGrpSpPr/>
+        <p:nvPr/>
+      </p:nvGrpSpPr>
+      <p:grpSpPr/>
+      <p:sp>
+        <p:nvSpPr>
+          <p:cNvPr id="2" name="Rectangle 1"/>
+          <p:cNvSpPr/>
+          <p:nvPr/>
+        </p:nvSpPr>
+        <p:spPr>
+          <a:xfrm>
+            <a:off x="0" y="0"/>
+            <a:ext cx="12191695" cy="50292"/>
+          </a:xfrm>
+          <a:prstGeom prst="rect">
+            <a:avLst/>
+          </a:prstGeom>
+          <a:solidFill>
+            <a:srgbClr val="00899A"/>
+          </a:solidFill>
+          <a:ln>
+            <a:noFill/>
+          </a:ln>
+        </p:spPr>
+        <p:style>
+          <a:lnRef idx="1">
+            <a:schemeClr val="accent1"/>
+          </a:lnRef>
+          <a:fillRef idx="3">
+            <a:schemeClr val="accent1"/>
+          </a:fillRef>
+          <a:effectRef idx="2">
+            <a:schemeClr val="accent1"/>
+          </a:effectRef>
+          <a:fontRef idx="minor">
+            <a:schemeClr val="lt1"/>
+          </a:fontRef>
+        </p:style>
+        <p:txBody>
+          <a:bodyPr rtlCol="0" anchor="ctr"/>
+          <a:lstStyle/>
+          <a:p>
+            <a:pPr algn="ctr"/>
+          </a:p>
+        </p:txBody>
+      </p:sp>
+      <p:sp>
+        <p:nvSpPr>
+          <p:cNvPr id="3" name="Rectangle 2"/>
+          <p:cNvSpPr/>
+          <p:nvPr/>
+        </p:nvSpPr>
+        <p:spPr>
+          <a:xfrm>
+            <a:off x="530352" y="438912"/>
+            <a:ext cx="41148" cy="384048"/>
+          </a:xfrm>
+          <a:prstGeom prst="rect">
+            <a:avLst/>
+          </a:prstGeom>
+          <a:solidFill>
+            <a:srgbClr val="00AD9F"/>
+          </a:solidFill>
+          <a:ln>
+            <a:noFill/>
+          </a:ln>
+        </p:spPr>
+        <p:style>
+          <a:lnRef idx="1">
+            <a:schemeClr val="accent1"/>
+          </a:lnRef>
+          <a:fillRef idx="3">
+            <a:schemeClr val="accent1"/>
+          </a:fillRef>
+          <a:effectRef idx="2">
+            <a:schemeClr val="accent1"/>
+          </a:effectRef>
+          <a:fontRef idx="minor">
+            <a:schemeClr val="lt1"/>
+          </a:fontRef>
+        </p:style>
+        <p:txBody>
+          <a:bodyPr rtlCol="0" anchor="ctr"/>
+          <a:lstStyle/>
+          <a:p>
+            <a:pPr algn="ctr"/>
+          </a:p>
+        </p:txBody>
+      </p:sp>
+      <p:sp>
+        <p:nvSpPr>
+          <p:cNvPr id="4" name="TextBox 3"/>
+          <p:cNvSpPr txBox="1"/>
+          <p:nvPr/>
+        </p:nvSpPr>
+        <p:spPr>
+          <a:xfrm>
+            <a:off x="713232" y="384048"/>
+            <a:ext cx="10378440" cy="566928"/>
+          </a:xfrm>
+          <a:prstGeom prst="rect">
+            <a:avLst/>
+          </a:prstGeom>
+          <a:noFill/>
+        </p:spPr>
+        <p:txBody>
+          <a:bodyPr wrap="square" anchor="ctr" lIns="18288" rIns="18288" tIns="18288" bIns="18288">
+            <a:spAutoFit/>
+          </a:bodyPr>
+          <a:lstStyle/>
+          <a:p>
+            <a:pPr algn="l"/>
+            <a:r>
+              <a:rPr sz="2500" b="1">
+                <a:solidFill>
+                  <a:srgbClr val="0E2D4B"/>
+                </a:solidFill>
+                <a:latin typeface="Noto Sans"/>
+              </a:rPr>
+              <a:t>ANEXO · Clasificación de variables</a:t>
+            </a:r>
+          </a:p>
+        </p:txBody>
+      </p:sp>
+      <p:sp>
+        <p:nvSpPr>
+          <p:cNvPr id="5" name="TextBox 4"/>
+          <p:cNvSpPr txBox="1"/>
+          <p:nvPr/>
+        </p:nvSpPr>
+        <p:spPr>
+          <a:xfrm>
+            <a:off x="11155680" y="384048"/>
+            <a:ext cx="502920" cy="365760"/>
+          </a:xfrm>
+          <a:prstGeom prst="rect">
+            <a:avLst/>
+          </a:prstGeom>
+          <a:noFill/>
+        </p:spPr>
+        <p:txBody>
+          <a:bodyPr wrap="square" anchor="ctr" lIns="18288" rIns="18288" tIns="18288" bIns="18288">
+            <a:spAutoFit/>
+          </a:bodyPr>
+          <a:lstStyle/>
+          <a:p>
+            <a:pPr algn="r"/>
+            <a:r>
+              <a:rPr sz="950" b="1">
+                <a:solidFill>
+                  <a:srgbClr val="596C82"/>
+                </a:solidFill>
+                <a:latin typeface="Noto Sans"/>
+              </a:rPr>
+              <a:t>18</a:t>
+            </a:r>
+          </a:p>
+        </p:txBody>
+      </p:sp>
+      <p:sp>
+        <p:nvSpPr>
+          <p:cNvPr id="6" name="TextBox 5"/>
+          <p:cNvSpPr txBox="1"/>
+          <p:nvPr/>
+        </p:nvSpPr>
+        <p:spPr>
+          <a:xfrm>
+            <a:off x="713232" y="950976"/>
+            <a:ext cx="10424160" cy="347472"/>
+          </a:xfrm>
+          <a:prstGeom prst="rect">
+            <a:avLst/>
+          </a:prstGeom>
+          <a:noFill/>
+        </p:spPr>
+        <p:txBody>
+          <a:bodyPr wrap="square" anchor="ctr" lIns="18288" rIns="18288" tIns="18288" bIns="18288">
+            <a:spAutoFit/>
+          </a:bodyPr>
+          <a:lstStyle/>
+          <a:p>
+            <a:pPr algn="l"/>
+            <a:r>
+              <a:rPr sz="1060" b="0">
+                <a:solidFill>
+                  <a:srgbClr val="596C82"/>
+                </a:solidFill>
+                <a:latin typeface="Noto Sans"/>
+              </a:rPr>
+              <a:t>Clasificamos las variables principales según el criterio trabajado en el Laboratorio 1.</a:t>
+            </a:r>
+          </a:p>
+        </p:txBody>
+      </p:sp>
+      <p:sp>
+        <p:nvSpPr>
+          <p:cNvPr id="7" name="TextBox 6"/>
+          <p:cNvSpPr txBox="1"/>
+          <p:nvPr/>
+        </p:nvSpPr>
+        <p:spPr>
+          <a:xfrm>
+            <a:off x="621792" y="6556248"/>
+            <a:ext cx="6766560" cy="182880"/>
+          </a:xfrm>
+          <a:prstGeom prst="rect">
+            <a:avLst/>
+          </a:prstGeom>
+          <a:noFill/>
+        </p:spPr>
+        <p:txBody>
+          <a:bodyPr wrap="square" anchor="ctr" lIns="18288" rIns="18288" tIns="18288" bIns="18288">
+            <a:spAutoFit/>
+          </a:bodyPr>
+          <a:lstStyle/>
+          <a:p>
+            <a:pPr algn="l"/>
+            <a:r>
+              <a:rPr sz="730" b="0">
+                <a:solidFill>
+                  <a:srgbClr val="758495"/>
+                </a:solidFill>
+                <a:latin typeface="Noto Sans"/>
+              </a:rPr>
+              <a:t>EduBío 360 · Estadística Descriptiva · Biobío 2021</a:t>
+            </a:r>
+          </a:p>
+        </p:txBody>
+      </p:sp>
+      <p:sp>
+        <p:nvSpPr>
+          <p:cNvPr id="8" name="Rounded Rectangle 7"/>
+          <p:cNvSpPr/>
+          <p:nvPr/>
+        </p:nvSpPr>
+        <p:spPr>
+          <a:xfrm>
+            <a:off x="658368" y="1481328"/>
+            <a:ext cx="5321808" cy="4315968"/>
+          </a:xfrm>
+          <a:prstGeom prst="roundRect">
+            <a:avLst/>
+          </a:prstGeom>
+          <a:solidFill>
+            <a:srgbClr val="F6F9FC"/>
+          </a:solidFill>
+          <a:ln w="8890">
+            <a:solidFill>
+              <a:srgbClr val="DFE6ED"/>
+            </a:solidFill>
+          </a:ln>
+        </p:spPr>
+        <p:style>
+          <a:lnRef idx="1">
+            <a:schemeClr val="accent1"/>
+          </a:lnRef>
+          <a:fillRef idx="3">
+            <a:schemeClr val="accent1"/>
+          </a:fillRef>
+          <a:effectRef idx="2">
+            <a:schemeClr val="accent1"/>
+          </a:effectRef>
+          <a:fontRef idx="minor">
+            <a:schemeClr val="lt1"/>
+          </a:fontRef>
+        </p:style>
+        <p:txBody>
+          <a:bodyPr rtlCol="0" anchor="ctr"/>
+          <a:lstStyle/>
+          <a:p>
+            <a:pPr algn="ctr"/>
+          </a:p>
+        </p:txBody>
+      </p:sp>
+      <p:sp>
+        <p:nvSpPr>
+          <p:cNvPr id="9" name="Rounded Rectangle 8"/>
+          <p:cNvSpPr/>
+          <p:nvPr/>
+        </p:nvSpPr>
+        <p:spPr>
+          <a:xfrm>
+            <a:off x="6199632" y="1481328"/>
+            <a:ext cx="5321808" cy="4315968"/>
+          </a:xfrm>
+          <a:prstGeom prst="roundRect">
+            <a:avLst/>
+          </a:prstGeom>
+          <a:solidFill>
+            <a:srgbClr val="F6F9FC"/>
+          </a:solidFill>
+          <a:ln w="8890">
+            <a:solidFill>
+              <a:srgbClr val="DFE6ED"/>
+            </a:solidFill>
+          </a:ln>
+        </p:spPr>
+        <p:style>
+          <a:lnRef idx="1">
+            <a:schemeClr val="accent1"/>
+          </a:lnRef>
+          <a:fillRef idx="3">
+            <a:schemeClr val="accent1"/>
+          </a:fillRef>
+          <a:effectRef idx="2">
+            <a:schemeClr val="accent1"/>
+          </a:effectRef>
+          <a:fontRef idx="minor">
+            <a:schemeClr val="lt1"/>
+          </a:fontRef>
+        </p:style>
+        <p:txBody>
+          <a:bodyPr rtlCol="0" anchor="ctr"/>
+          <a:lstStyle/>
+          <a:p>
+            <a:pPr algn="ctr"/>
+          </a:p>
+        </p:txBody>
+      </p:sp>
+      <p:sp>
+        <p:nvSpPr>
+          <p:cNvPr id="10" name="TextBox 9"/>
+          <p:cNvSpPr txBox="1"/>
+          <p:nvPr/>
+        </p:nvSpPr>
+        <p:spPr>
+          <a:xfrm>
+            <a:off x="932688" y="1737360"/>
+            <a:ext cx="4480560" cy="347472"/>
+          </a:xfrm>
+          <a:prstGeom prst="rect">
+            <a:avLst/>
+          </a:prstGeom>
+          <a:noFill/>
+        </p:spPr>
+        <p:txBody>
+          <a:bodyPr wrap="square" anchor="ctr" lIns="18288" rIns="18288" tIns="18288" bIns="18288">
+            <a:spAutoFit/>
+          </a:bodyPr>
+          <a:lstStyle/>
+          <a:p>
+            <a:pPr algn="l"/>
+            <a:r>
+              <a:rPr sz="1350" b="1">
+                <a:solidFill>
+                  <a:srgbClr val="0E2D4B"/>
+                </a:solidFill>
+                <a:latin typeface="Noto Sans"/>
+              </a:rPr>
+              <a:t>VARIABLES CUALITATIVAS</a:t>
+            </a:r>
+          </a:p>
+        </p:txBody>
+      </p:sp>
+      <p:sp>
+        <p:nvSpPr>
+          <p:cNvPr id="11" name="TextBox 10"/>
+          <p:cNvSpPr txBox="1"/>
+          <p:nvPr/>
+        </p:nvSpPr>
+        <p:spPr>
+          <a:xfrm>
+            <a:off x="6473952" y="1737360"/>
+            <a:ext cx="4480560" cy="347472"/>
+          </a:xfrm>
+          <a:prstGeom prst="rect">
+            <a:avLst/>
+          </a:prstGeom>
+          <a:noFill/>
+        </p:spPr>
+        <p:txBody>
+          <a:bodyPr wrap="square" anchor="ctr" lIns="18288" rIns="18288" tIns="18288" bIns="18288">
+            <a:spAutoFit/>
+          </a:bodyPr>
+          <a:lstStyle/>
+          <a:p>
+            <a:pPr algn="l"/>
+            <a:r>
+              <a:rPr sz="1350" b="1">
+                <a:solidFill>
+                  <a:srgbClr val="0E2D4B"/>
+                </a:solidFill>
+                <a:latin typeface="Noto Sans"/>
+              </a:rPr>
+              <a:t>VARIABLES CUANTITATIVAS</a:t>
+            </a:r>
+          </a:p>
+        </p:txBody>
+      </p:sp>
+      <p:sp>
+        <p:nvSpPr>
+          <p:cNvPr id="12" name="Rounded Rectangle 11"/>
+          <p:cNvSpPr/>
+          <p:nvPr/>
+        </p:nvSpPr>
+        <p:spPr>
+          <a:xfrm>
+            <a:off x="932688" y="2212848"/>
+            <a:ext cx="1051560" cy="310896"/>
+          </a:xfrm>
+          <a:prstGeom prst="roundRect">
+            <a:avLst/>
+          </a:prstGeom>
+          <a:solidFill>
+            <a:srgbClr val="00AD9F"/>
+          </a:solidFill>
+          <a:ln>
+            <a:noFill/>
+          </a:ln>
+        </p:spPr>
+        <p:style>
+          <a:lnRef idx="1">
+            <a:schemeClr val="accent1"/>
+          </a:lnRef>
+          <a:fillRef idx="3">
+            <a:schemeClr val="accent1"/>
+          </a:fillRef>
+          <a:effectRef idx="2">
+            <a:schemeClr val="accent1"/>
+          </a:effectRef>
+          <a:fontRef idx="minor">
+            <a:schemeClr val="lt1"/>
+          </a:fontRef>
+        </p:style>
+        <p:txBody>
+          <a:bodyPr rtlCol="0" anchor="ctr"/>
+          <a:lstStyle/>
+          <a:p>
+            <a:pPr algn="ctr"/>
+          </a:p>
+        </p:txBody>
+      </p:sp>
+      <p:sp>
+        <p:nvSpPr>
+          <p:cNvPr id="13" name="TextBox 12"/>
+          <p:cNvSpPr txBox="1"/>
+          <p:nvPr/>
+        </p:nvSpPr>
+        <p:spPr>
+          <a:xfrm>
+            <a:off x="969264" y="2231136"/>
+            <a:ext cx="978407" cy="256032"/>
+          </a:xfrm>
+          <a:prstGeom prst="rect">
+            <a:avLst/>
+          </a:prstGeom>
+          <a:noFill/>
+        </p:spPr>
+        <p:txBody>
+          <a:bodyPr wrap="square" anchor="ctr" lIns="18288" rIns="18288" tIns="18288" bIns="18288">
+            <a:spAutoFit/>
+          </a:bodyPr>
+          <a:lstStyle/>
+          <a:p>
+            <a:pPr algn="ctr"/>
+            <a:r>
+              <a:rPr sz="819" b="1">
+                <a:solidFill>
+                  <a:srgbClr val="FFFFFF"/>
+                </a:solidFill>
+                <a:latin typeface="Noto Sans"/>
+              </a:rPr>
+              <a:t>Nominal</a:t>
+            </a:r>
+          </a:p>
+        </p:txBody>
+      </p:sp>
+      <p:sp>
+        <p:nvSpPr>
+          <p:cNvPr id="14" name="TextBox 13"/>
+          <p:cNvSpPr txBox="1"/>
+          <p:nvPr/>
+        </p:nvSpPr>
+        <p:spPr>
+          <a:xfrm>
+            <a:off x="2148840" y="2194560"/>
+            <a:ext cx="3401568" cy="310896"/>
+          </a:xfrm>
+          <a:prstGeom prst="rect">
+            <a:avLst/>
+          </a:prstGeom>
+          <a:noFill/>
+        </p:spPr>
+        <p:txBody>
+          <a:bodyPr wrap="square" anchor="ctr" lIns="18288" rIns="18288" tIns="18288" bIns="18288">
+            <a:spAutoFit/>
+          </a:bodyPr>
+          <a:lstStyle/>
+          <a:p>
+            <a:pPr algn="l"/>
+            <a:r>
+              <a:rPr sz="940" b="1">
+                <a:solidFill>
+                  <a:srgbClr val="243B54"/>
+                </a:solidFill>
+                <a:latin typeface="Noto Sans"/>
+              </a:rPr>
+              <a:t>GÉNERO</a:t>
+            </a:r>
+          </a:p>
+        </p:txBody>
+      </p:sp>
+      <p:sp>
+        <p:nvSpPr>
+          <p:cNvPr id="15" name="Rounded Rectangle 14"/>
+          <p:cNvSpPr/>
+          <p:nvPr/>
+        </p:nvSpPr>
+        <p:spPr>
+          <a:xfrm>
+            <a:off x="932688" y="2743200"/>
+            <a:ext cx="1051560" cy="310896"/>
+          </a:xfrm>
+          <a:prstGeom prst="roundRect">
+            <a:avLst/>
+          </a:prstGeom>
+          <a:solidFill>
+            <a:srgbClr val="F59753"/>
+          </a:solidFill>
+          <a:ln>
+            <a:noFill/>
+          </a:ln>
+        </p:spPr>
+        <p:style>
+          <a:lnRef idx="1">
+            <a:schemeClr val="accent1"/>
+          </a:lnRef>
+          <a:fillRef idx="3">
+            <a:schemeClr val="accent1"/>
+          </a:fillRef>
+          <a:effectRef idx="2">
+            <a:schemeClr val="accent1"/>
+          </a:effectRef>
+          <a:fontRef idx="minor">
+            <a:schemeClr val="lt1"/>
+          </a:fontRef>
+        </p:style>
+        <p:txBody>
+          <a:bodyPr rtlCol="0" anchor="ctr"/>
+          <a:lstStyle/>
+          <a:p>
+            <a:pPr algn="ctr"/>
+          </a:p>
+        </p:txBody>
+      </p:sp>
+      <p:sp>
+        <p:nvSpPr>
+          <p:cNvPr id="16" name="TextBox 15"/>
+          <p:cNvSpPr txBox="1"/>
+          <p:nvPr/>
+        </p:nvSpPr>
+        <p:spPr>
+          <a:xfrm>
+            <a:off x="969264" y="2761488"/>
+            <a:ext cx="978407" cy="256032"/>
+          </a:xfrm>
+          <a:prstGeom prst="rect">
+            <a:avLst/>
+          </a:prstGeom>
+          <a:noFill/>
+        </p:spPr>
+        <p:txBody>
+          <a:bodyPr wrap="square" anchor="ctr" lIns="18288" rIns="18288" tIns="18288" bIns="18288">
+            <a:spAutoFit/>
+          </a:bodyPr>
+          <a:lstStyle/>
+          <a:p>
+            <a:pPr algn="ctr"/>
+            <a:r>
+              <a:rPr sz="819" b="1">
+                <a:solidFill>
+                  <a:srgbClr val="FFFFFF"/>
+                </a:solidFill>
+                <a:latin typeface="Noto Sans"/>
+              </a:rPr>
+              <a:t>Ordinal</a:t>
+            </a:r>
+          </a:p>
+        </p:txBody>
+      </p:sp>
+      <p:sp>
+        <p:nvSpPr>
+          <p:cNvPr id="17" name="TextBox 16"/>
+          <p:cNvSpPr txBox="1"/>
+          <p:nvPr/>
+        </p:nvSpPr>
+        <p:spPr>
+          <a:xfrm>
+            <a:off x="2148840" y="2724912"/>
+            <a:ext cx="3401568" cy="310896"/>
+          </a:xfrm>
+          <a:prstGeom prst="rect">
+            <a:avLst/>
+          </a:prstGeom>
+          <a:noFill/>
+        </p:spPr>
+        <p:txBody>
+          <a:bodyPr wrap="square" anchor="ctr" lIns="18288" rIns="18288" tIns="18288" bIns="18288">
+            <a:spAutoFit/>
+          </a:bodyPr>
+          <a:lstStyle/>
+          <a:p>
+            <a:pPr algn="l"/>
+            <a:r>
+              <a:rPr sz="940" b="1">
+                <a:solidFill>
+                  <a:srgbClr val="243B54"/>
+                </a:solidFill>
+                <a:latin typeface="Noto Sans"/>
+              </a:rPr>
+              <a:t>RANGO EDAD</a:t>
+            </a:r>
+          </a:p>
+        </p:txBody>
+      </p:sp>
+      <p:sp>
+        <p:nvSpPr>
+          <p:cNvPr id="18" name="Rounded Rectangle 17"/>
+          <p:cNvSpPr/>
+          <p:nvPr/>
+        </p:nvSpPr>
+        <p:spPr>
+          <a:xfrm>
+            <a:off x="932688" y="3273552"/>
+            <a:ext cx="1051560" cy="310896"/>
+          </a:xfrm>
+          <a:prstGeom prst="roundRect">
+            <a:avLst/>
+          </a:prstGeom>
+          <a:solidFill>
+            <a:srgbClr val="00AD9F"/>
+          </a:solidFill>
+          <a:ln>
+            <a:noFill/>
+          </a:ln>
+        </p:spPr>
+        <p:style>
+          <a:lnRef idx="1">
+            <a:schemeClr val="accent1"/>
+          </a:lnRef>
+          <a:fillRef idx="3">
+            <a:schemeClr val="accent1"/>
+          </a:fillRef>
+          <a:effectRef idx="2">
+            <a:schemeClr val="accent1"/>
+          </a:effectRef>
+          <a:fontRef idx="minor">
+            <a:schemeClr val="lt1"/>
+          </a:fontRef>
+        </p:style>
+        <p:txBody>
+          <a:bodyPr rtlCol="0" anchor="ctr"/>
+          <a:lstStyle/>
+          <a:p>
+            <a:pPr algn="ctr"/>
+          </a:p>
+        </p:txBody>
+      </p:sp>
+      <p:sp>
+        <p:nvSpPr>
+          <p:cNvPr id="19" name="TextBox 18"/>
+          <p:cNvSpPr txBox="1"/>
+          <p:nvPr/>
+        </p:nvSpPr>
+        <p:spPr>
+          <a:xfrm>
+            <a:off x="969264" y="3291840"/>
+            <a:ext cx="978407" cy="256032"/>
+          </a:xfrm>
+          <a:prstGeom prst="rect">
+            <a:avLst/>
+          </a:prstGeom>
+          <a:noFill/>
+        </p:spPr>
+        <p:txBody>
+          <a:bodyPr wrap="square" anchor="ctr" lIns="18288" rIns="18288" tIns="18288" bIns="18288">
+            <a:spAutoFit/>
+          </a:bodyPr>
+          <a:lstStyle/>
+          <a:p>
+            <a:pPr algn="ctr"/>
+            <a:r>
+              <a:rPr sz="819" b="1">
+                <a:solidFill>
+                  <a:srgbClr val="FFFFFF"/>
+                </a:solidFill>
+                <a:latin typeface="Noto Sans"/>
+              </a:rPr>
+              <a:t>Nominal</a:t>
+            </a:r>
+          </a:p>
+        </p:txBody>
+      </p:sp>
+      <p:sp>
+        <p:nvSpPr>
+          <p:cNvPr id="20" name="TextBox 19"/>
+          <p:cNvSpPr txBox="1"/>
+          <p:nvPr/>
+        </p:nvSpPr>
+        <p:spPr>
+          <a:xfrm>
+            <a:off x="2148840" y="3255264"/>
+            <a:ext cx="3401568" cy="310896"/>
+          </a:xfrm>
+          <a:prstGeom prst="rect">
+            <a:avLst/>
+          </a:prstGeom>
+          <a:noFill/>
+        </p:spPr>
+        <p:txBody>
+          <a:bodyPr wrap="square" anchor="ctr" lIns="18288" rIns="18288" tIns="18288" bIns="18288">
+            <a:spAutoFit/>
+          </a:bodyPr>
+          <a:lstStyle/>
+          <a:p>
+            <a:pPr algn="l"/>
+            <a:r>
+              <a:rPr sz="940" b="1">
+                <a:solidFill>
+                  <a:srgbClr val="243B54"/>
+                </a:solidFill>
+                <a:latin typeface="Noto Sans"/>
+              </a:rPr>
+              <a:t>TIPO DE INSTITUCIÓN</a:t>
+            </a:r>
+          </a:p>
+        </p:txBody>
+      </p:sp>
+      <p:sp>
+        <p:nvSpPr>
+          <p:cNvPr id="21" name="Rounded Rectangle 20"/>
+          <p:cNvSpPr/>
+          <p:nvPr/>
+        </p:nvSpPr>
+        <p:spPr>
+          <a:xfrm>
+            <a:off x="932688" y="3803904"/>
+            <a:ext cx="1051560" cy="310896"/>
+          </a:xfrm>
+          <a:prstGeom prst="roundRect">
+            <a:avLst/>
+          </a:prstGeom>
+          <a:solidFill>
+            <a:srgbClr val="00AD9F"/>
+          </a:solidFill>
+          <a:ln>
+            <a:noFill/>
+          </a:ln>
+        </p:spPr>
+        <p:style>
+          <a:lnRef idx="1">
+            <a:schemeClr val="accent1"/>
+          </a:lnRef>
+          <a:fillRef idx="3">
+            <a:schemeClr val="accent1"/>
+          </a:fillRef>
+          <a:effectRef idx="2">
+            <a:schemeClr val="accent1"/>
+          </a:effectRef>
+          <a:fontRef idx="minor">
+            <a:schemeClr val="lt1"/>
+          </a:fontRef>
+        </p:style>
+        <p:txBody>
+          <a:bodyPr rtlCol="0" anchor="ctr"/>
+          <a:lstStyle/>
+          <a:p>
+            <a:pPr algn="ctr"/>
+          </a:p>
+        </p:txBody>
+      </p:sp>
+      <p:sp>
+        <p:nvSpPr>
+          <p:cNvPr id="22" name="TextBox 21"/>
+          <p:cNvSpPr txBox="1"/>
+          <p:nvPr/>
+        </p:nvSpPr>
+        <p:spPr>
+          <a:xfrm>
+            <a:off x="969264" y="3822191"/>
+            <a:ext cx="978407" cy="256032"/>
+          </a:xfrm>
+          <a:prstGeom prst="rect">
+            <a:avLst/>
+          </a:prstGeom>
+          <a:noFill/>
+        </p:spPr>
+        <p:txBody>
+          <a:bodyPr wrap="square" anchor="ctr" lIns="18288" rIns="18288" tIns="18288" bIns="18288">
+            <a:spAutoFit/>
+          </a:bodyPr>
+          <a:lstStyle/>
+          <a:p>
+            <a:pPr algn="ctr"/>
+            <a:r>
+              <a:rPr sz="819" b="1">
+                <a:solidFill>
+                  <a:srgbClr val="FFFFFF"/>
+                </a:solidFill>
+                <a:latin typeface="Noto Sans"/>
+              </a:rPr>
+              <a:t>Nominal</a:t>
+            </a:r>
+          </a:p>
+        </p:txBody>
+      </p:sp>
+      <p:sp>
+        <p:nvSpPr>
+          <p:cNvPr id="23" name="TextBox 22"/>
+          <p:cNvSpPr txBox="1"/>
+          <p:nvPr/>
+        </p:nvSpPr>
+        <p:spPr>
+          <a:xfrm>
+            <a:off x="2148840" y="3785616"/>
+            <a:ext cx="3401568" cy="310896"/>
+          </a:xfrm>
+          <a:prstGeom prst="rect">
+            <a:avLst/>
+          </a:prstGeom>
+          <a:noFill/>
+        </p:spPr>
+        <p:txBody>
+          <a:bodyPr wrap="square" anchor="ctr" lIns="18288" rIns="18288" tIns="18288" bIns="18288">
+            <a:spAutoFit/>
+          </a:bodyPr>
+          <a:lstStyle/>
+          <a:p>
+            <a:pPr algn="l"/>
+            <a:r>
+              <a:rPr sz="940" b="1">
+                <a:solidFill>
+                  <a:srgbClr val="243B54"/>
+                </a:solidFill>
+                <a:latin typeface="Noto Sans"/>
+              </a:rPr>
+              <a:t>NOMBRE CARRERA</a:t>
+            </a:r>
+          </a:p>
+        </p:txBody>
+      </p:sp>
+      <p:sp>
+        <p:nvSpPr>
+          <p:cNvPr id="24" name="Rounded Rectangle 23"/>
+          <p:cNvSpPr/>
+          <p:nvPr/>
+        </p:nvSpPr>
+        <p:spPr>
+          <a:xfrm>
+            <a:off x="932688" y="4334256"/>
+            <a:ext cx="1051560" cy="310896"/>
+          </a:xfrm>
+          <a:prstGeom prst="roundRect">
+            <a:avLst/>
+          </a:prstGeom>
+          <a:solidFill>
+            <a:srgbClr val="00AD9F"/>
+          </a:solidFill>
+          <a:ln>
+            <a:noFill/>
+          </a:ln>
+        </p:spPr>
+        <p:style>
+          <a:lnRef idx="1">
+            <a:schemeClr val="accent1"/>
+          </a:lnRef>
+          <a:fillRef idx="3">
+            <a:schemeClr val="accent1"/>
+          </a:fillRef>
+          <a:effectRef idx="2">
+            <a:schemeClr val="accent1"/>
+          </a:effectRef>
+          <a:fontRef idx="minor">
+            <a:schemeClr val="lt1"/>
+          </a:fontRef>
+        </p:style>
+        <p:txBody>
+          <a:bodyPr rtlCol="0" anchor="ctr"/>
+          <a:lstStyle/>
+          <a:p>
+            <a:pPr algn="ctr"/>
+          </a:p>
+        </p:txBody>
+      </p:sp>
+      <p:sp>
+        <p:nvSpPr>
+          <p:cNvPr id="25" name="TextBox 24"/>
+          <p:cNvSpPr txBox="1"/>
+          <p:nvPr/>
+        </p:nvSpPr>
+        <p:spPr>
+          <a:xfrm>
+            <a:off x="969264" y="4352544"/>
+            <a:ext cx="978407" cy="256032"/>
+          </a:xfrm>
+          <a:prstGeom prst="rect">
+            <a:avLst/>
+          </a:prstGeom>
+          <a:noFill/>
+        </p:spPr>
+        <p:txBody>
+          <a:bodyPr wrap="square" anchor="ctr" lIns="18288" rIns="18288" tIns="18288" bIns="18288">
+            <a:spAutoFit/>
+          </a:bodyPr>
+          <a:lstStyle/>
+          <a:p>
+            <a:pPr algn="ctr"/>
+            <a:r>
+              <a:rPr sz="819" b="1">
+                <a:solidFill>
+                  <a:srgbClr val="FFFFFF"/>
+                </a:solidFill>
+                <a:latin typeface="Noto Sans"/>
+              </a:rPr>
+              <a:t>Nominal</a:t>
+            </a:r>
+          </a:p>
+        </p:txBody>
+      </p:sp>
+      <p:sp>
+        <p:nvSpPr>
+          <p:cNvPr id="26" name="TextBox 25"/>
+          <p:cNvSpPr txBox="1"/>
+          <p:nvPr/>
+        </p:nvSpPr>
+        <p:spPr>
+          <a:xfrm>
+            <a:off x="2148840" y="4315968"/>
+            <a:ext cx="3401568" cy="310896"/>
+          </a:xfrm>
+          <a:prstGeom prst="rect">
+            <a:avLst/>
+          </a:prstGeom>
+          <a:noFill/>
+        </p:spPr>
+        <p:txBody>
+          <a:bodyPr wrap="square" anchor="ctr" lIns="18288" rIns="18288" tIns="18288" bIns="18288">
+            <a:spAutoFit/>
+          </a:bodyPr>
+          <a:lstStyle/>
+          <a:p>
+            <a:pPr algn="l"/>
+            <a:r>
+              <a:rPr sz="940" b="1">
+                <a:solidFill>
+                  <a:srgbClr val="243B54"/>
+                </a:solidFill>
+                <a:latin typeface="Noto Sans"/>
+              </a:rPr>
+              <a:t>ÁREA DEL CONOCIMIENTO</a:t>
+            </a:r>
+          </a:p>
+        </p:txBody>
+      </p:sp>
+      <p:sp>
+        <p:nvSpPr>
+          <p:cNvPr id="27" name="Rounded Rectangle 26"/>
+          <p:cNvSpPr/>
+          <p:nvPr/>
+        </p:nvSpPr>
+        <p:spPr>
+          <a:xfrm>
+            <a:off x="932688" y="4864608"/>
+            <a:ext cx="1051560" cy="310896"/>
+          </a:xfrm>
+          <a:prstGeom prst="roundRect">
+            <a:avLst/>
+          </a:prstGeom>
+          <a:solidFill>
+            <a:srgbClr val="00AD9F"/>
+          </a:solidFill>
+          <a:ln>
+            <a:noFill/>
+          </a:ln>
+        </p:spPr>
+        <p:style>
+          <a:lnRef idx="1">
+            <a:schemeClr val="accent1"/>
+          </a:lnRef>
+          <a:fillRef idx="3">
+            <a:schemeClr val="accent1"/>
+          </a:fillRef>
+          <a:effectRef idx="2">
+            <a:schemeClr val="accent1"/>
+          </a:effectRef>
+          <a:fontRef idx="minor">
+            <a:schemeClr val="lt1"/>
+          </a:fontRef>
+        </p:style>
+        <p:txBody>
+          <a:bodyPr rtlCol="0" anchor="ctr"/>
+          <a:lstStyle/>
+          <a:p>
+            <a:pPr algn="ctr"/>
+          </a:p>
+        </p:txBody>
+      </p:sp>
+      <p:sp>
+        <p:nvSpPr>
+          <p:cNvPr id="28" name="TextBox 27"/>
+          <p:cNvSpPr txBox="1"/>
+          <p:nvPr/>
+        </p:nvSpPr>
+        <p:spPr>
+          <a:xfrm>
+            <a:off x="969264" y="4882896"/>
+            <a:ext cx="978407" cy="256032"/>
+          </a:xfrm>
+          <a:prstGeom prst="rect">
+            <a:avLst/>
+          </a:prstGeom>
+          <a:noFill/>
+        </p:spPr>
+        <p:txBody>
+          <a:bodyPr wrap="square" anchor="ctr" lIns="18288" rIns="18288" tIns="18288" bIns="18288">
+            <a:spAutoFit/>
+          </a:bodyPr>
+          <a:lstStyle/>
+          <a:p>
+            <a:pPr algn="ctr"/>
+            <a:r>
+              <a:rPr sz="819" b="1">
+                <a:solidFill>
+                  <a:srgbClr val="FFFFFF"/>
+                </a:solidFill>
+                <a:latin typeface="Noto Sans"/>
+              </a:rPr>
+              <a:t>Nominal</a:t>
+            </a:r>
+          </a:p>
+        </p:txBody>
+      </p:sp>
+      <p:sp>
+        <p:nvSpPr>
+          <p:cNvPr id="29" name="TextBox 28"/>
+          <p:cNvSpPr txBox="1"/>
+          <p:nvPr/>
+        </p:nvSpPr>
+        <p:spPr>
+          <a:xfrm>
+            <a:off x="2148840" y="4846320"/>
+            <a:ext cx="3401568" cy="310896"/>
+          </a:xfrm>
+          <a:prstGeom prst="rect">
+            <a:avLst/>
+          </a:prstGeom>
+          <a:noFill/>
+        </p:spPr>
+        <p:txBody>
+          <a:bodyPr wrap="square" anchor="ctr" lIns="18288" rIns="18288" tIns="18288" bIns="18288">
+            <a:spAutoFit/>
+          </a:bodyPr>
+          <a:lstStyle/>
+          <a:p>
+            <a:pPr algn="l"/>
+            <a:r>
+              <a:rPr sz="940" b="1">
+                <a:solidFill>
+                  <a:srgbClr val="243B54"/>
+                </a:solidFill>
+                <a:latin typeface="Noto Sans"/>
+              </a:rPr>
+              <a:t>PROVINCIA SEDE</a:t>
+            </a:r>
+          </a:p>
+        </p:txBody>
+      </p:sp>
+      <p:sp>
+        <p:nvSpPr>
+          <p:cNvPr id="30" name="Rounded Rectangle 29"/>
+          <p:cNvSpPr/>
+          <p:nvPr/>
+        </p:nvSpPr>
+        <p:spPr>
+          <a:xfrm>
+            <a:off x="6473952" y="2212848"/>
+            <a:ext cx="1143000" cy="310896"/>
+          </a:xfrm>
+          <a:prstGeom prst="roundRect">
+            <a:avLst/>
+          </a:prstGeom>
+          <a:solidFill>
+            <a:srgbClr val="3AA484"/>
+          </a:solidFill>
+          <a:ln>
+            <a:noFill/>
+          </a:ln>
+        </p:spPr>
+        <p:style>
+          <a:lnRef idx="1">
+            <a:schemeClr val="accent1"/>
+          </a:lnRef>
+          <a:fillRef idx="3">
+            <a:schemeClr val="accent1"/>
+          </a:fillRef>
+          <a:effectRef idx="2">
+            <a:schemeClr val="accent1"/>
+          </a:effectRef>
+          <a:fontRef idx="minor">
+            <a:schemeClr val="lt1"/>
+          </a:fontRef>
+        </p:style>
+        <p:txBody>
+          <a:bodyPr rtlCol="0" anchor="ctr"/>
+          <a:lstStyle/>
+          <a:p>
+            <a:pPr algn="ctr"/>
+          </a:p>
+        </p:txBody>
+      </p:sp>
+      <p:sp>
+        <p:nvSpPr>
+          <p:cNvPr id="31" name="TextBox 30"/>
+          <p:cNvSpPr txBox="1"/>
+          <p:nvPr/>
+        </p:nvSpPr>
+        <p:spPr>
+          <a:xfrm>
+            <a:off x="6510528" y="2231136"/>
+            <a:ext cx="1069848" cy="256032"/>
+          </a:xfrm>
+          <a:prstGeom prst="rect">
+            <a:avLst/>
+          </a:prstGeom>
+          <a:noFill/>
+        </p:spPr>
+        <p:txBody>
+          <a:bodyPr wrap="square" anchor="ctr" lIns="18288" rIns="18288" tIns="18288" bIns="18288">
+            <a:spAutoFit/>
+          </a:bodyPr>
+          <a:lstStyle/>
+          <a:p>
+            <a:pPr algn="ctr"/>
+            <a:r>
+              <a:rPr sz="819" b="1">
+                <a:solidFill>
+                  <a:srgbClr val="FFFFFF"/>
+                </a:solidFill>
+                <a:latin typeface="Noto Sans"/>
+              </a:rPr>
+              <a:t>Continua</a:t>
+            </a:r>
+          </a:p>
+        </p:txBody>
+      </p:sp>
+      <p:sp>
+        <p:nvSpPr>
+          <p:cNvPr id="32" name="TextBox 31"/>
+          <p:cNvSpPr txBox="1"/>
+          <p:nvPr/>
+        </p:nvSpPr>
+        <p:spPr>
+          <a:xfrm>
+            <a:off x="7818120" y="2194560"/>
+            <a:ext cx="3246120" cy="310896"/>
+          </a:xfrm>
+          <a:prstGeom prst="rect">
+            <a:avLst/>
+          </a:prstGeom>
+          <a:noFill/>
+        </p:spPr>
+        <p:txBody>
+          <a:bodyPr wrap="square" anchor="ctr" lIns="18288" rIns="18288" tIns="18288" bIns="18288">
+            <a:spAutoFit/>
+          </a:bodyPr>
+          <a:lstStyle/>
+          <a:p>
+            <a:pPr algn="l"/>
+            <a:r>
+              <a:rPr sz="940" b="1">
+                <a:solidFill>
+                  <a:srgbClr val="243B54"/>
+                </a:solidFill>
+                <a:latin typeface="Noto Sans"/>
+              </a:rPr>
+              <a:t>EDAD</a:t>
+            </a:r>
+          </a:p>
+        </p:txBody>
+      </p:sp>
+      <p:sp>
+        <p:nvSpPr>
+          <p:cNvPr id="33" name="Rounded Rectangle 32"/>
+          <p:cNvSpPr/>
+          <p:nvPr/>
+        </p:nvSpPr>
+        <p:spPr>
+          <a:xfrm>
+            <a:off x="6473952" y="2926080"/>
+            <a:ext cx="1143000" cy="310896"/>
+          </a:xfrm>
+          <a:prstGeom prst="roundRect">
+            <a:avLst/>
+          </a:prstGeom>
+          <a:solidFill>
+            <a:srgbClr val="077596"/>
+          </a:solidFill>
+          <a:ln>
+            <a:noFill/>
+          </a:ln>
+        </p:spPr>
+        <p:style>
+          <a:lnRef idx="1">
+            <a:schemeClr val="accent1"/>
+          </a:lnRef>
+          <a:fillRef idx="3">
+            <a:schemeClr val="accent1"/>
+          </a:fillRef>
+          <a:effectRef idx="2">
+            <a:schemeClr val="accent1"/>
+          </a:effectRef>
+          <a:fontRef idx="minor">
+            <a:schemeClr val="lt1"/>
+          </a:fontRef>
+        </p:style>
+        <p:txBody>
+          <a:bodyPr rtlCol="0" anchor="ctr"/>
+          <a:lstStyle/>
+          <a:p>
+            <a:pPr algn="ctr"/>
+          </a:p>
+        </p:txBody>
+      </p:sp>
+      <p:sp>
+        <p:nvSpPr>
+          <p:cNvPr id="34" name="TextBox 33"/>
+          <p:cNvSpPr txBox="1"/>
+          <p:nvPr/>
+        </p:nvSpPr>
+        <p:spPr>
+          <a:xfrm>
+            <a:off x="6510528" y="2944368"/>
+            <a:ext cx="1069848" cy="256032"/>
+          </a:xfrm>
+          <a:prstGeom prst="rect">
+            <a:avLst/>
+          </a:prstGeom>
+          <a:noFill/>
+        </p:spPr>
+        <p:txBody>
+          <a:bodyPr wrap="square" anchor="ctr" lIns="18288" rIns="18288" tIns="18288" bIns="18288">
+            <a:spAutoFit/>
+          </a:bodyPr>
+          <a:lstStyle/>
+          <a:p>
+            <a:pPr algn="ctr"/>
+            <a:r>
+              <a:rPr sz="819" b="1">
+                <a:solidFill>
+                  <a:srgbClr val="FFFFFF"/>
+                </a:solidFill>
+                <a:latin typeface="Noto Sans"/>
+              </a:rPr>
+              <a:t>Discreta</a:t>
+            </a:r>
+          </a:p>
+        </p:txBody>
+      </p:sp>
+      <p:sp>
+        <p:nvSpPr>
+          <p:cNvPr id="35" name="TextBox 34"/>
+          <p:cNvSpPr txBox="1"/>
+          <p:nvPr/>
+        </p:nvSpPr>
+        <p:spPr>
+          <a:xfrm>
+            <a:off x="7818120" y="2907792"/>
+            <a:ext cx="3246120" cy="310896"/>
+          </a:xfrm>
+          <a:prstGeom prst="rect">
+            <a:avLst/>
+          </a:prstGeom>
+          <a:noFill/>
+        </p:spPr>
+        <p:txBody>
+          <a:bodyPr wrap="square" anchor="ctr" lIns="18288" rIns="18288" tIns="18288" bIns="18288">
+            <a:spAutoFit/>
+          </a:bodyPr>
+          <a:lstStyle/>
+          <a:p>
+            <a:pPr algn="l"/>
+            <a:r>
+              <a:rPr sz="940" b="1">
+                <a:solidFill>
+                  <a:srgbClr val="243B54"/>
+                </a:solidFill>
+                <a:latin typeface="Noto Sans"/>
+              </a:rPr>
+              <a:t>AÑO INGRESO</a:t>
+            </a:r>
+          </a:p>
+        </p:txBody>
+      </p:sp>
+      <p:sp>
+        <p:nvSpPr>
+          <p:cNvPr id="36" name="Rounded Rectangle 35"/>
+          <p:cNvSpPr/>
+          <p:nvPr/>
+        </p:nvSpPr>
+        <p:spPr>
+          <a:xfrm>
+            <a:off x="6473952" y="3639312"/>
+            <a:ext cx="1143000" cy="310896"/>
+          </a:xfrm>
+          <a:prstGeom prst="roundRect">
+            <a:avLst/>
+          </a:prstGeom>
+          <a:solidFill>
+            <a:srgbClr val="3AA484"/>
+          </a:solidFill>
+          <a:ln>
+            <a:noFill/>
+          </a:ln>
+        </p:spPr>
+        <p:style>
+          <a:lnRef idx="1">
+            <a:schemeClr val="accent1"/>
+          </a:lnRef>
+          <a:fillRef idx="3">
+            <a:schemeClr val="accent1"/>
+          </a:fillRef>
+          <a:effectRef idx="2">
+            <a:schemeClr val="accent1"/>
+          </a:effectRef>
+          <a:fontRef idx="minor">
+            <a:schemeClr val="lt1"/>
+          </a:fontRef>
+        </p:style>
+        <p:txBody>
+          <a:bodyPr rtlCol="0" anchor="ctr"/>
+          <a:lstStyle/>
+          <a:p>
+            <a:pPr algn="ctr"/>
+          </a:p>
+        </p:txBody>
+      </p:sp>
+      <p:sp>
+        <p:nvSpPr>
+          <p:cNvPr id="37" name="TextBox 36"/>
+          <p:cNvSpPr txBox="1"/>
+          <p:nvPr/>
+        </p:nvSpPr>
+        <p:spPr>
+          <a:xfrm>
+            <a:off x="6510528" y="3657600"/>
+            <a:ext cx="1069848" cy="256032"/>
+          </a:xfrm>
+          <a:prstGeom prst="rect">
+            <a:avLst/>
+          </a:prstGeom>
+          <a:noFill/>
+        </p:spPr>
+        <p:txBody>
+          <a:bodyPr wrap="square" anchor="ctr" lIns="18288" rIns="18288" tIns="18288" bIns="18288">
+            <a:spAutoFit/>
+          </a:bodyPr>
+          <a:lstStyle/>
+          <a:p>
+            <a:pPr algn="ctr"/>
+            <a:r>
+              <a:rPr sz="819" b="1">
+                <a:solidFill>
+                  <a:srgbClr val="FFFFFF"/>
+                </a:solidFill>
+                <a:latin typeface="Noto Sans"/>
+              </a:rPr>
+              <a:t>Continua</a:t>
+            </a:r>
+          </a:p>
+        </p:txBody>
+      </p:sp>
+      <p:sp>
+        <p:nvSpPr>
+          <p:cNvPr id="38" name="TextBox 37"/>
+          <p:cNvSpPr txBox="1"/>
+          <p:nvPr/>
+        </p:nvSpPr>
+        <p:spPr>
+          <a:xfrm>
+            <a:off x="7818120" y="3621024"/>
+            <a:ext cx="3246120" cy="310896"/>
+          </a:xfrm>
+          <a:prstGeom prst="rect">
+            <a:avLst/>
+          </a:prstGeom>
+          <a:noFill/>
+        </p:spPr>
+        <p:txBody>
+          <a:bodyPr wrap="square" anchor="ctr" lIns="18288" rIns="18288" tIns="18288" bIns="18288">
+            <a:spAutoFit/>
+          </a:bodyPr>
+          <a:lstStyle/>
+          <a:p>
+            <a:pPr algn="l"/>
+            <a:r>
+              <a:rPr sz="940" b="1">
+                <a:solidFill>
+                  <a:srgbClr val="243B54"/>
+                </a:solidFill>
+                <a:latin typeface="Noto Sans"/>
+              </a:rPr>
+              <a:t>DURACIÓN TOTAL (SEMESTRES)</a:t>
+            </a:r>
+          </a:p>
+        </p:txBody>
+      </p:sp>
+      <p:sp>
+        <p:nvSpPr>
+          <p:cNvPr id="39" name="Rounded Rectangle 38"/>
+          <p:cNvSpPr/>
+          <p:nvPr/>
+        </p:nvSpPr>
+        <p:spPr>
+          <a:xfrm>
+            <a:off x="6473952" y="4352544"/>
+            <a:ext cx="1143000" cy="310896"/>
+          </a:xfrm>
+          <a:prstGeom prst="roundRect">
+            <a:avLst/>
+          </a:prstGeom>
+          <a:solidFill>
+            <a:srgbClr val="3AA484"/>
+          </a:solidFill>
+          <a:ln>
+            <a:noFill/>
+          </a:ln>
+        </p:spPr>
+        <p:style>
+          <a:lnRef idx="1">
+            <a:schemeClr val="accent1"/>
+          </a:lnRef>
+          <a:fillRef idx="3">
+            <a:schemeClr val="accent1"/>
+          </a:fillRef>
+          <a:effectRef idx="2">
+            <a:schemeClr val="accent1"/>
+          </a:effectRef>
+          <a:fontRef idx="minor">
+            <a:schemeClr val="lt1"/>
+          </a:fontRef>
+        </p:style>
+        <p:txBody>
+          <a:bodyPr rtlCol="0" anchor="ctr"/>
+          <a:lstStyle/>
+          <a:p>
+            <a:pPr algn="ctr"/>
+          </a:p>
+        </p:txBody>
+      </p:sp>
+      <p:sp>
+        <p:nvSpPr>
+          <p:cNvPr id="40" name="TextBox 39"/>
+          <p:cNvSpPr txBox="1"/>
+          <p:nvPr/>
+        </p:nvSpPr>
+        <p:spPr>
+          <a:xfrm>
+            <a:off x="6510528" y="4370831"/>
+            <a:ext cx="1069848" cy="256032"/>
+          </a:xfrm>
+          <a:prstGeom prst="rect">
+            <a:avLst/>
+          </a:prstGeom>
+          <a:noFill/>
+        </p:spPr>
+        <p:txBody>
+          <a:bodyPr wrap="square" anchor="ctr" lIns="18288" rIns="18288" tIns="18288" bIns="18288">
+            <a:spAutoFit/>
+          </a:bodyPr>
+          <a:lstStyle/>
+          <a:p>
+            <a:pPr algn="ctr"/>
+            <a:r>
+              <a:rPr sz="819" b="1">
+                <a:solidFill>
+                  <a:srgbClr val="FFFFFF"/>
+                </a:solidFill>
+                <a:latin typeface="Noto Sans"/>
+              </a:rPr>
+              <a:t>Continua</a:t>
+            </a:r>
+          </a:p>
+        </p:txBody>
+      </p:sp>
+      <p:sp>
+        <p:nvSpPr>
+          <p:cNvPr id="41" name="TextBox 40"/>
+          <p:cNvSpPr txBox="1"/>
+          <p:nvPr/>
+        </p:nvSpPr>
+        <p:spPr>
+          <a:xfrm>
+            <a:off x="7818120" y="4334256"/>
+            <a:ext cx="3246120" cy="310896"/>
+          </a:xfrm>
+          <a:prstGeom prst="rect">
+            <a:avLst/>
+          </a:prstGeom>
+          <a:noFill/>
+        </p:spPr>
+        <p:txBody>
+          <a:bodyPr wrap="square" anchor="ctr" lIns="18288" rIns="18288" tIns="18288" bIns="18288">
+            <a:spAutoFit/>
+          </a:bodyPr>
+          <a:lstStyle/>
+          <a:p>
+            <a:pPr algn="l"/>
+            <a:r>
+              <a:rPr sz="940" b="1">
+                <a:solidFill>
+                  <a:srgbClr val="243B54"/>
+                </a:solidFill>
+                <a:latin typeface="Noto Sans"/>
+              </a:rPr>
+              <a:t>VALOR ARANCEL (PESOS)</a:t>
+            </a:r>
+          </a:p>
+        </p:txBody>
+      </p:sp>
+      <p:sp>
+        <p:nvSpPr>
+          <p:cNvPr id="42" name="Rounded Rectangle 41"/>
+          <p:cNvSpPr/>
+          <p:nvPr/>
+        </p:nvSpPr>
+        <p:spPr>
+          <a:xfrm>
+            <a:off x="6473952" y="5074920"/>
+            <a:ext cx="4709160" cy="566928"/>
+          </a:xfrm>
+          <a:prstGeom prst="roundRect">
+            <a:avLst/>
+          </a:prstGeom>
+          <a:solidFill>
+            <a:srgbClr val="F6F9FC"/>
+          </a:solidFill>
+          <a:ln w="8890">
+            <a:solidFill>
+              <a:srgbClr val="DFE6ED"/>
+            </a:solidFill>
+          </a:ln>
+        </p:spPr>
+        <p:style>
+          <a:lnRef idx="1">
+            <a:schemeClr val="accent1"/>
+          </a:lnRef>
+          <a:fillRef idx="3">
+            <a:schemeClr val="accent1"/>
+          </a:fillRef>
+          <a:effectRef idx="2">
+            <a:schemeClr val="accent1"/>
+          </a:effectRef>
+          <a:fontRef idx="minor">
+            <a:schemeClr val="lt1"/>
+          </a:fontRef>
+        </p:style>
+        <p:txBody>
+          <a:bodyPr rtlCol="0" anchor="ctr"/>
+          <a:lstStyle/>
+          <a:p>
+            <a:pPr algn="ctr"/>
+          </a:p>
+        </p:txBody>
+      </p:sp>
+      <p:sp>
+        <p:nvSpPr>
+          <p:cNvPr id="43" name="Rectangle 42"/>
+          <p:cNvSpPr/>
+          <p:nvPr/>
+        </p:nvSpPr>
+        <p:spPr>
+          <a:xfrm>
+            <a:off x="6473952" y="5074920"/>
+            <a:ext cx="32004" cy="566928"/>
+          </a:xfrm>
+          <a:prstGeom prst="rect">
+            <a:avLst/>
+          </a:prstGeom>
+          <a:solidFill>
+            <a:srgbClr val="F59753"/>
+          </a:solidFill>
+          <a:ln>
+            <a:noFill/>
+          </a:ln>
+        </p:spPr>
+        <p:style>
+          <a:lnRef idx="1">
+            <a:schemeClr val="accent1"/>
+          </a:lnRef>
+          <a:fillRef idx="3">
+            <a:schemeClr val="accent1"/>
+          </a:fillRef>
+          <a:effectRef idx="2">
+            <a:schemeClr val="accent1"/>
+          </a:effectRef>
+          <a:fontRef idx="minor">
+            <a:schemeClr val="lt1"/>
+          </a:fontRef>
+        </p:style>
+        <p:txBody>
+          <a:bodyPr rtlCol="0" anchor="ctr"/>
+          <a:lstStyle/>
+          <a:p>
+            <a:pPr algn="ctr"/>
+          </a:p>
+        </p:txBody>
+      </p:sp>
+      <p:sp>
+        <p:nvSpPr>
+          <p:cNvPr id="44" name="TextBox 43"/>
+          <p:cNvSpPr txBox="1"/>
+          <p:nvPr/>
+        </p:nvSpPr>
+        <p:spPr>
+          <a:xfrm>
+            <a:off x="6702552" y="5184648"/>
+            <a:ext cx="4297680" cy="219456"/>
+          </a:xfrm>
+          <a:prstGeom prst="rect">
+            <a:avLst/>
+          </a:prstGeom>
+          <a:noFill/>
+        </p:spPr>
+        <p:txBody>
+          <a:bodyPr wrap="square" anchor="ctr" lIns="18288" rIns="18288" tIns="18288" bIns="18288">
+            <a:spAutoFit/>
+          </a:bodyPr>
+          <a:lstStyle/>
+          <a:p>
+            <a:pPr algn="l"/>
+            <a:r>
+              <a:rPr sz="980" b="1">
+                <a:solidFill>
+                  <a:srgbClr val="243B54"/>
+                </a:solidFill>
+                <a:latin typeface="Noto Sans"/>
+              </a:rPr>
+              <a:t>CLAVE</a:t>
+            </a:r>
+          </a:p>
+        </p:txBody>
+      </p:sp>
+      <p:sp>
+        <p:nvSpPr>
+          <p:cNvPr id="45" name="TextBox 44"/>
+          <p:cNvSpPr txBox="1"/>
+          <p:nvPr/>
+        </p:nvSpPr>
+        <p:spPr>
+          <a:xfrm>
+            <a:off x="6702552" y="5422392"/>
+            <a:ext cx="4297680" cy="146303"/>
+          </a:xfrm>
+          <a:prstGeom prst="rect">
+            <a:avLst/>
+          </a:prstGeom>
+          <a:noFill/>
+        </p:spPr>
+        <p:txBody>
+          <a:bodyPr wrap="square" anchor="ctr" lIns="18288" rIns="18288" tIns="18288" bIns="18288">
+            <a:spAutoFit/>
+          </a:bodyPr>
+          <a:lstStyle/>
+          <a:p>
+            <a:pPr algn="l"/>
+            <a:r>
+              <a:rPr sz="890" b="0">
+                <a:solidFill>
+                  <a:srgbClr val="596C82"/>
+                </a:solidFill>
+                <a:latin typeface="Noto Sans"/>
+              </a:rPr>
+              <a:t>Nominal: sin orden · Ordinal: con orden · Discreta: valores contables · Continua: medida en una escala.</a:t>
+            </a:r>
+          </a:p>
+        </p:txBody>
+      </p:sp>
+      <p:sp>
+        <p:nvSpPr>
+          <p:cNvPr id="46" name="Rounded Rectangle 45"/>
+          <p:cNvSpPr/>
+          <p:nvPr/>
+        </p:nvSpPr>
+        <p:spPr>
+          <a:xfrm>
+            <a:off x="658368" y="5916168"/>
+            <a:ext cx="10863072" cy="438912"/>
+          </a:xfrm>
+          <a:prstGeom prst="roundRect">
+            <a:avLst/>
+          </a:prstGeom>
+          <a:solidFill>
+            <a:srgbClr val="F6F9FC"/>
+          </a:solidFill>
+          <a:ln w="8890">
+            <a:solidFill>
+              <a:srgbClr val="DFE6ED"/>
+            </a:solidFill>
+          </a:ln>
+        </p:spPr>
+        <p:style>
+          <a:lnRef idx="1">
+            <a:schemeClr val="accent1"/>
+          </a:lnRef>
+          <a:fillRef idx="3">
+            <a:schemeClr val="accent1"/>
+          </a:fillRef>
+          <a:effectRef idx="2">
+            <a:schemeClr val="accent1"/>
+          </a:effectRef>
+          <a:fontRef idx="minor">
+            <a:schemeClr val="lt1"/>
+          </a:fontRef>
+        </p:style>
+        <p:txBody>
+          <a:bodyPr rtlCol="0" anchor="ctr"/>
+          <a:lstStyle/>
+          <a:p>
+            <a:pPr algn="ctr"/>
+          </a:p>
+        </p:txBody>
+      </p:sp>
+      <p:sp>
+        <p:nvSpPr>
+          <p:cNvPr id="47" name="Rectangle 46"/>
+          <p:cNvSpPr/>
+          <p:nvPr/>
+        </p:nvSpPr>
+        <p:spPr>
+          <a:xfrm>
+            <a:off x="658368" y="5916168"/>
+            <a:ext cx="32004" cy="438912"/>
+          </a:xfrm>
+          <a:prstGeom prst="rect">
+            <a:avLst/>
+          </a:prstGeom>
+          <a:solidFill>
+            <a:srgbClr val="00AD9F"/>
+          </a:solidFill>
+          <a:ln>
+            <a:noFill/>
+          </a:ln>
+        </p:spPr>
+        <p:style>
+          <a:lnRef idx="1">
+            <a:schemeClr val="accent1"/>
+          </a:lnRef>
+          <a:fillRef idx="3">
+            <a:schemeClr val="accent1"/>
+          </a:fillRef>
+          <a:effectRef idx="2">
+            <a:schemeClr val="accent1"/>
+          </a:effectRef>
+          <a:fontRef idx="minor">
+            <a:schemeClr val="lt1"/>
+          </a:fontRef>
+        </p:style>
+        <p:txBody>
+          <a:bodyPr rtlCol="0" anchor="ctr"/>
+          <a:lstStyle/>
+          <a:p>
+            <a:pPr algn="ctr"/>
+          </a:p>
+        </p:txBody>
+      </p:sp>
+      <p:sp>
+        <p:nvSpPr>
+          <p:cNvPr id="48" name="TextBox 47"/>
+          <p:cNvSpPr txBox="1"/>
+          <p:nvPr/>
+        </p:nvSpPr>
+        <p:spPr>
+          <a:xfrm>
+            <a:off x="886968" y="6025896"/>
+            <a:ext cx="10451592" cy="219456"/>
+          </a:xfrm>
+          <a:prstGeom prst="rect">
+            <a:avLst/>
+          </a:prstGeom>
+          <a:noFill/>
+        </p:spPr>
+        <p:txBody>
+          <a:bodyPr wrap="square" anchor="ctr" lIns="18288" rIns="18288" tIns="18288" bIns="18288">
+            <a:spAutoFit/>
+          </a:bodyPr>
+          <a:lstStyle/>
+          <a:p>
+            <a:pPr algn="l"/>
+            <a:r>
+              <a:rPr sz="980" b="1">
+                <a:solidFill>
+                  <a:srgbClr val="243B54"/>
+                </a:solidFill>
+                <a:latin typeface="Noto Sans"/>
+              </a:rPr>
+              <a:t>CRITERIO DEL CURSO</a:t>
+            </a:r>
+          </a:p>
+        </p:txBody>
+      </p:sp>
+      <p:sp>
+        <p:nvSpPr>
+          <p:cNvPr id="49" name="TextBox 48"/>
+          <p:cNvSpPr txBox="1"/>
+          <p:nvPr/>
+        </p:nvSpPr>
+        <p:spPr>
+          <a:xfrm>
+            <a:off x="886968" y="6263640"/>
+            <a:ext cx="10451592" cy="18287"/>
+          </a:xfrm>
+          <a:prstGeom prst="rect">
+            <a:avLst/>
+          </a:prstGeom>
+          <a:noFill/>
+        </p:spPr>
+        <p:txBody>
+          <a:bodyPr wrap="square" anchor="ctr" lIns="18288" rIns="18288" tIns="18288" bIns="18288">
+            <a:spAutoFit/>
+          </a:bodyPr>
+          <a:lstStyle/>
+          <a:p>
+            <a:pPr algn="l"/>
+            <a:r>
+              <a:rPr sz="890" b="0">
+                <a:solidFill>
+                  <a:srgbClr val="596C82"/>
+                </a:solidFill>
+                <a:latin typeface="Noto Sans"/>
+              </a:rPr>
+              <a:t>Seguimos el criterio de los laboratorios del profesor: por ejemplo, Edad se clasifica como cuantitativa continua.</a:t>
             </a:r>
           </a:p>
         </p:txBody>

--- a/presentacion/Del_Acero_al_Algoritmo_Estilo_Profesor.pptx
+++ b/presentacion/Del_Acero_al_Algoritmo_Estilo_Profesor.pptx
@@ -8,8 +8,6 @@
     <p:sldId id="256" r:id="rId7"/>
     <p:sldId id="257" r:id="rId8"/>
     <p:sldId id="258" r:id="rId9"/>
-    <p:sldId id="259" r:id="rId10"/>
-    <p:sldId id="260" r:id="rId11"/>
     <p:sldId id="261" r:id="rId12"/>
     <p:sldId id="262" r:id="rId13"/>
     <p:sldId id="263" r:id="rId14"/>
@@ -18,11 +16,8 @@
     <p:sldId id="266" r:id="rId17"/>
     <p:sldId id="267" r:id="rId18"/>
     <p:sldId id="268" r:id="rId19"/>
-    <p:sldId id="269" r:id="rId20"/>
     <p:sldId id="270" r:id="rId21"/>
     <p:sldId id="271" r:id="rId22"/>
-    <p:sldId id="272" r:id="rId23"/>
-    <p:sldId id="273" r:id="rId24"/>
   </p:sldIdLst>
   <p:sldSz cx="12191695" cy="6858000" type="screen4x3"/>
   <p:notesSz cx="6858000" cy="9144000"/>
@@ -3695,15 +3690,8 @@
           </a:bodyPr>
           <a:lstStyle/>
           <a:p>
-            <a:pPr algn="r"/>
-            <a:r>
-              <a:rPr sz="950" b="1">
-                <a:solidFill>
-                  <a:srgbClr val="596C82"/>
-                </a:solidFill>
-                <a:latin typeface="Noto Sans"/>
-              </a:rPr>
-              <a:t>10</a:t>
+            <a:r>
+              <a:t>08</a:t>
             </a:r>
           </a:p>
         </p:txBody>
@@ -4861,15 +4849,8 @@
           </a:bodyPr>
           <a:lstStyle/>
           <a:p>
-            <a:pPr algn="r"/>
-            <a:r>
-              <a:rPr sz="950" b="1">
-                <a:solidFill>
-                  <a:srgbClr val="596C82"/>
-                </a:solidFill>
-                <a:latin typeface="Noto Sans"/>
-              </a:rPr>
-              <a:t>11</a:t>
+            <a:r>
+              <a:t>09</a:t>
             </a:r>
           </a:p>
         </p:txBody>
@@ -6043,15 +6024,8 @@
           </a:bodyPr>
           <a:lstStyle/>
           <a:p>
-            <a:pPr algn="r"/>
-            <a:r>
-              <a:rPr sz="950" b="1">
-                <a:solidFill>
-                  <a:srgbClr val="596C82"/>
-                </a:solidFill>
-                <a:latin typeface="Noto Sans"/>
-              </a:rPr>
-              <a:t>12</a:t>
+            <a:r>
+              <a:t>10</a:t>
             </a:r>
           </a:p>
         </p:txBody>
@@ -7032,15 +7006,8 @@
           </a:bodyPr>
           <a:lstStyle/>
           <a:p>
-            <a:pPr algn="r"/>
-            <a:r>
-              <a:rPr sz="950" b="1">
-                <a:solidFill>
-                  <a:srgbClr val="596C82"/>
-                </a:solidFill>
-                <a:latin typeface="Noto Sans"/>
-              </a:rPr>
-              <a:t>13</a:t>
+            <a:r>
+              <a:t>11</a:t>
             </a:r>
           </a:p>
         </p:txBody>
@@ -8004,835 +7971,6 @@
                 <a:latin typeface="Noto Sans"/>
               </a:rPr>
               <a:t>La base corresponde solo a 2021. Describe diferencias y asociaciones, pero no demuestra causalidad, déficit profesional ni evolución temporal.</a:t>
-            </a:r>
-          </a:p>
-        </p:txBody>
-      </p:sp>
-    </p:spTree>
-  </p:cSld>
-  <p:clrMapOvr>
-    <a:masterClrMapping/>
-  </p:clrMapOvr>
-</p:sld>
-</file>
-
-<file path=ppt/slides/slide14.xml><?xml version="1.0" encoding="utf-8"?>
-<p:sld xmlns:a="http://schemas.openxmlformats.org/drawingml/2006/main" xmlns:p="http://schemas.openxmlformats.org/presentationml/2006/main" xmlns:r="http://schemas.openxmlformats.org/officeDocument/2006/relationships">
-  <p:cSld>
-    <p:bg>
-      <p:bgPr>
-        <a:solidFill>
-          <a:srgbClr val="FFFFFF"/>
-        </a:solidFill>
-        <a:effectLst/>
-      </p:bgPr>
-    </p:bg>
-    <p:spTree>
-      <p:nvGrpSpPr>
-        <p:cNvPr id="1" name=""/>
-        <p:cNvGrpSpPr/>
-        <p:nvPr/>
-      </p:nvGrpSpPr>
-      <p:grpSpPr/>
-      <p:sp>
-        <p:nvSpPr>
-          <p:cNvPr id="2" name="Rectangle 1"/>
-          <p:cNvSpPr/>
-          <p:nvPr/>
-        </p:nvSpPr>
-        <p:spPr>
-          <a:xfrm>
-            <a:off x="0" y="0"/>
-            <a:ext cx="12191695" cy="50292"/>
-          </a:xfrm>
-          <a:prstGeom prst="rect">
-            <a:avLst/>
-          </a:prstGeom>
-          <a:solidFill>
-            <a:srgbClr val="00899A"/>
-          </a:solidFill>
-          <a:ln>
-            <a:noFill/>
-          </a:ln>
-        </p:spPr>
-        <p:style>
-          <a:lnRef idx="1">
-            <a:schemeClr val="accent1"/>
-          </a:lnRef>
-          <a:fillRef idx="3">
-            <a:schemeClr val="accent1"/>
-          </a:fillRef>
-          <a:effectRef idx="2">
-            <a:schemeClr val="accent1"/>
-          </a:effectRef>
-          <a:fontRef idx="minor">
-            <a:schemeClr val="lt1"/>
-          </a:fontRef>
-        </p:style>
-        <p:txBody>
-          <a:bodyPr rtlCol="0" anchor="ctr"/>
-          <a:lstStyle/>
-          <a:p>
-            <a:pPr algn="ctr"/>
-          </a:p>
-        </p:txBody>
-      </p:sp>
-      <p:sp>
-        <p:nvSpPr>
-          <p:cNvPr id="3" name="Rectangle 2"/>
-          <p:cNvSpPr/>
-          <p:nvPr/>
-        </p:nvSpPr>
-        <p:spPr>
-          <a:xfrm>
-            <a:off x="530352" y="438912"/>
-            <a:ext cx="41148" cy="384048"/>
-          </a:xfrm>
-          <a:prstGeom prst="rect">
-            <a:avLst/>
-          </a:prstGeom>
-          <a:solidFill>
-            <a:srgbClr val="00AD9F"/>
-          </a:solidFill>
-          <a:ln>
-            <a:noFill/>
-          </a:ln>
-        </p:spPr>
-        <p:style>
-          <a:lnRef idx="1">
-            <a:schemeClr val="accent1"/>
-          </a:lnRef>
-          <a:fillRef idx="3">
-            <a:schemeClr val="accent1"/>
-          </a:fillRef>
-          <a:effectRef idx="2">
-            <a:schemeClr val="accent1"/>
-          </a:effectRef>
-          <a:fontRef idx="minor">
-            <a:schemeClr val="lt1"/>
-          </a:fontRef>
-        </p:style>
-        <p:txBody>
-          <a:bodyPr rtlCol="0" anchor="ctr"/>
-          <a:lstStyle/>
-          <a:p>
-            <a:pPr algn="ctr"/>
-          </a:p>
-        </p:txBody>
-      </p:sp>
-      <p:sp>
-        <p:nvSpPr>
-          <p:cNvPr id="4" name="TextBox 3"/>
-          <p:cNvSpPr txBox="1"/>
-          <p:nvPr/>
-        </p:nvSpPr>
-        <p:spPr>
-          <a:xfrm>
-            <a:off x="713232" y="384048"/>
-            <a:ext cx="10378440" cy="566928"/>
-          </a:xfrm>
-          <a:prstGeom prst="rect">
-            <a:avLst/>
-          </a:prstGeom>
-          <a:noFill/>
-        </p:spPr>
-        <p:txBody>
-          <a:bodyPr wrap="square" anchor="ctr" lIns="18288" rIns="18288" tIns="18288" bIns="18288">
-            <a:spAutoFit/>
-          </a:bodyPr>
-          <a:lstStyle/>
-          <a:p>
-            <a:pPr algn="l"/>
-            <a:r>
-              <a:rPr sz="2500" b="1">
-                <a:solidFill>
-                  <a:srgbClr val="0E2D4B"/>
-                </a:solidFill>
-                <a:latin typeface="Noto Sans"/>
-              </a:rPr>
-              <a:t>Cierre · Acero + Algoritmo</a:t>
-            </a:r>
-          </a:p>
-        </p:txBody>
-      </p:sp>
-      <p:sp>
-        <p:nvSpPr>
-          <p:cNvPr id="5" name="TextBox 4"/>
-          <p:cNvSpPr txBox="1"/>
-          <p:nvPr/>
-        </p:nvSpPr>
-        <p:spPr>
-          <a:xfrm>
-            <a:off x="11155680" y="384048"/>
-            <a:ext cx="502920" cy="365760"/>
-          </a:xfrm>
-          <a:prstGeom prst="rect">
-            <a:avLst/>
-          </a:prstGeom>
-          <a:noFill/>
-        </p:spPr>
-        <p:txBody>
-          <a:bodyPr wrap="square" anchor="ctr" lIns="18288" rIns="18288" tIns="18288" bIns="18288">
-            <a:spAutoFit/>
-          </a:bodyPr>
-          <a:lstStyle/>
-          <a:p>
-            <a:pPr algn="r"/>
-            <a:r>
-              <a:rPr sz="950" b="1">
-                <a:solidFill>
-                  <a:srgbClr val="596C82"/>
-                </a:solidFill>
-                <a:latin typeface="Noto Sans"/>
-              </a:rPr>
-              <a:t>14</a:t>
-            </a:r>
-          </a:p>
-        </p:txBody>
-      </p:sp>
-      <p:sp>
-        <p:nvSpPr>
-          <p:cNvPr id="6" name="TextBox 5"/>
-          <p:cNvSpPr txBox="1"/>
-          <p:nvPr/>
-        </p:nvSpPr>
-        <p:spPr>
-          <a:xfrm>
-            <a:off x="713232" y="950976"/>
-            <a:ext cx="10424160" cy="347472"/>
-          </a:xfrm>
-          <a:prstGeom prst="rect">
-            <a:avLst/>
-          </a:prstGeom>
-          <a:noFill/>
-        </p:spPr>
-        <p:txBody>
-          <a:bodyPr wrap="square" anchor="ctr" lIns="18288" rIns="18288" tIns="18288" bIns="18288">
-            <a:spAutoFit/>
-          </a:bodyPr>
-          <a:lstStyle/>
-          <a:p>
-            <a:pPr algn="l"/>
-            <a:r>
-              <a:rPr sz="1060" b="0">
-                <a:solidFill>
-                  <a:srgbClr val="596C82"/>
-                </a:solidFill>
-                <a:latin typeface="Noto Sans"/>
-              </a:rPr>
-              <a:t>La presentación termina donde comienza una nueva pregunta de investigación.</a:t>
-            </a:r>
-          </a:p>
-        </p:txBody>
-      </p:sp>
-      <p:sp>
-        <p:nvSpPr>
-          <p:cNvPr id="7" name="TextBox 6"/>
-          <p:cNvSpPr txBox="1"/>
-          <p:nvPr/>
-        </p:nvSpPr>
-        <p:spPr>
-          <a:xfrm>
-            <a:off x="621792" y="6556248"/>
-            <a:ext cx="6766560" cy="182880"/>
-          </a:xfrm>
-          <a:prstGeom prst="rect">
-            <a:avLst/>
-          </a:prstGeom>
-          <a:noFill/>
-        </p:spPr>
-        <p:txBody>
-          <a:bodyPr wrap="square" anchor="ctr" lIns="18288" rIns="18288" tIns="18288" bIns="18288">
-            <a:spAutoFit/>
-          </a:bodyPr>
-          <a:lstStyle/>
-          <a:p>
-            <a:pPr algn="l"/>
-            <a:r>
-              <a:rPr sz="730" b="0">
-                <a:solidFill>
-                  <a:srgbClr val="758495"/>
-                </a:solidFill>
-                <a:latin typeface="Noto Sans"/>
-              </a:rPr>
-              <a:t>EduBío 360 · Estadística Descriptiva · Biobío 2021</a:t>
-            </a:r>
-          </a:p>
-        </p:txBody>
-      </p:sp>
-      <p:sp>
-        <p:nvSpPr>
-          <p:cNvPr id="8" name="Rounded Rectangle 7"/>
-          <p:cNvSpPr/>
-          <p:nvPr/>
-        </p:nvSpPr>
-        <p:spPr>
-          <a:xfrm>
-            <a:off x="822960" y="1572768"/>
-            <a:ext cx="10552176" cy="2788920"/>
-          </a:xfrm>
-          <a:prstGeom prst="roundRect">
-            <a:avLst/>
-          </a:prstGeom>
-          <a:solidFill>
-            <a:srgbClr val="143D5E"/>
-          </a:solidFill>
-          <a:ln>
-            <a:noFill/>
-          </a:ln>
-        </p:spPr>
-        <p:style>
-          <a:lnRef idx="1">
-            <a:schemeClr val="accent1"/>
-          </a:lnRef>
-          <a:fillRef idx="3">
-            <a:schemeClr val="accent1"/>
-          </a:fillRef>
-          <a:effectRef idx="2">
-            <a:schemeClr val="accent1"/>
-          </a:effectRef>
-          <a:fontRef idx="minor">
-            <a:schemeClr val="lt1"/>
-          </a:fontRef>
-        </p:style>
-        <p:txBody>
-          <a:bodyPr rtlCol="0" anchor="ctr"/>
-          <a:lstStyle/>
-          <a:p>
-            <a:pPr algn="ctr"/>
-          </a:p>
-        </p:txBody>
-      </p:sp>
-      <p:sp>
-        <p:nvSpPr>
-          <p:cNvPr id="9" name="TextBox 8"/>
-          <p:cNvSpPr txBox="1"/>
-          <p:nvPr/>
-        </p:nvSpPr>
-        <p:spPr>
-          <a:xfrm>
-            <a:off x="1143000" y="1901952"/>
-            <a:ext cx="9912096" cy="384048"/>
-          </a:xfrm>
-          <a:prstGeom prst="rect">
-            <a:avLst/>
-          </a:prstGeom>
-          <a:noFill/>
-        </p:spPr>
-        <p:txBody>
-          <a:bodyPr wrap="square" anchor="ctr" lIns="18288" rIns="18288" tIns="18288" bIns="18288">
-            <a:spAutoFit/>
-          </a:bodyPr>
-          <a:lstStyle/>
-          <a:p>
-            <a:pPr algn="ctr"/>
-            <a:r>
-              <a:rPr sz="1050" b="1">
-                <a:solidFill>
-                  <a:srgbClr val="00AD9F"/>
-                </a:solidFill>
-                <a:latin typeface="Noto Sans"/>
-              </a:rPr>
-              <a:t>PREGUNTA FUTURA</a:t>
-            </a:r>
-          </a:p>
-        </p:txBody>
-      </p:sp>
-      <p:sp>
-        <p:nvSpPr>
-          <p:cNvPr id="10" name="TextBox 9"/>
-          <p:cNvSpPr txBox="1"/>
-          <p:nvPr/>
-        </p:nvSpPr>
-        <p:spPr>
-          <a:xfrm>
-            <a:off x="1261872" y="2468880"/>
-            <a:ext cx="9674352" cy="1060704"/>
-          </a:xfrm>
-          <a:prstGeom prst="rect">
-            <a:avLst/>
-          </a:prstGeom>
-          <a:noFill/>
-        </p:spPr>
-        <p:txBody>
-          <a:bodyPr wrap="square" anchor="ctr" lIns="18288" rIns="18288" tIns="18288" bIns="18288">
-            <a:spAutoFit/>
-          </a:bodyPr>
-          <a:lstStyle/>
-          <a:p>
-            <a:pPr algn="ctr"/>
-            <a:r>
-              <a:rPr sz="2000" b="1">
-                <a:solidFill>
-                  <a:srgbClr val="FFFFFF"/>
-                </a:solidFill>
-                <a:latin typeface="Noto Sans"/>
-              </a:rPr>
-              <a:t>¿Está evolucionando el capital humano del Biobío al mismo ritmo que la transformación productiva que la región proyecta?</a:t>
-            </a:r>
-          </a:p>
-        </p:txBody>
-      </p:sp>
-      <p:sp>
-        <p:nvSpPr>
-          <p:cNvPr id="11" name="Rounded Rectangle 10"/>
-          <p:cNvSpPr/>
-          <p:nvPr/>
-        </p:nvSpPr>
-        <p:spPr>
-          <a:xfrm>
-            <a:off x="914400" y="4828032"/>
-            <a:ext cx="2148840" cy="841248"/>
-          </a:xfrm>
-          <a:prstGeom prst="roundRect">
-            <a:avLst/>
-          </a:prstGeom>
-          <a:solidFill>
-            <a:srgbClr val="F6F9FC"/>
-          </a:solidFill>
-          <a:ln w="8890">
-            <a:solidFill>
-              <a:srgbClr val="DFE6ED"/>
-            </a:solidFill>
-          </a:ln>
-        </p:spPr>
-        <p:style>
-          <a:lnRef idx="1">
-            <a:schemeClr val="accent1"/>
-          </a:lnRef>
-          <a:fillRef idx="3">
-            <a:schemeClr val="accent1"/>
-          </a:fillRef>
-          <a:effectRef idx="2">
-            <a:schemeClr val="accent1"/>
-          </a:effectRef>
-          <a:fontRef idx="minor">
-            <a:schemeClr val="lt1"/>
-          </a:fontRef>
-        </p:style>
-        <p:txBody>
-          <a:bodyPr rtlCol="0" anchor="ctr"/>
-          <a:lstStyle/>
-          <a:p>
-            <a:pPr algn="ctr"/>
-          </a:p>
-        </p:txBody>
-      </p:sp>
-      <p:sp>
-        <p:nvSpPr>
-          <p:cNvPr id="12" name="TextBox 11"/>
-          <p:cNvSpPr txBox="1"/>
-          <p:nvPr/>
-        </p:nvSpPr>
-        <p:spPr>
-          <a:xfrm>
-            <a:off x="1024128" y="4919472"/>
-            <a:ext cx="1929384" cy="603504"/>
-          </a:xfrm>
-          <a:prstGeom prst="rect">
-            <a:avLst/>
-          </a:prstGeom>
-          <a:noFill/>
-        </p:spPr>
-        <p:txBody>
-          <a:bodyPr wrap="square" anchor="ctr" lIns="18288" rIns="18288" tIns="18288" bIns="18288">
-            <a:spAutoFit/>
-          </a:bodyPr>
-          <a:lstStyle/>
-          <a:p>
-            <a:pPr algn="ctr"/>
-            <a:r>
-              <a:rPr sz="1000" b="1">
-                <a:solidFill>
-                  <a:srgbClr val="00AD9F"/>
-                </a:solidFill>
-                <a:latin typeface="Noto Sans"/>
-              </a:rPr>
-              <a:t>2021
-Línea base</a:t>
-            </a:r>
-          </a:p>
-        </p:txBody>
-      </p:sp>
-      <p:sp>
-        <p:nvSpPr>
-          <p:cNvPr id="13" name="TextBox 12"/>
-          <p:cNvSpPr txBox="1"/>
-          <p:nvPr/>
-        </p:nvSpPr>
-        <p:spPr>
-          <a:xfrm>
-            <a:off x="3182112" y="5010912"/>
-            <a:ext cx="310896" cy="310896"/>
-          </a:xfrm>
-          <a:prstGeom prst="rect">
-            <a:avLst/>
-          </a:prstGeom>
-          <a:noFill/>
-        </p:spPr>
-        <p:txBody>
-          <a:bodyPr wrap="square" anchor="ctr" lIns="18288" rIns="18288" tIns="18288" bIns="18288">
-            <a:spAutoFit/>
-          </a:bodyPr>
-          <a:lstStyle/>
-          <a:p>
-            <a:pPr algn="ctr"/>
-            <a:r>
-              <a:rPr sz="1400" b="1">
-                <a:solidFill>
-                  <a:srgbClr val="596C82"/>
-                </a:solidFill>
-                <a:latin typeface="Noto Sans"/>
-              </a:rPr>
-              <a:t>→</a:t>
-            </a:r>
-          </a:p>
-        </p:txBody>
-      </p:sp>
-      <p:sp>
-        <p:nvSpPr>
-          <p:cNvPr id="14" name="Rounded Rectangle 13"/>
-          <p:cNvSpPr/>
-          <p:nvPr/>
-        </p:nvSpPr>
-        <p:spPr>
-          <a:xfrm>
-            <a:off x="3657600" y="4828032"/>
-            <a:ext cx="2148840" cy="841248"/>
-          </a:xfrm>
-          <a:prstGeom prst="roundRect">
-            <a:avLst/>
-          </a:prstGeom>
-          <a:solidFill>
-            <a:srgbClr val="F6F9FC"/>
-          </a:solidFill>
-          <a:ln w="8890">
-            <a:solidFill>
-              <a:srgbClr val="DFE6ED"/>
-            </a:solidFill>
-          </a:ln>
-        </p:spPr>
-        <p:style>
-          <a:lnRef idx="1">
-            <a:schemeClr val="accent1"/>
-          </a:lnRef>
-          <a:fillRef idx="3">
-            <a:schemeClr val="accent1"/>
-          </a:fillRef>
-          <a:effectRef idx="2">
-            <a:schemeClr val="accent1"/>
-          </a:effectRef>
-          <a:fontRef idx="minor">
-            <a:schemeClr val="lt1"/>
-          </a:fontRef>
-        </p:style>
-        <p:txBody>
-          <a:bodyPr rtlCol="0" anchor="ctr"/>
-          <a:lstStyle/>
-          <a:p>
-            <a:pPr algn="ctr"/>
-          </a:p>
-        </p:txBody>
-      </p:sp>
-      <p:sp>
-        <p:nvSpPr>
-          <p:cNvPr id="15" name="TextBox 14"/>
-          <p:cNvSpPr txBox="1"/>
-          <p:nvPr/>
-        </p:nvSpPr>
-        <p:spPr>
-          <a:xfrm>
-            <a:off x="3767328" y="4919472"/>
-            <a:ext cx="1929384" cy="603504"/>
-          </a:xfrm>
-          <a:prstGeom prst="rect">
-            <a:avLst/>
-          </a:prstGeom>
-          <a:noFill/>
-        </p:spPr>
-        <p:txBody>
-          <a:bodyPr wrap="square" anchor="ctr" lIns="18288" rIns="18288" tIns="18288" bIns="18288">
-            <a:spAutoFit/>
-          </a:bodyPr>
-          <a:lstStyle/>
-          <a:p>
-            <a:pPr algn="ctr"/>
-            <a:r>
-              <a:rPr sz="1000" b="1">
-                <a:solidFill>
-                  <a:srgbClr val="077596"/>
-                </a:solidFill>
-                <a:latin typeface="Noto Sans"/>
-              </a:rPr>
-              <a:t>Datos
-descriptivos</a:t>
-            </a:r>
-          </a:p>
-        </p:txBody>
-      </p:sp>
-      <p:sp>
-        <p:nvSpPr>
-          <p:cNvPr id="16" name="TextBox 15"/>
-          <p:cNvSpPr txBox="1"/>
-          <p:nvPr/>
-        </p:nvSpPr>
-        <p:spPr>
-          <a:xfrm>
-            <a:off x="5925312" y="5010912"/>
-            <a:ext cx="310896" cy="310896"/>
-          </a:xfrm>
-          <a:prstGeom prst="rect">
-            <a:avLst/>
-          </a:prstGeom>
-          <a:noFill/>
-        </p:spPr>
-        <p:txBody>
-          <a:bodyPr wrap="square" anchor="ctr" lIns="18288" rIns="18288" tIns="18288" bIns="18288">
-            <a:spAutoFit/>
-          </a:bodyPr>
-          <a:lstStyle/>
-          <a:p>
-            <a:pPr algn="ctr"/>
-            <a:r>
-              <a:rPr sz="1400" b="1">
-                <a:solidFill>
-                  <a:srgbClr val="596C82"/>
-                </a:solidFill>
-                <a:latin typeface="Noto Sans"/>
-              </a:rPr>
-              <a:t>→</a:t>
-            </a:r>
-          </a:p>
-        </p:txBody>
-      </p:sp>
-      <p:sp>
-        <p:nvSpPr>
-          <p:cNvPr id="17" name="Rounded Rectangle 16"/>
-          <p:cNvSpPr/>
-          <p:nvPr/>
-        </p:nvSpPr>
-        <p:spPr>
-          <a:xfrm>
-            <a:off x="6400800" y="4828032"/>
-            <a:ext cx="2148840" cy="841248"/>
-          </a:xfrm>
-          <a:prstGeom prst="roundRect">
-            <a:avLst/>
-          </a:prstGeom>
-          <a:solidFill>
-            <a:srgbClr val="F6F9FC"/>
-          </a:solidFill>
-          <a:ln w="8890">
-            <a:solidFill>
-              <a:srgbClr val="DFE6ED"/>
-            </a:solidFill>
-          </a:ln>
-        </p:spPr>
-        <p:style>
-          <a:lnRef idx="1">
-            <a:schemeClr val="accent1"/>
-          </a:lnRef>
-          <a:fillRef idx="3">
-            <a:schemeClr val="accent1"/>
-          </a:fillRef>
-          <a:effectRef idx="2">
-            <a:schemeClr val="accent1"/>
-          </a:effectRef>
-          <a:fontRef idx="minor">
-            <a:schemeClr val="lt1"/>
-          </a:fontRef>
-        </p:style>
-        <p:txBody>
-          <a:bodyPr rtlCol="0" anchor="ctr"/>
-          <a:lstStyle/>
-          <a:p>
-            <a:pPr algn="ctr"/>
-          </a:p>
-        </p:txBody>
-      </p:sp>
-      <p:sp>
-        <p:nvSpPr>
-          <p:cNvPr id="18" name="TextBox 17"/>
-          <p:cNvSpPr txBox="1"/>
-          <p:nvPr/>
-        </p:nvSpPr>
-        <p:spPr>
-          <a:xfrm>
-            <a:off x="6510528" y="4919472"/>
-            <a:ext cx="1929384" cy="603504"/>
-          </a:xfrm>
-          <a:prstGeom prst="rect">
-            <a:avLst/>
-          </a:prstGeom>
-          <a:noFill/>
-        </p:spPr>
-        <p:txBody>
-          <a:bodyPr wrap="square" anchor="ctr" lIns="18288" rIns="18288" tIns="18288" bIns="18288">
-            <a:spAutoFit/>
-          </a:bodyPr>
-          <a:lstStyle/>
-          <a:p>
-            <a:pPr algn="ctr"/>
-            <a:r>
-              <a:rPr sz="1000" b="1">
-                <a:solidFill>
-                  <a:srgbClr val="F59753"/>
-                </a:solidFill>
-                <a:latin typeface="Noto Sans"/>
-              </a:rPr>
-              <a:t>Acero +
-Algoritmo</a:t>
-            </a:r>
-          </a:p>
-        </p:txBody>
-      </p:sp>
-      <p:sp>
-        <p:nvSpPr>
-          <p:cNvPr id="19" name="TextBox 18"/>
-          <p:cNvSpPr txBox="1"/>
-          <p:nvPr/>
-        </p:nvSpPr>
-        <p:spPr>
-          <a:xfrm>
-            <a:off x="8668512" y="5010912"/>
-            <a:ext cx="310896" cy="310896"/>
-          </a:xfrm>
-          <a:prstGeom prst="rect">
-            <a:avLst/>
-          </a:prstGeom>
-          <a:noFill/>
-        </p:spPr>
-        <p:txBody>
-          <a:bodyPr wrap="square" anchor="ctr" lIns="18288" rIns="18288" tIns="18288" bIns="18288">
-            <a:spAutoFit/>
-          </a:bodyPr>
-          <a:lstStyle/>
-          <a:p>
-            <a:pPr algn="ctr"/>
-            <a:r>
-              <a:rPr sz="1400" b="1">
-                <a:solidFill>
-                  <a:srgbClr val="596C82"/>
-                </a:solidFill>
-                <a:latin typeface="Noto Sans"/>
-              </a:rPr>
-              <a:t>→</a:t>
-            </a:r>
-          </a:p>
-        </p:txBody>
-      </p:sp>
-      <p:sp>
-        <p:nvSpPr>
-          <p:cNvPr id="20" name="Rounded Rectangle 19"/>
-          <p:cNvSpPr/>
-          <p:nvPr/>
-        </p:nvSpPr>
-        <p:spPr>
-          <a:xfrm>
-            <a:off x="9144000" y="4828032"/>
-            <a:ext cx="2148840" cy="841248"/>
-          </a:xfrm>
-          <a:prstGeom prst="roundRect">
-            <a:avLst/>
-          </a:prstGeom>
-          <a:solidFill>
-            <a:srgbClr val="F6F9FC"/>
-          </a:solidFill>
-          <a:ln w="8890">
-            <a:solidFill>
-              <a:srgbClr val="DFE6ED"/>
-            </a:solidFill>
-          </a:ln>
-        </p:spPr>
-        <p:style>
-          <a:lnRef idx="1">
-            <a:schemeClr val="accent1"/>
-          </a:lnRef>
-          <a:fillRef idx="3">
-            <a:schemeClr val="accent1"/>
-          </a:fillRef>
-          <a:effectRef idx="2">
-            <a:schemeClr val="accent1"/>
-          </a:effectRef>
-          <a:fontRef idx="minor">
-            <a:schemeClr val="lt1"/>
-          </a:fontRef>
-        </p:style>
-        <p:txBody>
-          <a:bodyPr rtlCol="0" anchor="ctr"/>
-          <a:lstStyle/>
-          <a:p>
-            <a:pPr algn="ctr"/>
-          </a:p>
-        </p:txBody>
-      </p:sp>
-      <p:sp>
-        <p:nvSpPr>
-          <p:cNvPr id="21" name="TextBox 20"/>
-          <p:cNvSpPr txBox="1"/>
-          <p:nvPr/>
-        </p:nvSpPr>
-        <p:spPr>
-          <a:xfrm>
-            <a:off x="9253728" y="4919472"/>
-            <a:ext cx="1929384" cy="603504"/>
-          </a:xfrm>
-          <a:prstGeom prst="rect">
-            <a:avLst/>
-          </a:prstGeom>
-          <a:noFill/>
-        </p:spPr>
-        <p:txBody>
-          <a:bodyPr wrap="square" anchor="ctr" lIns="18288" rIns="18288" tIns="18288" bIns="18288">
-            <a:spAutoFit/>
-          </a:bodyPr>
-          <a:lstStyle/>
-          <a:p>
-            <a:pPr algn="ctr"/>
-            <a:r>
-              <a:rPr sz="1000" b="1">
-                <a:solidFill>
-                  <a:srgbClr val="3AA484"/>
-                </a:solidFill>
-                <a:latin typeface="Noto Sans"/>
-              </a:rPr>
-              <a:t>Investigación
-futura</a:t>
-            </a:r>
-          </a:p>
-        </p:txBody>
-      </p:sp>
-      <p:sp>
-        <p:nvSpPr>
-          <p:cNvPr id="22" name="TextBox 21"/>
-          <p:cNvSpPr txBox="1"/>
-          <p:nvPr/>
-        </p:nvSpPr>
-        <p:spPr>
-          <a:xfrm>
-            <a:off x="841248" y="6016752"/>
-            <a:ext cx="10424160" cy="310896"/>
-          </a:xfrm>
-          <a:prstGeom prst="rect">
-            <a:avLst/>
-          </a:prstGeom>
-          <a:noFill/>
-        </p:spPr>
-        <p:txBody>
-          <a:bodyPr wrap="square" anchor="ctr" lIns="18288" rIns="18288" tIns="18288" bIns="18288">
-            <a:spAutoFit/>
-          </a:bodyPr>
-          <a:lstStyle/>
-          <a:p>
-            <a:pPr algn="ctr"/>
-            <a:r>
-              <a:rPr sz="950" b="1">
-                <a:solidFill>
-                  <a:srgbClr val="596C82"/>
-                </a:solidFill>
-                <a:latin typeface="Noto Sans"/>
-              </a:rPr>
-              <a:t>Mensaje final: transformar no significa reemplazar la identidad industrial, sino incorporar más capacidades digitales, automatización, datos e innovación.</a:t>
             </a:r>
           </a:p>
         </p:txBody>
@@ -9006,15 +8144,8 @@
           </a:bodyPr>
           <a:lstStyle/>
           <a:p>
-            <a:pPr algn="r"/>
-            <a:r>
-              <a:rPr sz="950" b="1">
-                <a:solidFill>
-                  <a:srgbClr val="596C82"/>
-                </a:solidFill>
-                <a:latin typeface="Noto Sans"/>
-              </a:rPr>
-              <a:t>15</a:t>
+            <a:r>
+              <a:t>12</a:t>
             </a:r>
           </a:p>
         </p:txBody>
@@ -10938,15 +10069,8 @@
           </a:bodyPr>
           <a:lstStyle/>
           <a:p>
-            <a:pPr algn="r"/>
-            <a:r>
-              <a:rPr sz="950" b="1">
-                <a:solidFill>
-                  <a:srgbClr val="596C82"/>
-                </a:solidFill>
-                <a:latin typeface="Noto Sans"/>
-              </a:rPr>
-              <a:t>16</a:t>
+            <a:r>
+              <a:t>13</a:t>
             </a:r>
           </a:p>
         </p:txBody>
@@ -11707,3046 +10831,6 @@
                 <a:latin typeface="Noto Sans"/>
               </a:rPr>
               <a:t>Patrones, diferencias y asociaciones en 2021; no causalidad ni evolución temporal.</a:t>
-            </a:r>
-          </a:p>
-        </p:txBody>
-      </p:sp>
-    </p:spTree>
-  </p:cSld>
-  <p:clrMapOvr>
-    <a:masterClrMapping/>
-  </p:clrMapOvr>
-</p:sld>
-</file>
-
-<file path=ppt/slides/slide17.xml><?xml version="1.0" encoding="utf-8"?>
-<p:sld xmlns:a="http://schemas.openxmlformats.org/drawingml/2006/main" xmlns:p="http://schemas.openxmlformats.org/presentationml/2006/main" xmlns:r="http://schemas.openxmlformats.org/officeDocument/2006/relationships">
-  <p:cSld>
-    <p:bg>
-      <p:bgPr>
-        <a:solidFill>
-          <a:srgbClr val="FFFFFF"/>
-        </a:solidFill>
-        <a:effectLst/>
-      </p:bgPr>
-    </p:bg>
-    <p:spTree>
-      <p:nvGrpSpPr>
-        <p:cNvPr id="1" name=""/>
-        <p:cNvGrpSpPr/>
-        <p:nvPr/>
-      </p:nvGrpSpPr>
-      <p:grpSpPr/>
-      <p:sp>
-        <p:nvSpPr>
-          <p:cNvPr id="2" name="Rectangle 1"/>
-          <p:cNvSpPr/>
-          <p:nvPr/>
-        </p:nvSpPr>
-        <p:spPr>
-          <a:xfrm>
-            <a:off x="0" y="0"/>
-            <a:ext cx="12191695" cy="50292"/>
-          </a:xfrm>
-          <a:prstGeom prst="rect">
-            <a:avLst/>
-          </a:prstGeom>
-          <a:solidFill>
-            <a:srgbClr val="00899A"/>
-          </a:solidFill>
-          <a:ln>
-            <a:noFill/>
-          </a:ln>
-        </p:spPr>
-        <p:style>
-          <a:lnRef idx="1">
-            <a:schemeClr val="accent1"/>
-          </a:lnRef>
-          <a:fillRef idx="3">
-            <a:schemeClr val="accent1"/>
-          </a:fillRef>
-          <a:effectRef idx="2">
-            <a:schemeClr val="accent1"/>
-          </a:effectRef>
-          <a:fontRef idx="minor">
-            <a:schemeClr val="lt1"/>
-          </a:fontRef>
-        </p:style>
-        <p:txBody>
-          <a:bodyPr rtlCol="0" anchor="ctr"/>
-          <a:lstStyle/>
-          <a:p>
-            <a:pPr algn="ctr"/>
-          </a:p>
-        </p:txBody>
-      </p:sp>
-      <p:sp>
-        <p:nvSpPr>
-          <p:cNvPr id="3" name="Rectangle 2"/>
-          <p:cNvSpPr/>
-          <p:nvPr/>
-        </p:nvSpPr>
-        <p:spPr>
-          <a:xfrm>
-            <a:off x="530352" y="438912"/>
-            <a:ext cx="41148" cy="384048"/>
-          </a:xfrm>
-          <a:prstGeom prst="rect">
-            <a:avLst/>
-          </a:prstGeom>
-          <a:solidFill>
-            <a:srgbClr val="00AD9F"/>
-          </a:solidFill>
-          <a:ln>
-            <a:noFill/>
-          </a:ln>
-        </p:spPr>
-        <p:style>
-          <a:lnRef idx="1">
-            <a:schemeClr val="accent1"/>
-          </a:lnRef>
-          <a:fillRef idx="3">
-            <a:schemeClr val="accent1"/>
-          </a:fillRef>
-          <a:effectRef idx="2">
-            <a:schemeClr val="accent1"/>
-          </a:effectRef>
-          <a:fontRef idx="minor">
-            <a:schemeClr val="lt1"/>
-          </a:fontRef>
-        </p:style>
-        <p:txBody>
-          <a:bodyPr rtlCol="0" anchor="ctr"/>
-          <a:lstStyle/>
-          <a:p>
-            <a:pPr algn="ctr"/>
-          </a:p>
-        </p:txBody>
-      </p:sp>
-      <p:sp>
-        <p:nvSpPr>
-          <p:cNvPr id="4" name="TextBox 3"/>
-          <p:cNvSpPr txBox="1"/>
-          <p:nvPr/>
-        </p:nvSpPr>
-        <p:spPr>
-          <a:xfrm>
-            <a:off x="713232" y="384048"/>
-            <a:ext cx="10378440" cy="566928"/>
-          </a:xfrm>
-          <a:prstGeom prst="rect">
-            <a:avLst/>
-          </a:prstGeom>
-          <a:noFill/>
-        </p:spPr>
-        <p:txBody>
-          <a:bodyPr wrap="square" anchor="ctr" lIns="18288" rIns="18288" tIns="18288" bIns="18288">
-            <a:spAutoFit/>
-          </a:bodyPr>
-          <a:lstStyle/>
-          <a:p>
-            <a:pPr algn="l"/>
-            <a:r>
-              <a:rPr sz="2500" b="1">
-                <a:solidFill>
-                  <a:srgbClr val="0E2D4B"/>
-                </a:solidFill>
-                <a:latin typeface="Noto Sans"/>
-              </a:rPr>
-              <a:t>ANEXO · Conceptos clave para la defensa</a:t>
-            </a:r>
-          </a:p>
-        </p:txBody>
-      </p:sp>
-      <p:sp>
-        <p:nvSpPr>
-          <p:cNvPr id="5" name="TextBox 4"/>
-          <p:cNvSpPr txBox="1"/>
-          <p:nvPr/>
-        </p:nvSpPr>
-        <p:spPr>
-          <a:xfrm>
-            <a:off x="11155680" y="384048"/>
-            <a:ext cx="502920" cy="365760"/>
-          </a:xfrm>
-          <a:prstGeom prst="rect">
-            <a:avLst/>
-          </a:prstGeom>
-          <a:noFill/>
-        </p:spPr>
-        <p:txBody>
-          <a:bodyPr wrap="square" anchor="ctr" lIns="18288" rIns="18288" tIns="18288" bIns="18288">
-            <a:spAutoFit/>
-          </a:bodyPr>
-          <a:lstStyle/>
-          <a:p>
-            <a:pPr algn="r"/>
-            <a:r>
-              <a:rPr sz="950" b="1">
-                <a:solidFill>
-                  <a:srgbClr val="596C82"/>
-                </a:solidFill>
-                <a:latin typeface="Noto Sans"/>
-              </a:rPr>
-              <a:t>17</a:t>
-            </a:r>
-          </a:p>
-        </p:txBody>
-      </p:sp>
-      <p:sp>
-        <p:nvSpPr>
-          <p:cNvPr id="6" name="TextBox 5"/>
-          <p:cNvSpPr txBox="1"/>
-          <p:nvPr/>
-        </p:nvSpPr>
-        <p:spPr>
-          <a:xfrm>
-            <a:off x="713232" y="950976"/>
-            <a:ext cx="10424160" cy="347472"/>
-          </a:xfrm>
-          <a:prstGeom prst="rect">
-            <a:avLst/>
-          </a:prstGeom>
-          <a:noFill/>
-        </p:spPr>
-        <p:txBody>
-          <a:bodyPr wrap="square" anchor="ctr" lIns="18288" rIns="18288" tIns="18288" bIns="18288">
-            <a:spAutoFit/>
-          </a:bodyPr>
-          <a:lstStyle/>
-          <a:p>
-            <a:pPr algn="l"/>
-            <a:r>
-              <a:rPr sz="1060" b="0">
-                <a:solidFill>
-                  <a:srgbClr val="596C82"/>
-                </a:solidFill>
-                <a:latin typeface="Noto Sans"/>
-              </a:rPr>
-              <a:t>No memorices definiciones largas: entiende qué mide cada concepto y dónde lo usamos.</a:t>
-            </a:r>
-          </a:p>
-        </p:txBody>
-      </p:sp>
-      <p:sp>
-        <p:nvSpPr>
-          <p:cNvPr id="7" name="TextBox 6"/>
-          <p:cNvSpPr txBox="1"/>
-          <p:nvPr/>
-        </p:nvSpPr>
-        <p:spPr>
-          <a:xfrm>
-            <a:off x="621792" y="6556248"/>
-            <a:ext cx="6766560" cy="182880"/>
-          </a:xfrm>
-          <a:prstGeom prst="rect">
-            <a:avLst/>
-          </a:prstGeom>
-          <a:noFill/>
-        </p:spPr>
-        <p:txBody>
-          <a:bodyPr wrap="square" anchor="ctr" lIns="18288" rIns="18288" tIns="18288" bIns="18288">
-            <a:spAutoFit/>
-          </a:bodyPr>
-          <a:lstStyle/>
-          <a:p>
-            <a:pPr algn="l"/>
-            <a:r>
-              <a:rPr sz="730" b="0">
-                <a:solidFill>
-                  <a:srgbClr val="758495"/>
-                </a:solidFill>
-                <a:latin typeface="Noto Sans"/>
-              </a:rPr>
-              <a:t>EduBío 360 · Estadística Descriptiva · Biobío 2021</a:t>
-            </a:r>
-          </a:p>
-        </p:txBody>
-      </p:sp>
-      <p:sp>
-        <p:nvSpPr>
-          <p:cNvPr id="8" name="Rounded Rectangle 7"/>
-          <p:cNvSpPr/>
-          <p:nvPr/>
-        </p:nvSpPr>
-        <p:spPr>
-          <a:xfrm>
-            <a:off x="749808" y="1609344"/>
-            <a:ext cx="5010912" cy="1700784"/>
-          </a:xfrm>
-          <a:prstGeom prst="roundRect">
-            <a:avLst/>
-          </a:prstGeom>
-          <a:solidFill>
-            <a:srgbClr val="F6F9FC"/>
-          </a:solidFill>
-          <a:ln w="8890">
-            <a:solidFill>
-              <a:srgbClr val="DFE6ED"/>
-            </a:solidFill>
-          </a:ln>
-        </p:spPr>
-        <p:style>
-          <a:lnRef idx="1">
-            <a:schemeClr val="accent1"/>
-          </a:lnRef>
-          <a:fillRef idx="3">
-            <a:schemeClr val="accent1"/>
-          </a:fillRef>
-          <a:effectRef idx="2">
-            <a:schemeClr val="accent1"/>
-          </a:effectRef>
-          <a:fontRef idx="minor">
-            <a:schemeClr val="lt1"/>
-          </a:fontRef>
-        </p:style>
-        <p:txBody>
-          <a:bodyPr rtlCol="0" anchor="ctr"/>
-          <a:lstStyle/>
-          <a:p>
-            <a:pPr algn="ctr"/>
-          </a:p>
-        </p:txBody>
-      </p:sp>
-      <p:sp>
-        <p:nvSpPr>
-          <p:cNvPr id="9" name="Rounded Rectangle 8"/>
-          <p:cNvSpPr/>
-          <p:nvPr/>
-        </p:nvSpPr>
-        <p:spPr>
-          <a:xfrm>
-            <a:off x="950976" y="1792224"/>
-            <a:ext cx="1965960" cy="310896"/>
-          </a:xfrm>
-          <a:prstGeom prst="roundRect">
-            <a:avLst/>
-          </a:prstGeom>
-          <a:solidFill>
-            <a:srgbClr val="00AD9F"/>
-          </a:solidFill>
-          <a:ln>
-            <a:noFill/>
-          </a:ln>
-        </p:spPr>
-        <p:style>
-          <a:lnRef idx="1">
-            <a:schemeClr val="accent1"/>
-          </a:lnRef>
-          <a:fillRef idx="3">
-            <a:schemeClr val="accent1"/>
-          </a:fillRef>
-          <a:effectRef idx="2">
-            <a:schemeClr val="accent1"/>
-          </a:effectRef>
-          <a:fontRef idx="minor">
-            <a:schemeClr val="lt1"/>
-          </a:fontRef>
-        </p:style>
-        <p:txBody>
-          <a:bodyPr rtlCol="0" anchor="ctr"/>
-          <a:lstStyle/>
-          <a:p>
-            <a:pPr algn="ctr"/>
-          </a:p>
-        </p:txBody>
-      </p:sp>
-      <p:sp>
-        <p:nvSpPr>
-          <p:cNvPr id="10" name="TextBox 9"/>
-          <p:cNvSpPr txBox="1"/>
-          <p:nvPr/>
-        </p:nvSpPr>
-        <p:spPr>
-          <a:xfrm>
-            <a:off x="987552" y="1810512"/>
-            <a:ext cx="1892807" cy="256032"/>
-          </a:xfrm>
-          <a:prstGeom prst="rect">
-            <a:avLst/>
-          </a:prstGeom>
-          <a:noFill/>
-        </p:spPr>
-        <p:txBody>
-          <a:bodyPr wrap="square" anchor="ctr" lIns="18288" rIns="18288" tIns="18288" bIns="18288">
-            <a:spAutoFit/>
-          </a:bodyPr>
-          <a:lstStyle/>
-          <a:p>
-            <a:pPr algn="ctr"/>
-            <a:r>
-              <a:rPr sz="819" b="1">
-                <a:solidFill>
-                  <a:srgbClr val="FFFFFF"/>
-                </a:solidFill>
-                <a:latin typeface="Noto Sans"/>
-              </a:rPr>
-              <a:t>Frecuencia relativa</a:t>
-            </a:r>
-          </a:p>
-        </p:txBody>
-      </p:sp>
-      <p:sp>
-        <p:nvSpPr>
-          <p:cNvPr id="11" name="TextBox 10"/>
-          <p:cNvSpPr txBox="1"/>
-          <p:nvPr/>
-        </p:nvSpPr>
-        <p:spPr>
-          <a:xfrm>
-            <a:off x="978407" y="2267712"/>
-            <a:ext cx="4553712" cy="329184"/>
-          </a:xfrm>
-          <a:prstGeom prst="rect">
-            <a:avLst/>
-          </a:prstGeom>
-          <a:noFill/>
-        </p:spPr>
-        <p:txBody>
-          <a:bodyPr wrap="square" anchor="ctr" lIns="18288" rIns="18288" tIns="18288" bIns="18288">
-            <a:spAutoFit/>
-          </a:bodyPr>
-          <a:lstStyle/>
-          <a:p>
-            <a:pPr algn="l"/>
-            <a:r>
-              <a:rPr sz="1130" b="1">
-                <a:solidFill>
-                  <a:srgbClr val="0E2D4B"/>
-                </a:solidFill>
-                <a:latin typeface="Noto Sans"/>
-              </a:rPr>
-              <a:t>hi = fi / N × 100</a:t>
-            </a:r>
-          </a:p>
-        </p:txBody>
-      </p:sp>
-      <p:sp>
-        <p:nvSpPr>
-          <p:cNvPr id="12" name="TextBox 11"/>
-          <p:cNvSpPr txBox="1"/>
-          <p:nvPr/>
-        </p:nvSpPr>
-        <p:spPr>
-          <a:xfrm>
-            <a:off x="978407" y="2651760"/>
-            <a:ext cx="4553712" cy="438912"/>
-          </a:xfrm>
-          <a:prstGeom prst="rect">
-            <a:avLst/>
-          </a:prstGeom>
-          <a:noFill/>
-        </p:spPr>
-        <p:txBody>
-          <a:bodyPr wrap="square" anchor="ctr" lIns="18288" rIns="18288" tIns="18288" bIns="18288">
-            <a:spAutoFit/>
-          </a:bodyPr>
-          <a:lstStyle/>
-          <a:p>
-            <a:pPr algn="l"/>
-            <a:r>
-              <a:rPr sz="880" b="0">
-                <a:solidFill>
-                  <a:srgbClr val="596C82"/>
-                </a:solidFill>
-                <a:latin typeface="Noto Sans"/>
-              </a:rPr>
-              <a:t>Porcentaje que representa una categoría respecto del total.</a:t>
-            </a:r>
-          </a:p>
-        </p:txBody>
-      </p:sp>
-      <p:sp>
-        <p:nvSpPr>
-          <p:cNvPr id="13" name="Rounded Rectangle 12"/>
-          <p:cNvSpPr/>
-          <p:nvPr/>
-        </p:nvSpPr>
-        <p:spPr>
-          <a:xfrm>
-            <a:off x="6236208" y="1609344"/>
-            <a:ext cx="5010912" cy="1700784"/>
-          </a:xfrm>
-          <a:prstGeom prst="roundRect">
-            <a:avLst/>
-          </a:prstGeom>
-          <a:solidFill>
-            <a:srgbClr val="F6F9FC"/>
-          </a:solidFill>
-          <a:ln w="8890">
-            <a:solidFill>
-              <a:srgbClr val="DFE6ED"/>
-            </a:solidFill>
-          </a:ln>
-        </p:spPr>
-        <p:style>
-          <a:lnRef idx="1">
-            <a:schemeClr val="accent1"/>
-          </a:lnRef>
-          <a:fillRef idx="3">
-            <a:schemeClr val="accent1"/>
-          </a:fillRef>
-          <a:effectRef idx="2">
-            <a:schemeClr val="accent1"/>
-          </a:effectRef>
-          <a:fontRef idx="minor">
-            <a:schemeClr val="lt1"/>
-          </a:fontRef>
-        </p:style>
-        <p:txBody>
-          <a:bodyPr rtlCol="0" anchor="ctr"/>
-          <a:lstStyle/>
-          <a:p>
-            <a:pPr algn="ctr"/>
-          </a:p>
-        </p:txBody>
-      </p:sp>
-      <p:sp>
-        <p:nvSpPr>
-          <p:cNvPr id="14" name="Rounded Rectangle 13"/>
-          <p:cNvSpPr/>
-          <p:nvPr/>
-        </p:nvSpPr>
-        <p:spPr>
-          <a:xfrm>
-            <a:off x="6437376" y="1792224"/>
-            <a:ext cx="1965960" cy="310896"/>
-          </a:xfrm>
-          <a:prstGeom prst="roundRect">
-            <a:avLst/>
-          </a:prstGeom>
-          <a:solidFill>
-            <a:srgbClr val="F59753"/>
-          </a:solidFill>
-          <a:ln>
-            <a:noFill/>
-          </a:ln>
-        </p:spPr>
-        <p:style>
-          <a:lnRef idx="1">
-            <a:schemeClr val="accent1"/>
-          </a:lnRef>
-          <a:fillRef idx="3">
-            <a:schemeClr val="accent1"/>
-          </a:fillRef>
-          <a:effectRef idx="2">
-            <a:schemeClr val="accent1"/>
-          </a:effectRef>
-          <a:fontRef idx="minor">
-            <a:schemeClr val="lt1"/>
-          </a:fontRef>
-        </p:style>
-        <p:txBody>
-          <a:bodyPr rtlCol="0" anchor="ctr"/>
-          <a:lstStyle/>
-          <a:p>
-            <a:pPr algn="ctr"/>
-          </a:p>
-        </p:txBody>
-      </p:sp>
-      <p:sp>
-        <p:nvSpPr>
-          <p:cNvPr id="15" name="TextBox 14"/>
-          <p:cNvSpPr txBox="1"/>
-          <p:nvPr/>
-        </p:nvSpPr>
-        <p:spPr>
-          <a:xfrm>
-            <a:off x="6473952" y="1810512"/>
-            <a:ext cx="1892807" cy="256032"/>
-          </a:xfrm>
-          <a:prstGeom prst="rect">
-            <a:avLst/>
-          </a:prstGeom>
-          <a:noFill/>
-        </p:spPr>
-        <p:txBody>
-          <a:bodyPr wrap="square" anchor="ctr" lIns="18288" rIns="18288" tIns="18288" bIns="18288">
-            <a:spAutoFit/>
-          </a:bodyPr>
-          <a:lstStyle/>
-          <a:p>
-            <a:pPr algn="ctr"/>
-            <a:r>
-              <a:rPr sz="819" b="1">
-                <a:solidFill>
-                  <a:srgbClr val="FFFFFF"/>
-                </a:solidFill>
-                <a:latin typeface="Noto Sans"/>
-              </a:rPr>
-              <a:t>Mediana</a:t>
-            </a:r>
-          </a:p>
-        </p:txBody>
-      </p:sp>
-      <p:sp>
-        <p:nvSpPr>
-          <p:cNvPr id="16" name="TextBox 15"/>
-          <p:cNvSpPr txBox="1"/>
-          <p:nvPr/>
-        </p:nvSpPr>
-        <p:spPr>
-          <a:xfrm>
-            <a:off x="6464808" y="2267712"/>
-            <a:ext cx="4553712" cy="329184"/>
-          </a:xfrm>
-          <a:prstGeom prst="rect">
-            <a:avLst/>
-          </a:prstGeom>
-          <a:noFill/>
-        </p:spPr>
-        <p:txBody>
-          <a:bodyPr wrap="square" anchor="ctr" lIns="18288" rIns="18288" tIns="18288" bIns="18288">
-            <a:spAutoFit/>
-          </a:bodyPr>
-          <a:lstStyle/>
-          <a:p>
-            <a:pPr algn="l"/>
-            <a:r>
-              <a:rPr sz="1130" b="1">
-                <a:solidFill>
-                  <a:srgbClr val="0E2D4B"/>
-                </a:solidFill>
-                <a:latin typeface="Noto Sans"/>
-              </a:rPr>
-              <a:t>valor central ordenado</a:t>
-            </a:r>
-          </a:p>
-        </p:txBody>
-      </p:sp>
-      <p:sp>
-        <p:nvSpPr>
-          <p:cNvPr id="17" name="TextBox 16"/>
-          <p:cNvSpPr txBox="1"/>
-          <p:nvPr/>
-        </p:nvSpPr>
-        <p:spPr>
-          <a:xfrm>
-            <a:off x="6464808" y="2651760"/>
-            <a:ext cx="4553712" cy="438912"/>
-          </a:xfrm>
-          <a:prstGeom prst="rect">
-            <a:avLst/>
-          </a:prstGeom>
-          <a:noFill/>
-        </p:spPr>
-        <p:txBody>
-          <a:bodyPr wrap="square" anchor="ctr" lIns="18288" rIns="18288" tIns="18288" bIns="18288">
-            <a:spAutoFit/>
-          </a:bodyPr>
-          <a:lstStyle/>
-          <a:p>
-            <a:pPr algn="l"/>
-            <a:r>
-              <a:rPr sz="880" b="0">
-                <a:solidFill>
-                  <a:srgbClr val="596C82"/>
-                </a:solidFill>
-                <a:latin typeface="Noto Sans"/>
-              </a:rPr>
-              <a:t>Representa el centro y es menos sensible a valores extremos.</a:t>
-            </a:r>
-          </a:p>
-        </p:txBody>
-      </p:sp>
-      <p:sp>
-        <p:nvSpPr>
-          <p:cNvPr id="18" name="Rounded Rectangle 17"/>
-          <p:cNvSpPr/>
-          <p:nvPr/>
-        </p:nvSpPr>
-        <p:spPr>
-          <a:xfrm>
-            <a:off x="749808" y="3621024"/>
-            <a:ext cx="5010912" cy="1700784"/>
-          </a:xfrm>
-          <a:prstGeom prst="roundRect">
-            <a:avLst/>
-          </a:prstGeom>
-          <a:solidFill>
-            <a:srgbClr val="F6F9FC"/>
-          </a:solidFill>
-          <a:ln w="8890">
-            <a:solidFill>
-              <a:srgbClr val="DFE6ED"/>
-            </a:solidFill>
-          </a:ln>
-        </p:spPr>
-        <p:style>
-          <a:lnRef idx="1">
-            <a:schemeClr val="accent1"/>
-          </a:lnRef>
-          <a:fillRef idx="3">
-            <a:schemeClr val="accent1"/>
-          </a:fillRef>
-          <a:effectRef idx="2">
-            <a:schemeClr val="accent1"/>
-          </a:effectRef>
-          <a:fontRef idx="minor">
-            <a:schemeClr val="lt1"/>
-          </a:fontRef>
-        </p:style>
-        <p:txBody>
-          <a:bodyPr rtlCol="0" anchor="ctr"/>
-          <a:lstStyle/>
-          <a:p>
-            <a:pPr algn="ctr"/>
-          </a:p>
-        </p:txBody>
-      </p:sp>
-      <p:sp>
-        <p:nvSpPr>
-          <p:cNvPr id="19" name="Rounded Rectangle 18"/>
-          <p:cNvSpPr/>
-          <p:nvPr/>
-        </p:nvSpPr>
-        <p:spPr>
-          <a:xfrm>
-            <a:off x="950976" y="3803904"/>
-            <a:ext cx="1965960" cy="310896"/>
-          </a:xfrm>
-          <a:prstGeom prst="roundRect">
-            <a:avLst/>
-          </a:prstGeom>
-          <a:solidFill>
-            <a:srgbClr val="3AA484"/>
-          </a:solidFill>
-          <a:ln>
-            <a:noFill/>
-          </a:ln>
-        </p:spPr>
-        <p:style>
-          <a:lnRef idx="1">
-            <a:schemeClr val="accent1"/>
-          </a:lnRef>
-          <a:fillRef idx="3">
-            <a:schemeClr val="accent1"/>
-          </a:fillRef>
-          <a:effectRef idx="2">
-            <a:schemeClr val="accent1"/>
-          </a:effectRef>
-          <a:fontRef idx="minor">
-            <a:schemeClr val="lt1"/>
-          </a:fontRef>
-        </p:style>
-        <p:txBody>
-          <a:bodyPr rtlCol="0" anchor="ctr"/>
-          <a:lstStyle/>
-          <a:p>
-            <a:pPr algn="ctr"/>
-          </a:p>
-        </p:txBody>
-      </p:sp>
-      <p:sp>
-        <p:nvSpPr>
-          <p:cNvPr id="20" name="TextBox 19"/>
-          <p:cNvSpPr txBox="1"/>
-          <p:nvPr/>
-        </p:nvSpPr>
-        <p:spPr>
-          <a:xfrm>
-            <a:off x="987552" y="3822191"/>
-            <a:ext cx="1892807" cy="256032"/>
-          </a:xfrm>
-          <a:prstGeom prst="rect">
-            <a:avLst/>
-          </a:prstGeom>
-          <a:noFill/>
-        </p:spPr>
-        <p:txBody>
-          <a:bodyPr wrap="square" anchor="ctr" lIns="18288" rIns="18288" tIns="18288" bIns="18288">
-            <a:spAutoFit/>
-          </a:bodyPr>
-          <a:lstStyle/>
-          <a:p>
-            <a:pPr algn="ctr"/>
-            <a:r>
-              <a:rPr sz="819" b="1">
-                <a:solidFill>
-                  <a:srgbClr val="FFFFFF"/>
-                </a:solidFill>
-                <a:latin typeface="Noto Sans"/>
-              </a:rPr>
-              <a:t>Percentil 90</a:t>
-            </a:r>
-          </a:p>
-        </p:txBody>
-      </p:sp>
-      <p:sp>
-        <p:nvSpPr>
-          <p:cNvPr id="21" name="TextBox 20"/>
-          <p:cNvSpPr txBox="1"/>
-          <p:nvPr/>
-        </p:nvSpPr>
-        <p:spPr>
-          <a:xfrm>
-            <a:off x="978407" y="4279392"/>
-            <a:ext cx="4553712" cy="329184"/>
-          </a:xfrm>
-          <a:prstGeom prst="rect">
-            <a:avLst/>
-          </a:prstGeom>
-          <a:noFill/>
-        </p:spPr>
-        <p:txBody>
-          <a:bodyPr wrap="square" anchor="ctr" lIns="18288" rIns="18288" tIns="18288" bIns="18288">
-            <a:spAutoFit/>
-          </a:bodyPr>
-          <a:lstStyle/>
-          <a:p>
-            <a:pPr algn="l"/>
-            <a:r>
-              <a:rPr sz="1130" b="1">
-                <a:solidFill>
-                  <a:srgbClr val="0E2D4B"/>
-                </a:solidFill>
-                <a:latin typeface="Noto Sans"/>
-              </a:rPr>
-              <a:t>quantile(0.90)</a:t>
-            </a:r>
-          </a:p>
-        </p:txBody>
-      </p:sp>
-      <p:sp>
-        <p:nvSpPr>
-          <p:cNvPr id="22" name="TextBox 21"/>
-          <p:cNvSpPr txBox="1"/>
-          <p:nvPr/>
-        </p:nvSpPr>
-        <p:spPr>
-          <a:xfrm>
-            <a:off x="978407" y="4663440"/>
-            <a:ext cx="4553712" cy="438912"/>
-          </a:xfrm>
-          <a:prstGeom prst="rect">
-            <a:avLst/>
-          </a:prstGeom>
-          <a:noFill/>
-        </p:spPr>
-        <p:txBody>
-          <a:bodyPr wrap="square" anchor="ctr" lIns="18288" rIns="18288" tIns="18288" bIns="18288">
-            <a:spAutoFit/>
-          </a:bodyPr>
-          <a:lstStyle/>
-          <a:p>
-            <a:pPr algn="l"/>
-            <a:r>
-              <a:rPr sz="880" b="0">
-                <a:solidFill>
-                  <a:srgbClr val="596C82"/>
-                </a:solidFill>
-                <a:latin typeface="Noto Sans"/>
-              </a:rPr>
-              <a:t>Deja aproximadamente 90% de los datos en o bajo ese valor.</a:t>
-            </a:r>
-          </a:p>
-        </p:txBody>
-      </p:sp>
-      <p:sp>
-        <p:nvSpPr>
-          <p:cNvPr id="23" name="Rounded Rectangle 22"/>
-          <p:cNvSpPr/>
-          <p:nvPr/>
-        </p:nvSpPr>
-        <p:spPr>
-          <a:xfrm>
-            <a:off x="6236208" y="3621024"/>
-            <a:ext cx="5010912" cy="1700784"/>
-          </a:xfrm>
-          <a:prstGeom prst="roundRect">
-            <a:avLst/>
-          </a:prstGeom>
-          <a:solidFill>
-            <a:srgbClr val="F6F9FC"/>
-          </a:solidFill>
-          <a:ln w="8890">
-            <a:solidFill>
-              <a:srgbClr val="DFE6ED"/>
-            </a:solidFill>
-          </a:ln>
-        </p:spPr>
-        <p:style>
-          <a:lnRef idx="1">
-            <a:schemeClr val="accent1"/>
-          </a:lnRef>
-          <a:fillRef idx="3">
-            <a:schemeClr val="accent1"/>
-          </a:fillRef>
-          <a:effectRef idx="2">
-            <a:schemeClr val="accent1"/>
-          </a:effectRef>
-          <a:fontRef idx="minor">
-            <a:schemeClr val="lt1"/>
-          </a:fontRef>
-        </p:style>
-        <p:txBody>
-          <a:bodyPr rtlCol="0" anchor="ctr"/>
-          <a:lstStyle/>
-          <a:p>
-            <a:pPr algn="ctr"/>
-          </a:p>
-        </p:txBody>
-      </p:sp>
-      <p:sp>
-        <p:nvSpPr>
-          <p:cNvPr id="24" name="Rounded Rectangle 23"/>
-          <p:cNvSpPr/>
-          <p:nvPr/>
-        </p:nvSpPr>
-        <p:spPr>
-          <a:xfrm>
-            <a:off x="6437376" y="3803904"/>
-            <a:ext cx="1965960" cy="310896"/>
-          </a:xfrm>
-          <a:prstGeom prst="roundRect">
-            <a:avLst/>
-          </a:prstGeom>
-          <a:solidFill>
-            <a:srgbClr val="077596"/>
-          </a:solidFill>
-          <a:ln>
-            <a:noFill/>
-          </a:ln>
-        </p:spPr>
-        <p:style>
-          <a:lnRef idx="1">
-            <a:schemeClr val="accent1"/>
-          </a:lnRef>
-          <a:fillRef idx="3">
-            <a:schemeClr val="accent1"/>
-          </a:fillRef>
-          <a:effectRef idx="2">
-            <a:schemeClr val="accent1"/>
-          </a:effectRef>
-          <a:fontRef idx="minor">
-            <a:schemeClr val="lt1"/>
-          </a:fontRef>
-        </p:style>
-        <p:txBody>
-          <a:bodyPr rtlCol="0" anchor="ctr"/>
-          <a:lstStyle/>
-          <a:p>
-            <a:pPr algn="ctr"/>
-          </a:p>
-        </p:txBody>
-      </p:sp>
-      <p:sp>
-        <p:nvSpPr>
-          <p:cNvPr id="25" name="TextBox 24"/>
-          <p:cNvSpPr txBox="1"/>
-          <p:nvPr/>
-        </p:nvSpPr>
-        <p:spPr>
-          <a:xfrm>
-            <a:off x="6473952" y="3822191"/>
-            <a:ext cx="1892807" cy="256032"/>
-          </a:xfrm>
-          <a:prstGeom prst="rect">
-            <a:avLst/>
-          </a:prstGeom>
-          <a:noFill/>
-        </p:spPr>
-        <p:txBody>
-          <a:bodyPr wrap="square" anchor="ctr" lIns="18288" rIns="18288" tIns="18288" bIns="18288">
-            <a:spAutoFit/>
-          </a:bodyPr>
-          <a:lstStyle/>
-          <a:p>
-            <a:pPr algn="ctr"/>
-            <a:r>
-              <a:rPr sz="819" b="1">
-                <a:solidFill>
-                  <a:srgbClr val="FFFFFF"/>
-                </a:solidFill>
-                <a:latin typeface="Noto Sans"/>
-              </a:rPr>
-              <a:t>Desviación estándar</a:t>
-            </a:r>
-          </a:p>
-        </p:txBody>
-      </p:sp>
-      <p:sp>
-        <p:nvSpPr>
-          <p:cNvPr id="26" name="TextBox 25"/>
-          <p:cNvSpPr txBox="1"/>
-          <p:nvPr/>
-        </p:nvSpPr>
-        <p:spPr>
-          <a:xfrm>
-            <a:off x="6464808" y="4279392"/>
-            <a:ext cx="4553712" cy="329184"/>
-          </a:xfrm>
-          <a:prstGeom prst="rect">
-            <a:avLst/>
-          </a:prstGeom>
-          <a:noFill/>
-        </p:spPr>
-        <p:txBody>
-          <a:bodyPr wrap="square" anchor="ctr" lIns="18288" rIns="18288" tIns="18288" bIns="18288">
-            <a:spAutoFit/>
-          </a:bodyPr>
-          <a:lstStyle/>
-          <a:p>
-            <a:pPr algn="l"/>
-            <a:r>
-              <a:rPr sz="1130" b="1">
-                <a:solidFill>
-                  <a:srgbClr val="0E2D4B"/>
-                </a:solidFill>
-                <a:latin typeface="Noto Sans"/>
-              </a:rPr>
-              <a:t>std()</a:t>
-            </a:r>
-          </a:p>
-        </p:txBody>
-      </p:sp>
-      <p:sp>
-        <p:nvSpPr>
-          <p:cNvPr id="27" name="TextBox 26"/>
-          <p:cNvSpPr txBox="1"/>
-          <p:nvPr/>
-        </p:nvSpPr>
-        <p:spPr>
-          <a:xfrm>
-            <a:off x="6464808" y="4663440"/>
-            <a:ext cx="4553712" cy="438912"/>
-          </a:xfrm>
-          <a:prstGeom prst="rect">
-            <a:avLst/>
-          </a:prstGeom>
-          <a:noFill/>
-        </p:spPr>
-        <p:txBody>
-          <a:bodyPr wrap="square" anchor="ctr" lIns="18288" rIns="18288" tIns="18288" bIns="18288">
-            <a:spAutoFit/>
-          </a:bodyPr>
-          <a:lstStyle/>
-          <a:p>
-            <a:pPr algn="l"/>
-            <a:r>
-              <a:rPr sz="880" b="0">
-                <a:solidFill>
-                  <a:srgbClr val="596C82"/>
-                </a:solidFill>
-                <a:latin typeface="Noto Sans"/>
-              </a:rPr>
-              <a:t>Mide cuánto se alejan los valores respecto de la media.</a:t>
-            </a:r>
-          </a:p>
-        </p:txBody>
-      </p:sp>
-      <p:sp>
-        <p:nvSpPr>
-          <p:cNvPr id="28" name="Rounded Rectangle 27"/>
-          <p:cNvSpPr/>
-          <p:nvPr/>
-        </p:nvSpPr>
-        <p:spPr>
-          <a:xfrm>
-            <a:off x="749808" y="5559552"/>
-            <a:ext cx="10497312" cy="676656"/>
-          </a:xfrm>
-          <a:prstGeom prst="roundRect">
-            <a:avLst/>
-          </a:prstGeom>
-          <a:solidFill>
-            <a:srgbClr val="F6F9FC"/>
-          </a:solidFill>
-          <a:ln w="8890">
-            <a:solidFill>
-              <a:srgbClr val="DFE6ED"/>
-            </a:solidFill>
-          </a:ln>
-        </p:spPr>
-        <p:style>
-          <a:lnRef idx="1">
-            <a:schemeClr val="accent1"/>
-          </a:lnRef>
-          <a:fillRef idx="3">
-            <a:schemeClr val="accent1"/>
-          </a:fillRef>
-          <a:effectRef idx="2">
-            <a:schemeClr val="accent1"/>
-          </a:effectRef>
-          <a:fontRef idx="minor">
-            <a:schemeClr val="lt1"/>
-          </a:fontRef>
-        </p:style>
-        <p:txBody>
-          <a:bodyPr rtlCol="0" anchor="ctr"/>
-          <a:lstStyle/>
-          <a:p>
-            <a:pPr algn="ctr"/>
-          </a:p>
-        </p:txBody>
-      </p:sp>
-      <p:sp>
-        <p:nvSpPr>
-          <p:cNvPr id="29" name="Rectangle 28"/>
-          <p:cNvSpPr/>
-          <p:nvPr/>
-        </p:nvSpPr>
-        <p:spPr>
-          <a:xfrm>
-            <a:off x="749808" y="5559552"/>
-            <a:ext cx="32004" cy="676656"/>
-          </a:xfrm>
-          <a:prstGeom prst="rect">
-            <a:avLst/>
-          </a:prstGeom>
-          <a:solidFill>
-            <a:srgbClr val="E8674A"/>
-          </a:solidFill>
-          <a:ln>
-            <a:noFill/>
-          </a:ln>
-        </p:spPr>
-        <p:style>
-          <a:lnRef idx="1">
-            <a:schemeClr val="accent1"/>
-          </a:lnRef>
-          <a:fillRef idx="3">
-            <a:schemeClr val="accent1"/>
-          </a:fillRef>
-          <a:effectRef idx="2">
-            <a:schemeClr val="accent1"/>
-          </a:effectRef>
-          <a:fontRef idx="minor">
-            <a:schemeClr val="lt1"/>
-          </a:fontRef>
-        </p:style>
-        <p:txBody>
-          <a:bodyPr rtlCol="0" anchor="ctr"/>
-          <a:lstStyle/>
-          <a:p>
-            <a:pPr algn="ctr"/>
-          </a:p>
-        </p:txBody>
-      </p:sp>
-      <p:sp>
-        <p:nvSpPr>
-          <p:cNvPr id="30" name="TextBox 29"/>
-          <p:cNvSpPr txBox="1"/>
-          <p:nvPr/>
-        </p:nvSpPr>
-        <p:spPr>
-          <a:xfrm>
-            <a:off x="978407" y="5669280"/>
-            <a:ext cx="10085832" cy="219456"/>
-          </a:xfrm>
-          <a:prstGeom prst="rect">
-            <a:avLst/>
-          </a:prstGeom>
-          <a:noFill/>
-        </p:spPr>
-        <p:txBody>
-          <a:bodyPr wrap="square" anchor="ctr" lIns="18288" rIns="18288" tIns="18288" bIns="18288">
-            <a:spAutoFit/>
-          </a:bodyPr>
-          <a:lstStyle/>
-          <a:p>
-            <a:pPr algn="l"/>
-            <a:r>
-              <a:rPr sz="980" b="1">
-                <a:solidFill>
-                  <a:srgbClr val="243B54"/>
-                </a:solidFill>
-                <a:latin typeface="Noto Sans"/>
-              </a:rPr>
-              <a:t>REGLA DE ORO</a:t>
-            </a:r>
-          </a:p>
-        </p:txBody>
-      </p:sp>
-      <p:sp>
-        <p:nvSpPr>
-          <p:cNvPr id="31" name="TextBox 30"/>
-          <p:cNvSpPr txBox="1"/>
-          <p:nvPr/>
-        </p:nvSpPr>
-        <p:spPr>
-          <a:xfrm>
-            <a:off x="978407" y="5907024"/>
-            <a:ext cx="10085832" cy="256031"/>
-          </a:xfrm>
-          <a:prstGeom prst="rect">
-            <a:avLst/>
-          </a:prstGeom>
-          <a:noFill/>
-        </p:spPr>
-        <p:txBody>
-          <a:bodyPr wrap="square" anchor="ctr" lIns="18288" rIns="18288" tIns="18288" bIns="18288">
-            <a:spAutoFit/>
-          </a:bodyPr>
-          <a:lstStyle/>
-          <a:p>
-            <a:pPr algn="l"/>
-            <a:r>
-              <a:rPr sz="890" b="0">
-                <a:solidFill>
-                  <a:srgbClr val="596C82"/>
-                </a:solidFill>
-                <a:latin typeface="Noto Sans"/>
-              </a:rPr>
-              <a:t>Resultado observado ≠ causa demostrada. En la defensa, usa “se observa”, “se asocia” o “la base muestra”.</a:t>
-            </a:r>
-          </a:p>
-        </p:txBody>
-      </p:sp>
-    </p:spTree>
-  </p:cSld>
-  <p:clrMapOvr>
-    <a:masterClrMapping/>
-  </p:clrMapOvr>
-</p:sld>
-</file>
-
-<file path=ppt/slides/slide18.xml><?xml version="1.0" encoding="utf-8"?>
-<p:sld xmlns:a="http://schemas.openxmlformats.org/drawingml/2006/main" xmlns:p="http://schemas.openxmlformats.org/presentationml/2006/main" xmlns:r="http://schemas.openxmlformats.org/officeDocument/2006/relationships">
-  <p:cSld>
-    <p:bg>
-      <p:bgPr>
-        <a:solidFill>
-          <a:srgbClr val="FFFFFF"/>
-        </a:solidFill>
-        <a:effectLst/>
-      </p:bgPr>
-    </p:bg>
-    <p:spTree>
-      <p:nvGrpSpPr>
-        <p:cNvPr id="1" name=""/>
-        <p:cNvGrpSpPr/>
-        <p:nvPr/>
-      </p:nvGrpSpPr>
-      <p:grpSpPr/>
-      <p:sp>
-        <p:nvSpPr>
-          <p:cNvPr id="2" name="Rectangle 1"/>
-          <p:cNvSpPr/>
-          <p:nvPr/>
-        </p:nvSpPr>
-        <p:spPr>
-          <a:xfrm>
-            <a:off x="0" y="0"/>
-            <a:ext cx="12191695" cy="50292"/>
-          </a:xfrm>
-          <a:prstGeom prst="rect">
-            <a:avLst/>
-          </a:prstGeom>
-          <a:solidFill>
-            <a:srgbClr val="00899A"/>
-          </a:solidFill>
-          <a:ln>
-            <a:noFill/>
-          </a:ln>
-        </p:spPr>
-        <p:style>
-          <a:lnRef idx="1">
-            <a:schemeClr val="accent1"/>
-          </a:lnRef>
-          <a:fillRef idx="3">
-            <a:schemeClr val="accent1"/>
-          </a:fillRef>
-          <a:effectRef idx="2">
-            <a:schemeClr val="accent1"/>
-          </a:effectRef>
-          <a:fontRef idx="minor">
-            <a:schemeClr val="lt1"/>
-          </a:fontRef>
-        </p:style>
-        <p:txBody>
-          <a:bodyPr rtlCol="0" anchor="ctr"/>
-          <a:lstStyle/>
-          <a:p>
-            <a:pPr algn="ctr"/>
-          </a:p>
-        </p:txBody>
-      </p:sp>
-      <p:sp>
-        <p:nvSpPr>
-          <p:cNvPr id="3" name="Rectangle 2"/>
-          <p:cNvSpPr/>
-          <p:nvPr/>
-        </p:nvSpPr>
-        <p:spPr>
-          <a:xfrm>
-            <a:off x="530352" y="438912"/>
-            <a:ext cx="41148" cy="384048"/>
-          </a:xfrm>
-          <a:prstGeom prst="rect">
-            <a:avLst/>
-          </a:prstGeom>
-          <a:solidFill>
-            <a:srgbClr val="00AD9F"/>
-          </a:solidFill>
-          <a:ln>
-            <a:noFill/>
-          </a:ln>
-        </p:spPr>
-        <p:style>
-          <a:lnRef idx="1">
-            <a:schemeClr val="accent1"/>
-          </a:lnRef>
-          <a:fillRef idx="3">
-            <a:schemeClr val="accent1"/>
-          </a:fillRef>
-          <a:effectRef idx="2">
-            <a:schemeClr val="accent1"/>
-          </a:effectRef>
-          <a:fontRef idx="minor">
-            <a:schemeClr val="lt1"/>
-          </a:fontRef>
-        </p:style>
-        <p:txBody>
-          <a:bodyPr rtlCol="0" anchor="ctr"/>
-          <a:lstStyle/>
-          <a:p>
-            <a:pPr algn="ctr"/>
-          </a:p>
-        </p:txBody>
-      </p:sp>
-      <p:sp>
-        <p:nvSpPr>
-          <p:cNvPr id="4" name="TextBox 3"/>
-          <p:cNvSpPr txBox="1"/>
-          <p:nvPr/>
-        </p:nvSpPr>
-        <p:spPr>
-          <a:xfrm>
-            <a:off x="713232" y="384048"/>
-            <a:ext cx="10378440" cy="566928"/>
-          </a:xfrm>
-          <a:prstGeom prst="rect">
-            <a:avLst/>
-          </a:prstGeom>
-          <a:noFill/>
-        </p:spPr>
-        <p:txBody>
-          <a:bodyPr wrap="square" anchor="ctr" lIns="18288" rIns="18288" tIns="18288" bIns="18288">
-            <a:spAutoFit/>
-          </a:bodyPr>
-          <a:lstStyle/>
-          <a:p>
-            <a:pPr algn="l"/>
-            <a:r>
-              <a:rPr sz="2500" b="1">
-                <a:solidFill>
-                  <a:srgbClr val="0E2D4B"/>
-                </a:solidFill>
-                <a:latin typeface="Noto Sans"/>
-              </a:rPr>
-              <a:t>ANEXO · Clasificación de variables</a:t>
-            </a:r>
-          </a:p>
-        </p:txBody>
-      </p:sp>
-      <p:sp>
-        <p:nvSpPr>
-          <p:cNvPr id="5" name="TextBox 4"/>
-          <p:cNvSpPr txBox="1"/>
-          <p:nvPr/>
-        </p:nvSpPr>
-        <p:spPr>
-          <a:xfrm>
-            <a:off x="11155680" y="384048"/>
-            <a:ext cx="502920" cy="365760"/>
-          </a:xfrm>
-          <a:prstGeom prst="rect">
-            <a:avLst/>
-          </a:prstGeom>
-          <a:noFill/>
-        </p:spPr>
-        <p:txBody>
-          <a:bodyPr wrap="square" anchor="ctr" lIns="18288" rIns="18288" tIns="18288" bIns="18288">
-            <a:spAutoFit/>
-          </a:bodyPr>
-          <a:lstStyle/>
-          <a:p>
-            <a:pPr algn="r"/>
-            <a:r>
-              <a:rPr sz="950" b="1">
-                <a:solidFill>
-                  <a:srgbClr val="596C82"/>
-                </a:solidFill>
-                <a:latin typeface="Noto Sans"/>
-              </a:rPr>
-              <a:t>18</a:t>
-            </a:r>
-          </a:p>
-        </p:txBody>
-      </p:sp>
-      <p:sp>
-        <p:nvSpPr>
-          <p:cNvPr id="6" name="TextBox 5"/>
-          <p:cNvSpPr txBox="1"/>
-          <p:nvPr/>
-        </p:nvSpPr>
-        <p:spPr>
-          <a:xfrm>
-            <a:off x="713232" y="950976"/>
-            <a:ext cx="10424160" cy="347472"/>
-          </a:xfrm>
-          <a:prstGeom prst="rect">
-            <a:avLst/>
-          </a:prstGeom>
-          <a:noFill/>
-        </p:spPr>
-        <p:txBody>
-          <a:bodyPr wrap="square" anchor="ctr" lIns="18288" rIns="18288" tIns="18288" bIns="18288">
-            <a:spAutoFit/>
-          </a:bodyPr>
-          <a:lstStyle/>
-          <a:p>
-            <a:pPr algn="l"/>
-            <a:r>
-              <a:rPr sz="1060" b="0">
-                <a:solidFill>
-                  <a:srgbClr val="596C82"/>
-                </a:solidFill>
-                <a:latin typeface="Noto Sans"/>
-              </a:rPr>
-              <a:t>Clasificamos las variables principales según el criterio trabajado en el Laboratorio 1.</a:t>
-            </a:r>
-          </a:p>
-        </p:txBody>
-      </p:sp>
-      <p:sp>
-        <p:nvSpPr>
-          <p:cNvPr id="7" name="TextBox 6"/>
-          <p:cNvSpPr txBox="1"/>
-          <p:nvPr/>
-        </p:nvSpPr>
-        <p:spPr>
-          <a:xfrm>
-            <a:off x="621792" y="6556248"/>
-            <a:ext cx="6766560" cy="182880"/>
-          </a:xfrm>
-          <a:prstGeom prst="rect">
-            <a:avLst/>
-          </a:prstGeom>
-          <a:noFill/>
-        </p:spPr>
-        <p:txBody>
-          <a:bodyPr wrap="square" anchor="ctr" lIns="18288" rIns="18288" tIns="18288" bIns="18288">
-            <a:spAutoFit/>
-          </a:bodyPr>
-          <a:lstStyle/>
-          <a:p>
-            <a:pPr algn="l"/>
-            <a:r>
-              <a:rPr sz="730" b="0">
-                <a:solidFill>
-                  <a:srgbClr val="758495"/>
-                </a:solidFill>
-                <a:latin typeface="Noto Sans"/>
-              </a:rPr>
-              <a:t>EduBío 360 · Estadística Descriptiva · Biobío 2021</a:t>
-            </a:r>
-          </a:p>
-        </p:txBody>
-      </p:sp>
-      <p:sp>
-        <p:nvSpPr>
-          <p:cNvPr id="8" name="Rounded Rectangle 7"/>
-          <p:cNvSpPr/>
-          <p:nvPr/>
-        </p:nvSpPr>
-        <p:spPr>
-          <a:xfrm>
-            <a:off x="658368" y="1481328"/>
-            <a:ext cx="5321808" cy="4315968"/>
-          </a:xfrm>
-          <a:prstGeom prst="roundRect">
-            <a:avLst/>
-          </a:prstGeom>
-          <a:solidFill>
-            <a:srgbClr val="F6F9FC"/>
-          </a:solidFill>
-          <a:ln w="8890">
-            <a:solidFill>
-              <a:srgbClr val="DFE6ED"/>
-            </a:solidFill>
-          </a:ln>
-        </p:spPr>
-        <p:style>
-          <a:lnRef idx="1">
-            <a:schemeClr val="accent1"/>
-          </a:lnRef>
-          <a:fillRef idx="3">
-            <a:schemeClr val="accent1"/>
-          </a:fillRef>
-          <a:effectRef idx="2">
-            <a:schemeClr val="accent1"/>
-          </a:effectRef>
-          <a:fontRef idx="minor">
-            <a:schemeClr val="lt1"/>
-          </a:fontRef>
-        </p:style>
-        <p:txBody>
-          <a:bodyPr rtlCol="0" anchor="ctr"/>
-          <a:lstStyle/>
-          <a:p>
-            <a:pPr algn="ctr"/>
-          </a:p>
-        </p:txBody>
-      </p:sp>
-      <p:sp>
-        <p:nvSpPr>
-          <p:cNvPr id="9" name="Rounded Rectangle 8"/>
-          <p:cNvSpPr/>
-          <p:nvPr/>
-        </p:nvSpPr>
-        <p:spPr>
-          <a:xfrm>
-            <a:off x="6199632" y="1481328"/>
-            <a:ext cx="5321808" cy="4315968"/>
-          </a:xfrm>
-          <a:prstGeom prst="roundRect">
-            <a:avLst/>
-          </a:prstGeom>
-          <a:solidFill>
-            <a:srgbClr val="F6F9FC"/>
-          </a:solidFill>
-          <a:ln w="8890">
-            <a:solidFill>
-              <a:srgbClr val="DFE6ED"/>
-            </a:solidFill>
-          </a:ln>
-        </p:spPr>
-        <p:style>
-          <a:lnRef idx="1">
-            <a:schemeClr val="accent1"/>
-          </a:lnRef>
-          <a:fillRef idx="3">
-            <a:schemeClr val="accent1"/>
-          </a:fillRef>
-          <a:effectRef idx="2">
-            <a:schemeClr val="accent1"/>
-          </a:effectRef>
-          <a:fontRef idx="minor">
-            <a:schemeClr val="lt1"/>
-          </a:fontRef>
-        </p:style>
-        <p:txBody>
-          <a:bodyPr rtlCol="0" anchor="ctr"/>
-          <a:lstStyle/>
-          <a:p>
-            <a:pPr algn="ctr"/>
-          </a:p>
-        </p:txBody>
-      </p:sp>
-      <p:sp>
-        <p:nvSpPr>
-          <p:cNvPr id="10" name="TextBox 9"/>
-          <p:cNvSpPr txBox="1"/>
-          <p:nvPr/>
-        </p:nvSpPr>
-        <p:spPr>
-          <a:xfrm>
-            <a:off x="932688" y="1737360"/>
-            <a:ext cx="4480560" cy="347472"/>
-          </a:xfrm>
-          <a:prstGeom prst="rect">
-            <a:avLst/>
-          </a:prstGeom>
-          <a:noFill/>
-        </p:spPr>
-        <p:txBody>
-          <a:bodyPr wrap="square" anchor="ctr" lIns="18288" rIns="18288" tIns="18288" bIns="18288">
-            <a:spAutoFit/>
-          </a:bodyPr>
-          <a:lstStyle/>
-          <a:p>
-            <a:pPr algn="l"/>
-            <a:r>
-              <a:rPr sz="1350" b="1">
-                <a:solidFill>
-                  <a:srgbClr val="0E2D4B"/>
-                </a:solidFill>
-                <a:latin typeface="Noto Sans"/>
-              </a:rPr>
-              <a:t>VARIABLES CUALITATIVAS</a:t>
-            </a:r>
-          </a:p>
-        </p:txBody>
-      </p:sp>
-      <p:sp>
-        <p:nvSpPr>
-          <p:cNvPr id="11" name="TextBox 10"/>
-          <p:cNvSpPr txBox="1"/>
-          <p:nvPr/>
-        </p:nvSpPr>
-        <p:spPr>
-          <a:xfrm>
-            <a:off x="6473952" y="1737360"/>
-            <a:ext cx="4480560" cy="347472"/>
-          </a:xfrm>
-          <a:prstGeom prst="rect">
-            <a:avLst/>
-          </a:prstGeom>
-          <a:noFill/>
-        </p:spPr>
-        <p:txBody>
-          <a:bodyPr wrap="square" anchor="ctr" lIns="18288" rIns="18288" tIns="18288" bIns="18288">
-            <a:spAutoFit/>
-          </a:bodyPr>
-          <a:lstStyle/>
-          <a:p>
-            <a:pPr algn="l"/>
-            <a:r>
-              <a:rPr sz="1350" b="1">
-                <a:solidFill>
-                  <a:srgbClr val="0E2D4B"/>
-                </a:solidFill>
-                <a:latin typeface="Noto Sans"/>
-              </a:rPr>
-              <a:t>VARIABLES CUANTITATIVAS</a:t>
-            </a:r>
-          </a:p>
-        </p:txBody>
-      </p:sp>
-      <p:sp>
-        <p:nvSpPr>
-          <p:cNvPr id="12" name="Rounded Rectangle 11"/>
-          <p:cNvSpPr/>
-          <p:nvPr/>
-        </p:nvSpPr>
-        <p:spPr>
-          <a:xfrm>
-            <a:off x="932688" y="2212848"/>
-            <a:ext cx="1051560" cy="310896"/>
-          </a:xfrm>
-          <a:prstGeom prst="roundRect">
-            <a:avLst/>
-          </a:prstGeom>
-          <a:solidFill>
-            <a:srgbClr val="00AD9F"/>
-          </a:solidFill>
-          <a:ln>
-            <a:noFill/>
-          </a:ln>
-        </p:spPr>
-        <p:style>
-          <a:lnRef idx="1">
-            <a:schemeClr val="accent1"/>
-          </a:lnRef>
-          <a:fillRef idx="3">
-            <a:schemeClr val="accent1"/>
-          </a:fillRef>
-          <a:effectRef idx="2">
-            <a:schemeClr val="accent1"/>
-          </a:effectRef>
-          <a:fontRef idx="minor">
-            <a:schemeClr val="lt1"/>
-          </a:fontRef>
-        </p:style>
-        <p:txBody>
-          <a:bodyPr rtlCol="0" anchor="ctr"/>
-          <a:lstStyle/>
-          <a:p>
-            <a:pPr algn="ctr"/>
-          </a:p>
-        </p:txBody>
-      </p:sp>
-      <p:sp>
-        <p:nvSpPr>
-          <p:cNvPr id="13" name="TextBox 12"/>
-          <p:cNvSpPr txBox="1"/>
-          <p:nvPr/>
-        </p:nvSpPr>
-        <p:spPr>
-          <a:xfrm>
-            <a:off x="969264" y="2231136"/>
-            <a:ext cx="978407" cy="256032"/>
-          </a:xfrm>
-          <a:prstGeom prst="rect">
-            <a:avLst/>
-          </a:prstGeom>
-          <a:noFill/>
-        </p:spPr>
-        <p:txBody>
-          <a:bodyPr wrap="square" anchor="ctr" lIns="18288" rIns="18288" tIns="18288" bIns="18288">
-            <a:spAutoFit/>
-          </a:bodyPr>
-          <a:lstStyle/>
-          <a:p>
-            <a:pPr algn="ctr"/>
-            <a:r>
-              <a:rPr sz="819" b="1">
-                <a:solidFill>
-                  <a:srgbClr val="FFFFFF"/>
-                </a:solidFill>
-                <a:latin typeface="Noto Sans"/>
-              </a:rPr>
-              <a:t>Nominal</a:t>
-            </a:r>
-          </a:p>
-        </p:txBody>
-      </p:sp>
-      <p:sp>
-        <p:nvSpPr>
-          <p:cNvPr id="14" name="TextBox 13"/>
-          <p:cNvSpPr txBox="1"/>
-          <p:nvPr/>
-        </p:nvSpPr>
-        <p:spPr>
-          <a:xfrm>
-            <a:off x="2148840" y="2194560"/>
-            <a:ext cx="3401568" cy="310896"/>
-          </a:xfrm>
-          <a:prstGeom prst="rect">
-            <a:avLst/>
-          </a:prstGeom>
-          <a:noFill/>
-        </p:spPr>
-        <p:txBody>
-          <a:bodyPr wrap="square" anchor="ctr" lIns="18288" rIns="18288" tIns="18288" bIns="18288">
-            <a:spAutoFit/>
-          </a:bodyPr>
-          <a:lstStyle/>
-          <a:p>
-            <a:pPr algn="l"/>
-            <a:r>
-              <a:rPr sz="940" b="1">
-                <a:solidFill>
-                  <a:srgbClr val="243B54"/>
-                </a:solidFill>
-                <a:latin typeface="Noto Sans"/>
-              </a:rPr>
-              <a:t>GÉNERO</a:t>
-            </a:r>
-          </a:p>
-        </p:txBody>
-      </p:sp>
-      <p:sp>
-        <p:nvSpPr>
-          <p:cNvPr id="15" name="Rounded Rectangle 14"/>
-          <p:cNvSpPr/>
-          <p:nvPr/>
-        </p:nvSpPr>
-        <p:spPr>
-          <a:xfrm>
-            <a:off x="932688" y="2743200"/>
-            <a:ext cx="1051560" cy="310896"/>
-          </a:xfrm>
-          <a:prstGeom prst="roundRect">
-            <a:avLst/>
-          </a:prstGeom>
-          <a:solidFill>
-            <a:srgbClr val="F59753"/>
-          </a:solidFill>
-          <a:ln>
-            <a:noFill/>
-          </a:ln>
-        </p:spPr>
-        <p:style>
-          <a:lnRef idx="1">
-            <a:schemeClr val="accent1"/>
-          </a:lnRef>
-          <a:fillRef idx="3">
-            <a:schemeClr val="accent1"/>
-          </a:fillRef>
-          <a:effectRef idx="2">
-            <a:schemeClr val="accent1"/>
-          </a:effectRef>
-          <a:fontRef idx="minor">
-            <a:schemeClr val="lt1"/>
-          </a:fontRef>
-        </p:style>
-        <p:txBody>
-          <a:bodyPr rtlCol="0" anchor="ctr"/>
-          <a:lstStyle/>
-          <a:p>
-            <a:pPr algn="ctr"/>
-          </a:p>
-        </p:txBody>
-      </p:sp>
-      <p:sp>
-        <p:nvSpPr>
-          <p:cNvPr id="16" name="TextBox 15"/>
-          <p:cNvSpPr txBox="1"/>
-          <p:nvPr/>
-        </p:nvSpPr>
-        <p:spPr>
-          <a:xfrm>
-            <a:off x="969264" y="2761488"/>
-            <a:ext cx="978407" cy="256032"/>
-          </a:xfrm>
-          <a:prstGeom prst="rect">
-            <a:avLst/>
-          </a:prstGeom>
-          <a:noFill/>
-        </p:spPr>
-        <p:txBody>
-          <a:bodyPr wrap="square" anchor="ctr" lIns="18288" rIns="18288" tIns="18288" bIns="18288">
-            <a:spAutoFit/>
-          </a:bodyPr>
-          <a:lstStyle/>
-          <a:p>
-            <a:pPr algn="ctr"/>
-            <a:r>
-              <a:rPr sz="819" b="1">
-                <a:solidFill>
-                  <a:srgbClr val="FFFFFF"/>
-                </a:solidFill>
-                <a:latin typeface="Noto Sans"/>
-              </a:rPr>
-              <a:t>Ordinal</a:t>
-            </a:r>
-          </a:p>
-        </p:txBody>
-      </p:sp>
-      <p:sp>
-        <p:nvSpPr>
-          <p:cNvPr id="17" name="TextBox 16"/>
-          <p:cNvSpPr txBox="1"/>
-          <p:nvPr/>
-        </p:nvSpPr>
-        <p:spPr>
-          <a:xfrm>
-            <a:off x="2148840" y="2724912"/>
-            <a:ext cx="3401568" cy="310896"/>
-          </a:xfrm>
-          <a:prstGeom prst="rect">
-            <a:avLst/>
-          </a:prstGeom>
-          <a:noFill/>
-        </p:spPr>
-        <p:txBody>
-          <a:bodyPr wrap="square" anchor="ctr" lIns="18288" rIns="18288" tIns="18288" bIns="18288">
-            <a:spAutoFit/>
-          </a:bodyPr>
-          <a:lstStyle/>
-          <a:p>
-            <a:pPr algn="l"/>
-            <a:r>
-              <a:rPr sz="940" b="1">
-                <a:solidFill>
-                  <a:srgbClr val="243B54"/>
-                </a:solidFill>
-                <a:latin typeface="Noto Sans"/>
-              </a:rPr>
-              <a:t>RANGO EDAD</a:t>
-            </a:r>
-          </a:p>
-        </p:txBody>
-      </p:sp>
-      <p:sp>
-        <p:nvSpPr>
-          <p:cNvPr id="18" name="Rounded Rectangle 17"/>
-          <p:cNvSpPr/>
-          <p:nvPr/>
-        </p:nvSpPr>
-        <p:spPr>
-          <a:xfrm>
-            <a:off x="932688" y="3273552"/>
-            <a:ext cx="1051560" cy="310896"/>
-          </a:xfrm>
-          <a:prstGeom prst="roundRect">
-            <a:avLst/>
-          </a:prstGeom>
-          <a:solidFill>
-            <a:srgbClr val="00AD9F"/>
-          </a:solidFill>
-          <a:ln>
-            <a:noFill/>
-          </a:ln>
-        </p:spPr>
-        <p:style>
-          <a:lnRef idx="1">
-            <a:schemeClr val="accent1"/>
-          </a:lnRef>
-          <a:fillRef idx="3">
-            <a:schemeClr val="accent1"/>
-          </a:fillRef>
-          <a:effectRef idx="2">
-            <a:schemeClr val="accent1"/>
-          </a:effectRef>
-          <a:fontRef idx="minor">
-            <a:schemeClr val="lt1"/>
-          </a:fontRef>
-        </p:style>
-        <p:txBody>
-          <a:bodyPr rtlCol="0" anchor="ctr"/>
-          <a:lstStyle/>
-          <a:p>
-            <a:pPr algn="ctr"/>
-          </a:p>
-        </p:txBody>
-      </p:sp>
-      <p:sp>
-        <p:nvSpPr>
-          <p:cNvPr id="19" name="TextBox 18"/>
-          <p:cNvSpPr txBox="1"/>
-          <p:nvPr/>
-        </p:nvSpPr>
-        <p:spPr>
-          <a:xfrm>
-            <a:off x="969264" y="3291840"/>
-            <a:ext cx="978407" cy="256032"/>
-          </a:xfrm>
-          <a:prstGeom prst="rect">
-            <a:avLst/>
-          </a:prstGeom>
-          <a:noFill/>
-        </p:spPr>
-        <p:txBody>
-          <a:bodyPr wrap="square" anchor="ctr" lIns="18288" rIns="18288" tIns="18288" bIns="18288">
-            <a:spAutoFit/>
-          </a:bodyPr>
-          <a:lstStyle/>
-          <a:p>
-            <a:pPr algn="ctr"/>
-            <a:r>
-              <a:rPr sz="819" b="1">
-                <a:solidFill>
-                  <a:srgbClr val="FFFFFF"/>
-                </a:solidFill>
-                <a:latin typeface="Noto Sans"/>
-              </a:rPr>
-              <a:t>Nominal</a:t>
-            </a:r>
-          </a:p>
-        </p:txBody>
-      </p:sp>
-      <p:sp>
-        <p:nvSpPr>
-          <p:cNvPr id="20" name="TextBox 19"/>
-          <p:cNvSpPr txBox="1"/>
-          <p:nvPr/>
-        </p:nvSpPr>
-        <p:spPr>
-          <a:xfrm>
-            <a:off x="2148840" y="3255264"/>
-            <a:ext cx="3401568" cy="310896"/>
-          </a:xfrm>
-          <a:prstGeom prst="rect">
-            <a:avLst/>
-          </a:prstGeom>
-          <a:noFill/>
-        </p:spPr>
-        <p:txBody>
-          <a:bodyPr wrap="square" anchor="ctr" lIns="18288" rIns="18288" tIns="18288" bIns="18288">
-            <a:spAutoFit/>
-          </a:bodyPr>
-          <a:lstStyle/>
-          <a:p>
-            <a:pPr algn="l"/>
-            <a:r>
-              <a:rPr sz="940" b="1">
-                <a:solidFill>
-                  <a:srgbClr val="243B54"/>
-                </a:solidFill>
-                <a:latin typeface="Noto Sans"/>
-              </a:rPr>
-              <a:t>TIPO DE INSTITUCIÓN</a:t>
-            </a:r>
-          </a:p>
-        </p:txBody>
-      </p:sp>
-      <p:sp>
-        <p:nvSpPr>
-          <p:cNvPr id="21" name="Rounded Rectangle 20"/>
-          <p:cNvSpPr/>
-          <p:nvPr/>
-        </p:nvSpPr>
-        <p:spPr>
-          <a:xfrm>
-            <a:off x="932688" y="3803904"/>
-            <a:ext cx="1051560" cy="310896"/>
-          </a:xfrm>
-          <a:prstGeom prst="roundRect">
-            <a:avLst/>
-          </a:prstGeom>
-          <a:solidFill>
-            <a:srgbClr val="00AD9F"/>
-          </a:solidFill>
-          <a:ln>
-            <a:noFill/>
-          </a:ln>
-        </p:spPr>
-        <p:style>
-          <a:lnRef idx="1">
-            <a:schemeClr val="accent1"/>
-          </a:lnRef>
-          <a:fillRef idx="3">
-            <a:schemeClr val="accent1"/>
-          </a:fillRef>
-          <a:effectRef idx="2">
-            <a:schemeClr val="accent1"/>
-          </a:effectRef>
-          <a:fontRef idx="minor">
-            <a:schemeClr val="lt1"/>
-          </a:fontRef>
-        </p:style>
-        <p:txBody>
-          <a:bodyPr rtlCol="0" anchor="ctr"/>
-          <a:lstStyle/>
-          <a:p>
-            <a:pPr algn="ctr"/>
-          </a:p>
-        </p:txBody>
-      </p:sp>
-      <p:sp>
-        <p:nvSpPr>
-          <p:cNvPr id="22" name="TextBox 21"/>
-          <p:cNvSpPr txBox="1"/>
-          <p:nvPr/>
-        </p:nvSpPr>
-        <p:spPr>
-          <a:xfrm>
-            <a:off x="969264" y="3822191"/>
-            <a:ext cx="978407" cy="256032"/>
-          </a:xfrm>
-          <a:prstGeom prst="rect">
-            <a:avLst/>
-          </a:prstGeom>
-          <a:noFill/>
-        </p:spPr>
-        <p:txBody>
-          <a:bodyPr wrap="square" anchor="ctr" lIns="18288" rIns="18288" tIns="18288" bIns="18288">
-            <a:spAutoFit/>
-          </a:bodyPr>
-          <a:lstStyle/>
-          <a:p>
-            <a:pPr algn="ctr"/>
-            <a:r>
-              <a:rPr sz="819" b="1">
-                <a:solidFill>
-                  <a:srgbClr val="FFFFFF"/>
-                </a:solidFill>
-                <a:latin typeface="Noto Sans"/>
-              </a:rPr>
-              <a:t>Nominal</a:t>
-            </a:r>
-          </a:p>
-        </p:txBody>
-      </p:sp>
-      <p:sp>
-        <p:nvSpPr>
-          <p:cNvPr id="23" name="TextBox 22"/>
-          <p:cNvSpPr txBox="1"/>
-          <p:nvPr/>
-        </p:nvSpPr>
-        <p:spPr>
-          <a:xfrm>
-            <a:off x="2148840" y="3785616"/>
-            <a:ext cx="3401568" cy="310896"/>
-          </a:xfrm>
-          <a:prstGeom prst="rect">
-            <a:avLst/>
-          </a:prstGeom>
-          <a:noFill/>
-        </p:spPr>
-        <p:txBody>
-          <a:bodyPr wrap="square" anchor="ctr" lIns="18288" rIns="18288" tIns="18288" bIns="18288">
-            <a:spAutoFit/>
-          </a:bodyPr>
-          <a:lstStyle/>
-          <a:p>
-            <a:pPr algn="l"/>
-            <a:r>
-              <a:rPr sz="940" b="1">
-                <a:solidFill>
-                  <a:srgbClr val="243B54"/>
-                </a:solidFill>
-                <a:latin typeface="Noto Sans"/>
-              </a:rPr>
-              <a:t>NOMBRE CARRERA</a:t>
-            </a:r>
-          </a:p>
-        </p:txBody>
-      </p:sp>
-      <p:sp>
-        <p:nvSpPr>
-          <p:cNvPr id="24" name="Rounded Rectangle 23"/>
-          <p:cNvSpPr/>
-          <p:nvPr/>
-        </p:nvSpPr>
-        <p:spPr>
-          <a:xfrm>
-            <a:off x="932688" y="4334256"/>
-            <a:ext cx="1051560" cy="310896"/>
-          </a:xfrm>
-          <a:prstGeom prst="roundRect">
-            <a:avLst/>
-          </a:prstGeom>
-          <a:solidFill>
-            <a:srgbClr val="00AD9F"/>
-          </a:solidFill>
-          <a:ln>
-            <a:noFill/>
-          </a:ln>
-        </p:spPr>
-        <p:style>
-          <a:lnRef idx="1">
-            <a:schemeClr val="accent1"/>
-          </a:lnRef>
-          <a:fillRef idx="3">
-            <a:schemeClr val="accent1"/>
-          </a:fillRef>
-          <a:effectRef idx="2">
-            <a:schemeClr val="accent1"/>
-          </a:effectRef>
-          <a:fontRef idx="minor">
-            <a:schemeClr val="lt1"/>
-          </a:fontRef>
-        </p:style>
-        <p:txBody>
-          <a:bodyPr rtlCol="0" anchor="ctr"/>
-          <a:lstStyle/>
-          <a:p>
-            <a:pPr algn="ctr"/>
-          </a:p>
-        </p:txBody>
-      </p:sp>
-      <p:sp>
-        <p:nvSpPr>
-          <p:cNvPr id="25" name="TextBox 24"/>
-          <p:cNvSpPr txBox="1"/>
-          <p:nvPr/>
-        </p:nvSpPr>
-        <p:spPr>
-          <a:xfrm>
-            <a:off x="969264" y="4352544"/>
-            <a:ext cx="978407" cy="256032"/>
-          </a:xfrm>
-          <a:prstGeom prst="rect">
-            <a:avLst/>
-          </a:prstGeom>
-          <a:noFill/>
-        </p:spPr>
-        <p:txBody>
-          <a:bodyPr wrap="square" anchor="ctr" lIns="18288" rIns="18288" tIns="18288" bIns="18288">
-            <a:spAutoFit/>
-          </a:bodyPr>
-          <a:lstStyle/>
-          <a:p>
-            <a:pPr algn="ctr"/>
-            <a:r>
-              <a:rPr sz="819" b="1">
-                <a:solidFill>
-                  <a:srgbClr val="FFFFFF"/>
-                </a:solidFill>
-                <a:latin typeface="Noto Sans"/>
-              </a:rPr>
-              <a:t>Nominal</a:t>
-            </a:r>
-          </a:p>
-        </p:txBody>
-      </p:sp>
-      <p:sp>
-        <p:nvSpPr>
-          <p:cNvPr id="26" name="TextBox 25"/>
-          <p:cNvSpPr txBox="1"/>
-          <p:nvPr/>
-        </p:nvSpPr>
-        <p:spPr>
-          <a:xfrm>
-            <a:off x="2148840" y="4315968"/>
-            <a:ext cx="3401568" cy="310896"/>
-          </a:xfrm>
-          <a:prstGeom prst="rect">
-            <a:avLst/>
-          </a:prstGeom>
-          <a:noFill/>
-        </p:spPr>
-        <p:txBody>
-          <a:bodyPr wrap="square" anchor="ctr" lIns="18288" rIns="18288" tIns="18288" bIns="18288">
-            <a:spAutoFit/>
-          </a:bodyPr>
-          <a:lstStyle/>
-          <a:p>
-            <a:pPr algn="l"/>
-            <a:r>
-              <a:rPr sz="940" b="1">
-                <a:solidFill>
-                  <a:srgbClr val="243B54"/>
-                </a:solidFill>
-                <a:latin typeface="Noto Sans"/>
-              </a:rPr>
-              <a:t>ÁREA DEL CONOCIMIENTO</a:t>
-            </a:r>
-          </a:p>
-        </p:txBody>
-      </p:sp>
-      <p:sp>
-        <p:nvSpPr>
-          <p:cNvPr id="27" name="Rounded Rectangle 26"/>
-          <p:cNvSpPr/>
-          <p:nvPr/>
-        </p:nvSpPr>
-        <p:spPr>
-          <a:xfrm>
-            <a:off x="932688" y="4864608"/>
-            <a:ext cx="1051560" cy="310896"/>
-          </a:xfrm>
-          <a:prstGeom prst="roundRect">
-            <a:avLst/>
-          </a:prstGeom>
-          <a:solidFill>
-            <a:srgbClr val="00AD9F"/>
-          </a:solidFill>
-          <a:ln>
-            <a:noFill/>
-          </a:ln>
-        </p:spPr>
-        <p:style>
-          <a:lnRef idx="1">
-            <a:schemeClr val="accent1"/>
-          </a:lnRef>
-          <a:fillRef idx="3">
-            <a:schemeClr val="accent1"/>
-          </a:fillRef>
-          <a:effectRef idx="2">
-            <a:schemeClr val="accent1"/>
-          </a:effectRef>
-          <a:fontRef idx="minor">
-            <a:schemeClr val="lt1"/>
-          </a:fontRef>
-        </p:style>
-        <p:txBody>
-          <a:bodyPr rtlCol="0" anchor="ctr"/>
-          <a:lstStyle/>
-          <a:p>
-            <a:pPr algn="ctr"/>
-          </a:p>
-        </p:txBody>
-      </p:sp>
-      <p:sp>
-        <p:nvSpPr>
-          <p:cNvPr id="28" name="TextBox 27"/>
-          <p:cNvSpPr txBox="1"/>
-          <p:nvPr/>
-        </p:nvSpPr>
-        <p:spPr>
-          <a:xfrm>
-            <a:off x="969264" y="4882896"/>
-            <a:ext cx="978407" cy="256032"/>
-          </a:xfrm>
-          <a:prstGeom prst="rect">
-            <a:avLst/>
-          </a:prstGeom>
-          <a:noFill/>
-        </p:spPr>
-        <p:txBody>
-          <a:bodyPr wrap="square" anchor="ctr" lIns="18288" rIns="18288" tIns="18288" bIns="18288">
-            <a:spAutoFit/>
-          </a:bodyPr>
-          <a:lstStyle/>
-          <a:p>
-            <a:pPr algn="ctr"/>
-            <a:r>
-              <a:rPr sz="819" b="1">
-                <a:solidFill>
-                  <a:srgbClr val="FFFFFF"/>
-                </a:solidFill>
-                <a:latin typeface="Noto Sans"/>
-              </a:rPr>
-              <a:t>Nominal</a:t>
-            </a:r>
-          </a:p>
-        </p:txBody>
-      </p:sp>
-      <p:sp>
-        <p:nvSpPr>
-          <p:cNvPr id="29" name="TextBox 28"/>
-          <p:cNvSpPr txBox="1"/>
-          <p:nvPr/>
-        </p:nvSpPr>
-        <p:spPr>
-          <a:xfrm>
-            <a:off x="2148840" y="4846320"/>
-            <a:ext cx="3401568" cy="310896"/>
-          </a:xfrm>
-          <a:prstGeom prst="rect">
-            <a:avLst/>
-          </a:prstGeom>
-          <a:noFill/>
-        </p:spPr>
-        <p:txBody>
-          <a:bodyPr wrap="square" anchor="ctr" lIns="18288" rIns="18288" tIns="18288" bIns="18288">
-            <a:spAutoFit/>
-          </a:bodyPr>
-          <a:lstStyle/>
-          <a:p>
-            <a:pPr algn="l"/>
-            <a:r>
-              <a:rPr sz="940" b="1">
-                <a:solidFill>
-                  <a:srgbClr val="243B54"/>
-                </a:solidFill>
-                <a:latin typeface="Noto Sans"/>
-              </a:rPr>
-              <a:t>PROVINCIA SEDE</a:t>
-            </a:r>
-          </a:p>
-        </p:txBody>
-      </p:sp>
-      <p:sp>
-        <p:nvSpPr>
-          <p:cNvPr id="30" name="Rounded Rectangle 29"/>
-          <p:cNvSpPr/>
-          <p:nvPr/>
-        </p:nvSpPr>
-        <p:spPr>
-          <a:xfrm>
-            <a:off x="6473952" y="2212848"/>
-            <a:ext cx="1143000" cy="310896"/>
-          </a:xfrm>
-          <a:prstGeom prst="roundRect">
-            <a:avLst/>
-          </a:prstGeom>
-          <a:solidFill>
-            <a:srgbClr val="3AA484"/>
-          </a:solidFill>
-          <a:ln>
-            <a:noFill/>
-          </a:ln>
-        </p:spPr>
-        <p:style>
-          <a:lnRef idx="1">
-            <a:schemeClr val="accent1"/>
-          </a:lnRef>
-          <a:fillRef idx="3">
-            <a:schemeClr val="accent1"/>
-          </a:fillRef>
-          <a:effectRef idx="2">
-            <a:schemeClr val="accent1"/>
-          </a:effectRef>
-          <a:fontRef idx="minor">
-            <a:schemeClr val="lt1"/>
-          </a:fontRef>
-        </p:style>
-        <p:txBody>
-          <a:bodyPr rtlCol="0" anchor="ctr"/>
-          <a:lstStyle/>
-          <a:p>
-            <a:pPr algn="ctr"/>
-          </a:p>
-        </p:txBody>
-      </p:sp>
-      <p:sp>
-        <p:nvSpPr>
-          <p:cNvPr id="31" name="TextBox 30"/>
-          <p:cNvSpPr txBox="1"/>
-          <p:nvPr/>
-        </p:nvSpPr>
-        <p:spPr>
-          <a:xfrm>
-            <a:off x="6510528" y="2231136"/>
-            <a:ext cx="1069848" cy="256032"/>
-          </a:xfrm>
-          <a:prstGeom prst="rect">
-            <a:avLst/>
-          </a:prstGeom>
-          <a:noFill/>
-        </p:spPr>
-        <p:txBody>
-          <a:bodyPr wrap="square" anchor="ctr" lIns="18288" rIns="18288" tIns="18288" bIns="18288">
-            <a:spAutoFit/>
-          </a:bodyPr>
-          <a:lstStyle/>
-          <a:p>
-            <a:pPr algn="ctr"/>
-            <a:r>
-              <a:rPr sz="819" b="1">
-                <a:solidFill>
-                  <a:srgbClr val="FFFFFF"/>
-                </a:solidFill>
-                <a:latin typeface="Noto Sans"/>
-              </a:rPr>
-              <a:t>Continua</a:t>
-            </a:r>
-          </a:p>
-        </p:txBody>
-      </p:sp>
-      <p:sp>
-        <p:nvSpPr>
-          <p:cNvPr id="32" name="TextBox 31"/>
-          <p:cNvSpPr txBox="1"/>
-          <p:nvPr/>
-        </p:nvSpPr>
-        <p:spPr>
-          <a:xfrm>
-            <a:off x="7818120" y="2194560"/>
-            <a:ext cx="3246120" cy="310896"/>
-          </a:xfrm>
-          <a:prstGeom prst="rect">
-            <a:avLst/>
-          </a:prstGeom>
-          <a:noFill/>
-        </p:spPr>
-        <p:txBody>
-          <a:bodyPr wrap="square" anchor="ctr" lIns="18288" rIns="18288" tIns="18288" bIns="18288">
-            <a:spAutoFit/>
-          </a:bodyPr>
-          <a:lstStyle/>
-          <a:p>
-            <a:pPr algn="l"/>
-            <a:r>
-              <a:rPr sz="940" b="1">
-                <a:solidFill>
-                  <a:srgbClr val="243B54"/>
-                </a:solidFill>
-                <a:latin typeface="Noto Sans"/>
-              </a:rPr>
-              <a:t>EDAD</a:t>
-            </a:r>
-          </a:p>
-        </p:txBody>
-      </p:sp>
-      <p:sp>
-        <p:nvSpPr>
-          <p:cNvPr id="33" name="Rounded Rectangle 32"/>
-          <p:cNvSpPr/>
-          <p:nvPr/>
-        </p:nvSpPr>
-        <p:spPr>
-          <a:xfrm>
-            <a:off x="6473952" y="2926080"/>
-            <a:ext cx="1143000" cy="310896"/>
-          </a:xfrm>
-          <a:prstGeom prst="roundRect">
-            <a:avLst/>
-          </a:prstGeom>
-          <a:solidFill>
-            <a:srgbClr val="077596"/>
-          </a:solidFill>
-          <a:ln>
-            <a:noFill/>
-          </a:ln>
-        </p:spPr>
-        <p:style>
-          <a:lnRef idx="1">
-            <a:schemeClr val="accent1"/>
-          </a:lnRef>
-          <a:fillRef idx="3">
-            <a:schemeClr val="accent1"/>
-          </a:fillRef>
-          <a:effectRef idx="2">
-            <a:schemeClr val="accent1"/>
-          </a:effectRef>
-          <a:fontRef idx="minor">
-            <a:schemeClr val="lt1"/>
-          </a:fontRef>
-        </p:style>
-        <p:txBody>
-          <a:bodyPr rtlCol="0" anchor="ctr"/>
-          <a:lstStyle/>
-          <a:p>
-            <a:pPr algn="ctr"/>
-          </a:p>
-        </p:txBody>
-      </p:sp>
-      <p:sp>
-        <p:nvSpPr>
-          <p:cNvPr id="34" name="TextBox 33"/>
-          <p:cNvSpPr txBox="1"/>
-          <p:nvPr/>
-        </p:nvSpPr>
-        <p:spPr>
-          <a:xfrm>
-            <a:off x="6510528" y="2944368"/>
-            <a:ext cx="1069848" cy="256032"/>
-          </a:xfrm>
-          <a:prstGeom prst="rect">
-            <a:avLst/>
-          </a:prstGeom>
-          <a:noFill/>
-        </p:spPr>
-        <p:txBody>
-          <a:bodyPr wrap="square" anchor="ctr" lIns="18288" rIns="18288" tIns="18288" bIns="18288">
-            <a:spAutoFit/>
-          </a:bodyPr>
-          <a:lstStyle/>
-          <a:p>
-            <a:pPr algn="ctr"/>
-            <a:r>
-              <a:rPr sz="819" b="1">
-                <a:solidFill>
-                  <a:srgbClr val="FFFFFF"/>
-                </a:solidFill>
-                <a:latin typeface="Noto Sans"/>
-              </a:rPr>
-              <a:t>Discreta</a:t>
-            </a:r>
-          </a:p>
-        </p:txBody>
-      </p:sp>
-      <p:sp>
-        <p:nvSpPr>
-          <p:cNvPr id="35" name="TextBox 34"/>
-          <p:cNvSpPr txBox="1"/>
-          <p:nvPr/>
-        </p:nvSpPr>
-        <p:spPr>
-          <a:xfrm>
-            <a:off x="7818120" y="2907792"/>
-            <a:ext cx="3246120" cy="310896"/>
-          </a:xfrm>
-          <a:prstGeom prst="rect">
-            <a:avLst/>
-          </a:prstGeom>
-          <a:noFill/>
-        </p:spPr>
-        <p:txBody>
-          <a:bodyPr wrap="square" anchor="ctr" lIns="18288" rIns="18288" tIns="18288" bIns="18288">
-            <a:spAutoFit/>
-          </a:bodyPr>
-          <a:lstStyle/>
-          <a:p>
-            <a:pPr algn="l"/>
-            <a:r>
-              <a:rPr sz="940" b="1">
-                <a:solidFill>
-                  <a:srgbClr val="243B54"/>
-                </a:solidFill>
-                <a:latin typeface="Noto Sans"/>
-              </a:rPr>
-              <a:t>AÑO INGRESO</a:t>
-            </a:r>
-          </a:p>
-        </p:txBody>
-      </p:sp>
-      <p:sp>
-        <p:nvSpPr>
-          <p:cNvPr id="36" name="Rounded Rectangle 35"/>
-          <p:cNvSpPr/>
-          <p:nvPr/>
-        </p:nvSpPr>
-        <p:spPr>
-          <a:xfrm>
-            <a:off x="6473952" y="3639312"/>
-            <a:ext cx="1143000" cy="310896"/>
-          </a:xfrm>
-          <a:prstGeom prst="roundRect">
-            <a:avLst/>
-          </a:prstGeom>
-          <a:solidFill>
-            <a:srgbClr val="3AA484"/>
-          </a:solidFill>
-          <a:ln>
-            <a:noFill/>
-          </a:ln>
-        </p:spPr>
-        <p:style>
-          <a:lnRef idx="1">
-            <a:schemeClr val="accent1"/>
-          </a:lnRef>
-          <a:fillRef idx="3">
-            <a:schemeClr val="accent1"/>
-          </a:fillRef>
-          <a:effectRef idx="2">
-            <a:schemeClr val="accent1"/>
-          </a:effectRef>
-          <a:fontRef idx="minor">
-            <a:schemeClr val="lt1"/>
-          </a:fontRef>
-        </p:style>
-        <p:txBody>
-          <a:bodyPr rtlCol="0" anchor="ctr"/>
-          <a:lstStyle/>
-          <a:p>
-            <a:pPr algn="ctr"/>
-          </a:p>
-        </p:txBody>
-      </p:sp>
-      <p:sp>
-        <p:nvSpPr>
-          <p:cNvPr id="37" name="TextBox 36"/>
-          <p:cNvSpPr txBox="1"/>
-          <p:nvPr/>
-        </p:nvSpPr>
-        <p:spPr>
-          <a:xfrm>
-            <a:off x="6510528" y="3657600"/>
-            <a:ext cx="1069848" cy="256032"/>
-          </a:xfrm>
-          <a:prstGeom prst="rect">
-            <a:avLst/>
-          </a:prstGeom>
-          <a:noFill/>
-        </p:spPr>
-        <p:txBody>
-          <a:bodyPr wrap="square" anchor="ctr" lIns="18288" rIns="18288" tIns="18288" bIns="18288">
-            <a:spAutoFit/>
-          </a:bodyPr>
-          <a:lstStyle/>
-          <a:p>
-            <a:pPr algn="ctr"/>
-            <a:r>
-              <a:rPr sz="819" b="1">
-                <a:solidFill>
-                  <a:srgbClr val="FFFFFF"/>
-                </a:solidFill>
-                <a:latin typeface="Noto Sans"/>
-              </a:rPr>
-              <a:t>Continua</a:t>
-            </a:r>
-          </a:p>
-        </p:txBody>
-      </p:sp>
-      <p:sp>
-        <p:nvSpPr>
-          <p:cNvPr id="38" name="TextBox 37"/>
-          <p:cNvSpPr txBox="1"/>
-          <p:nvPr/>
-        </p:nvSpPr>
-        <p:spPr>
-          <a:xfrm>
-            <a:off x="7818120" y="3621024"/>
-            <a:ext cx="3246120" cy="310896"/>
-          </a:xfrm>
-          <a:prstGeom prst="rect">
-            <a:avLst/>
-          </a:prstGeom>
-          <a:noFill/>
-        </p:spPr>
-        <p:txBody>
-          <a:bodyPr wrap="square" anchor="ctr" lIns="18288" rIns="18288" tIns="18288" bIns="18288">
-            <a:spAutoFit/>
-          </a:bodyPr>
-          <a:lstStyle/>
-          <a:p>
-            <a:pPr algn="l"/>
-            <a:r>
-              <a:rPr sz="940" b="1">
-                <a:solidFill>
-                  <a:srgbClr val="243B54"/>
-                </a:solidFill>
-                <a:latin typeface="Noto Sans"/>
-              </a:rPr>
-              <a:t>DURACIÓN TOTAL (SEMESTRES)</a:t>
-            </a:r>
-          </a:p>
-        </p:txBody>
-      </p:sp>
-      <p:sp>
-        <p:nvSpPr>
-          <p:cNvPr id="39" name="Rounded Rectangle 38"/>
-          <p:cNvSpPr/>
-          <p:nvPr/>
-        </p:nvSpPr>
-        <p:spPr>
-          <a:xfrm>
-            <a:off x="6473952" y="4352544"/>
-            <a:ext cx="1143000" cy="310896"/>
-          </a:xfrm>
-          <a:prstGeom prst="roundRect">
-            <a:avLst/>
-          </a:prstGeom>
-          <a:solidFill>
-            <a:srgbClr val="3AA484"/>
-          </a:solidFill>
-          <a:ln>
-            <a:noFill/>
-          </a:ln>
-        </p:spPr>
-        <p:style>
-          <a:lnRef idx="1">
-            <a:schemeClr val="accent1"/>
-          </a:lnRef>
-          <a:fillRef idx="3">
-            <a:schemeClr val="accent1"/>
-          </a:fillRef>
-          <a:effectRef idx="2">
-            <a:schemeClr val="accent1"/>
-          </a:effectRef>
-          <a:fontRef idx="minor">
-            <a:schemeClr val="lt1"/>
-          </a:fontRef>
-        </p:style>
-        <p:txBody>
-          <a:bodyPr rtlCol="0" anchor="ctr"/>
-          <a:lstStyle/>
-          <a:p>
-            <a:pPr algn="ctr"/>
-          </a:p>
-        </p:txBody>
-      </p:sp>
-      <p:sp>
-        <p:nvSpPr>
-          <p:cNvPr id="40" name="TextBox 39"/>
-          <p:cNvSpPr txBox="1"/>
-          <p:nvPr/>
-        </p:nvSpPr>
-        <p:spPr>
-          <a:xfrm>
-            <a:off x="6510528" y="4370831"/>
-            <a:ext cx="1069848" cy="256032"/>
-          </a:xfrm>
-          <a:prstGeom prst="rect">
-            <a:avLst/>
-          </a:prstGeom>
-          <a:noFill/>
-        </p:spPr>
-        <p:txBody>
-          <a:bodyPr wrap="square" anchor="ctr" lIns="18288" rIns="18288" tIns="18288" bIns="18288">
-            <a:spAutoFit/>
-          </a:bodyPr>
-          <a:lstStyle/>
-          <a:p>
-            <a:pPr algn="ctr"/>
-            <a:r>
-              <a:rPr sz="819" b="1">
-                <a:solidFill>
-                  <a:srgbClr val="FFFFFF"/>
-                </a:solidFill>
-                <a:latin typeface="Noto Sans"/>
-              </a:rPr>
-              <a:t>Continua</a:t>
-            </a:r>
-          </a:p>
-        </p:txBody>
-      </p:sp>
-      <p:sp>
-        <p:nvSpPr>
-          <p:cNvPr id="41" name="TextBox 40"/>
-          <p:cNvSpPr txBox="1"/>
-          <p:nvPr/>
-        </p:nvSpPr>
-        <p:spPr>
-          <a:xfrm>
-            <a:off x="7818120" y="4334256"/>
-            <a:ext cx="3246120" cy="310896"/>
-          </a:xfrm>
-          <a:prstGeom prst="rect">
-            <a:avLst/>
-          </a:prstGeom>
-          <a:noFill/>
-        </p:spPr>
-        <p:txBody>
-          <a:bodyPr wrap="square" anchor="ctr" lIns="18288" rIns="18288" tIns="18288" bIns="18288">
-            <a:spAutoFit/>
-          </a:bodyPr>
-          <a:lstStyle/>
-          <a:p>
-            <a:pPr algn="l"/>
-            <a:r>
-              <a:rPr sz="940" b="1">
-                <a:solidFill>
-                  <a:srgbClr val="243B54"/>
-                </a:solidFill>
-                <a:latin typeface="Noto Sans"/>
-              </a:rPr>
-              <a:t>VALOR ARANCEL (PESOS)</a:t>
-            </a:r>
-          </a:p>
-        </p:txBody>
-      </p:sp>
-      <p:sp>
-        <p:nvSpPr>
-          <p:cNvPr id="42" name="Rounded Rectangle 41"/>
-          <p:cNvSpPr/>
-          <p:nvPr/>
-        </p:nvSpPr>
-        <p:spPr>
-          <a:xfrm>
-            <a:off x="6473952" y="5074920"/>
-            <a:ext cx="4709160" cy="566928"/>
-          </a:xfrm>
-          <a:prstGeom prst="roundRect">
-            <a:avLst/>
-          </a:prstGeom>
-          <a:solidFill>
-            <a:srgbClr val="F6F9FC"/>
-          </a:solidFill>
-          <a:ln w="8890">
-            <a:solidFill>
-              <a:srgbClr val="DFE6ED"/>
-            </a:solidFill>
-          </a:ln>
-        </p:spPr>
-        <p:style>
-          <a:lnRef idx="1">
-            <a:schemeClr val="accent1"/>
-          </a:lnRef>
-          <a:fillRef idx="3">
-            <a:schemeClr val="accent1"/>
-          </a:fillRef>
-          <a:effectRef idx="2">
-            <a:schemeClr val="accent1"/>
-          </a:effectRef>
-          <a:fontRef idx="minor">
-            <a:schemeClr val="lt1"/>
-          </a:fontRef>
-        </p:style>
-        <p:txBody>
-          <a:bodyPr rtlCol="0" anchor="ctr"/>
-          <a:lstStyle/>
-          <a:p>
-            <a:pPr algn="ctr"/>
-          </a:p>
-        </p:txBody>
-      </p:sp>
-      <p:sp>
-        <p:nvSpPr>
-          <p:cNvPr id="43" name="Rectangle 42"/>
-          <p:cNvSpPr/>
-          <p:nvPr/>
-        </p:nvSpPr>
-        <p:spPr>
-          <a:xfrm>
-            <a:off x="6473952" y="5074920"/>
-            <a:ext cx="32004" cy="566928"/>
-          </a:xfrm>
-          <a:prstGeom prst="rect">
-            <a:avLst/>
-          </a:prstGeom>
-          <a:solidFill>
-            <a:srgbClr val="F59753"/>
-          </a:solidFill>
-          <a:ln>
-            <a:noFill/>
-          </a:ln>
-        </p:spPr>
-        <p:style>
-          <a:lnRef idx="1">
-            <a:schemeClr val="accent1"/>
-          </a:lnRef>
-          <a:fillRef idx="3">
-            <a:schemeClr val="accent1"/>
-          </a:fillRef>
-          <a:effectRef idx="2">
-            <a:schemeClr val="accent1"/>
-          </a:effectRef>
-          <a:fontRef idx="minor">
-            <a:schemeClr val="lt1"/>
-          </a:fontRef>
-        </p:style>
-        <p:txBody>
-          <a:bodyPr rtlCol="0" anchor="ctr"/>
-          <a:lstStyle/>
-          <a:p>
-            <a:pPr algn="ctr"/>
-          </a:p>
-        </p:txBody>
-      </p:sp>
-      <p:sp>
-        <p:nvSpPr>
-          <p:cNvPr id="44" name="TextBox 43"/>
-          <p:cNvSpPr txBox="1"/>
-          <p:nvPr/>
-        </p:nvSpPr>
-        <p:spPr>
-          <a:xfrm>
-            <a:off x="6702552" y="5184648"/>
-            <a:ext cx="4297680" cy="219456"/>
-          </a:xfrm>
-          <a:prstGeom prst="rect">
-            <a:avLst/>
-          </a:prstGeom>
-          <a:noFill/>
-        </p:spPr>
-        <p:txBody>
-          <a:bodyPr wrap="square" anchor="ctr" lIns="18288" rIns="18288" tIns="18288" bIns="18288">
-            <a:spAutoFit/>
-          </a:bodyPr>
-          <a:lstStyle/>
-          <a:p>
-            <a:pPr algn="l"/>
-            <a:r>
-              <a:rPr sz="980" b="1">
-                <a:solidFill>
-                  <a:srgbClr val="243B54"/>
-                </a:solidFill>
-                <a:latin typeface="Noto Sans"/>
-              </a:rPr>
-              <a:t>CLAVE</a:t>
-            </a:r>
-          </a:p>
-        </p:txBody>
-      </p:sp>
-      <p:sp>
-        <p:nvSpPr>
-          <p:cNvPr id="45" name="TextBox 44"/>
-          <p:cNvSpPr txBox="1"/>
-          <p:nvPr/>
-        </p:nvSpPr>
-        <p:spPr>
-          <a:xfrm>
-            <a:off x="6702552" y="5422392"/>
-            <a:ext cx="4297680" cy="146303"/>
-          </a:xfrm>
-          <a:prstGeom prst="rect">
-            <a:avLst/>
-          </a:prstGeom>
-          <a:noFill/>
-        </p:spPr>
-        <p:txBody>
-          <a:bodyPr wrap="square" anchor="ctr" lIns="18288" rIns="18288" tIns="18288" bIns="18288">
-            <a:spAutoFit/>
-          </a:bodyPr>
-          <a:lstStyle/>
-          <a:p>
-            <a:pPr algn="l"/>
-            <a:r>
-              <a:rPr sz="890" b="0">
-                <a:solidFill>
-                  <a:srgbClr val="596C82"/>
-                </a:solidFill>
-                <a:latin typeface="Noto Sans"/>
-              </a:rPr>
-              <a:t>Nominal: sin orden · Ordinal: con orden · Discreta: valores contables · Continua: medida en una escala.</a:t>
-            </a:r>
-          </a:p>
-        </p:txBody>
-      </p:sp>
-      <p:sp>
-        <p:nvSpPr>
-          <p:cNvPr id="46" name="Rounded Rectangle 45"/>
-          <p:cNvSpPr/>
-          <p:nvPr/>
-        </p:nvSpPr>
-        <p:spPr>
-          <a:xfrm>
-            <a:off x="658368" y="5916168"/>
-            <a:ext cx="10863072" cy="438912"/>
-          </a:xfrm>
-          <a:prstGeom prst="roundRect">
-            <a:avLst/>
-          </a:prstGeom>
-          <a:solidFill>
-            <a:srgbClr val="F6F9FC"/>
-          </a:solidFill>
-          <a:ln w="8890">
-            <a:solidFill>
-              <a:srgbClr val="DFE6ED"/>
-            </a:solidFill>
-          </a:ln>
-        </p:spPr>
-        <p:style>
-          <a:lnRef idx="1">
-            <a:schemeClr val="accent1"/>
-          </a:lnRef>
-          <a:fillRef idx="3">
-            <a:schemeClr val="accent1"/>
-          </a:fillRef>
-          <a:effectRef idx="2">
-            <a:schemeClr val="accent1"/>
-          </a:effectRef>
-          <a:fontRef idx="minor">
-            <a:schemeClr val="lt1"/>
-          </a:fontRef>
-        </p:style>
-        <p:txBody>
-          <a:bodyPr rtlCol="0" anchor="ctr"/>
-          <a:lstStyle/>
-          <a:p>
-            <a:pPr algn="ctr"/>
-          </a:p>
-        </p:txBody>
-      </p:sp>
-      <p:sp>
-        <p:nvSpPr>
-          <p:cNvPr id="47" name="Rectangle 46"/>
-          <p:cNvSpPr/>
-          <p:nvPr/>
-        </p:nvSpPr>
-        <p:spPr>
-          <a:xfrm>
-            <a:off x="658368" y="5916168"/>
-            <a:ext cx="32004" cy="438912"/>
-          </a:xfrm>
-          <a:prstGeom prst="rect">
-            <a:avLst/>
-          </a:prstGeom>
-          <a:solidFill>
-            <a:srgbClr val="00AD9F"/>
-          </a:solidFill>
-          <a:ln>
-            <a:noFill/>
-          </a:ln>
-        </p:spPr>
-        <p:style>
-          <a:lnRef idx="1">
-            <a:schemeClr val="accent1"/>
-          </a:lnRef>
-          <a:fillRef idx="3">
-            <a:schemeClr val="accent1"/>
-          </a:fillRef>
-          <a:effectRef idx="2">
-            <a:schemeClr val="accent1"/>
-          </a:effectRef>
-          <a:fontRef idx="minor">
-            <a:schemeClr val="lt1"/>
-          </a:fontRef>
-        </p:style>
-        <p:txBody>
-          <a:bodyPr rtlCol="0" anchor="ctr"/>
-          <a:lstStyle/>
-          <a:p>
-            <a:pPr algn="ctr"/>
-          </a:p>
-        </p:txBody>
-      </p:sp>
-      <p:sp>
-        <p:nvSpPr>
-          <p:cNvPr id="48" name="TextBox 47"/>
-          <p:cNvSpPr txBox="1"/>
-          <p:nvPr/>
-        </p:nvSpPr>
-        <p:spPr>
-          <a:xfrm>
-            <a:off x="886968" y="6025896"/>
-            <a:ext cx="10451592" cy="219456"/>
-          </a:xfrm>
-          <a:prstGeom prst="rect">
-            <a:avLst/>
-          </a:prstGeom>
-          <a:noFill/>
-        </p:spPr>
-        <p:txBody>
-          <a:bodyPr wrap="square" anchor="ctr" lIns="18288" rIns="18288" tIns="18288" bIns="18288">
-            <a:spAutoFit/>
-          </a:bodyPr>
-          <a:lstStyle/>
-          <a:p>
-            <a:pPr algn="l"/>
-            <a:r>
-              <a:rPr sz="980" b="1">
-                <a:solidFill>
-                  <a:srgbClr val="243B54"/>
-                </a:solidFill>
-                <a:latin typeface="Noto Sans"/>
-              </a:rPr>
-              <a:t>CRITERIO DEL CURSO</a:t>
-            </a:r>
-          </a:p>
-        </p:txBody>
-      </p:sp>
-      <p:sp>
-        <p:nvSpPr>
-          <p:cNvPr id="49" name="TextBox 48"/>
-          <p:cNvSpPr txBox="1"/>
-          <p:nvPr/>
-        </p:nvSpPr>
-        <p:spPr>
-          <a:xfrm>
-            <a:off x="886968" y="6263640"/>
-            <a:ext cx="10451592" cy="18287"/>
-          </a:xfrm>
-          <a:prstGeom prst="rect">
-            <a:avLst/>
-          </a:prstGeom>
-          <a:noFill/>
-        </p:spPr>
-        <p:txBody>
-          <a:bodyPr wrap="square" anchor="ctr" lIns="18288" rIns="18288" tIns="18288" bIns="18288">
-            <a:spAutoFit/>
-          </a:bodyPr>
-          <a:lstStyle/>
-          <a:p>
-            <a:pPr algn="l"/>
-            <a:r>
-              <a:rPr sz="890" b="0">
-                <a:solidFill>
-                  <a:srgbClr val="596C82"/>
-                </a:solidFill>
-                <a:latin typeface="Noto Sans"/>
-              </a:rPr>
-              <a:t>Seguimos el criterio de los laboratorios del profesor: por ejemplo, Edad se clasifica como cuantitativa continua.</a:t>
             </a:r>
           </a:p>
         </p:txBody>
@@ -14920,14 +11004,7 @@
           </a:bodyPr>
           <a:lstStyle/>
           <a:p>
-            <a:pPr algn="r"/>
-            <a:r>
-              <a:rPr sz="950" b="1">
-                <a:solidFill>
-                  <a:srgbClr val="596C82"/>
-                </a:solidFill>
-                <a:latin typeface="Noto Sans"/>
-              </a:rPr>
+            <a:r>
               <a:t>02</a:t>
             </a:r>
           </a:p>
@@ -16376,14 +12453,7 @@
           </a:bodyPr>
           <a:lstStyle/>
           <a:p>
-            <a:pPr algn="r"/>
-            <a:r>
-              <a:rPr sz="950" b="1">
-                <a:solidFill>
-                  <a:srgbClr val="596C82"/>
-                </a:solidFill>
-                <a:latin typeface="Noto Sans"/>
-              </a:rPr>
+            <a:r>
               <a:t>03</a:t>
             </a:r>
           </a:p>
@@ -18279,2928 +14349,6 @@
                 <a:latin typeface="Noto Sans"/>
               </a:rPr>
               <a:t>4 ÁREAS PRINCIPALES</a:t>
-            </a:r>
-          </a:p>
-        </p:txBody>
-      </p:sp>
-    </p:spTree>
-  </p:cSld>
-  <p:clrMapOvr>
-    <a:masterClrMapping/>
-  </p:clrMapOvr>
-</p:sld>
-</file>
-
-<file path=ppt/slides/slide4.xml><?xml version="1.0" encoding="utf-8"?>
-<p:sld xmlns:a="http://schemas.openxmlformats.org/drawingml/2006/main" xmlns:p="http://schemas.openxmlformats.org/presentationml/2006/main" xmlns:r="http://schemas.openxmlformats.org/officeDocument/2006/relationships">
-  <p:cSld>
-    <p:bg>
-      <p:bgPr>
-        <a:solidFill>
-          <a:srgbClr val="FFFFFF"/>
-        </a:solidFill>
-        <a:effectLst/>
-      </p:bgPr>
-    </p:bg>
-    <p:spTree>
-      <p:nvGrpSpPr>
-        <p:cNvPr id="1" name=""/>
-        <p:cNvGrpSpPr/>
-        <p:nvPr/>
-      </p:nvGrpSpPr>
-      <p:grpSpPr/>
-      <p:sp>
-        <p:nvSpPr>
-          <p:cNvPr id="2" name="Rectangle 1"/>
-          <p:cNvSpPr/>
-          <p:nvPr/>
-        </p:nvSpPr>
-        <p:spPr>
-          <a:xfrm>
-            <a:off x="0" y="0"/>
-            <a:ext cx="12191695" cy="50292"/>
-          </a:xfrm>
-          <a:prstGeom prst="rect">
-            <a:avLst/>
-          </a:prstGeom>
-          <a:solidFill>
-            <a:srgbClr val="00899A"/>
-          </a:solidFill>
-          <a:ln>
-            <a:noFill/>
-          </a:ln>
-        </p:spPr>
-        <p:style>
-          <a:lnRef idx="1">
-            <a:schemeClr val="accent1"/>
-          </a:lnRef>
-          <a:fillRef idx="3">
-            <a:schemeClr val="accent1"/>
-          </a:fillRef>
-          <a:effectRef idx="2">
-            <a:schemeClr val="accent1"/>
-          </a:effectRef>
-          <a:fontRef idx="minor">
-            <a:schemeClr val="lt1"/>
-          </a:fontRef>
-        </p:style>
-        <p:txBody>
-          <a:bodyPr rtlCol="0" anchor="ctr"/>
-          <a:lstStyle/>
-          <a:p>
-            <a:pPr algn="ctr"/>
-          </a:p>
-        </p:txBody>
-      </p:sp>
-      <p:sp>
-        <p:nvSpPr>
-          <p:cNvPr id="3" name="Rectangle 2"/>
-          <p:cNvSpPr/>
-          <p:nvPr/>
-        </p:nvSpPr>
-        <p:spPr>
-          <a:xfrm>
-            <a:off x="530352" y="438912"/>
-            <a:ext cx="41148" cy="384048"/>
-          </a:xfrm>
-          <a:prstGeom prst="rect">
-            <a:avLst/>
-          </a:prstGeom>
-          <a:solidFill>
-            <a:srgbClr val="00AD9F"/>
-          </a:solidFill>
-          <a:ln>
-            <a:noFill/>
-          </a:ln>
-        </p:spPr>
-        <p:style>
-          <a:lnRef idx="1">
-            <a:schemeClr val="accent1"/>
-          </a:lnRef>
-          <a:fillRef idx="3">
-            <a:schemeClr val="accent1"/>
-          </a:fillRef>
-          <a:effectRef idx="2">
-            <a:schemeClr val="accent1"/>
-          </a:effectRef>
-          <a:fontRef idx="minor">
-            <a:schemeClr val="lt1"/>
-          </a:fontRef>
-        </p:style>
-        <p:txBody>
-          <a:bodyPr rtlCol="0" anchor="ctr"/>
-          <a:lstStyle/>
-          <a:p>
-            <a:pPr algn="ctr"/>
-          </a:p>
-        </p:txBody>
-      </p:sp>
-      <p:sp>
-        <p:nvSpPr>
-          <p:cNvPr id="4" name="TextBox 3"/>
-          <p:cNvSpPr txBox="1"/>
-          <p:nvPr/>
-        </p:nvSpPr>
-        <p:spPr>
-          <a:xfrm>
-            <a:off x="713232" y="384048"/>
-            <a:ext cx="10378440" cy="566928"/>
-          </a:xfrm>
-          <a:prstGeom prst="rect">
-            <a:avLst/>
-          </a:prstGeom>
-          <a:noFill/>
-        </p:spPr>
-        <p:txBody>
-          <a:bodyPr wrap="square" anchor="ctr" lIns="18288" rIns="18288" tIns="18288" bIns="18288">
-            <a:spAutoFit/>
-          </a:bodyPr>
-          <a:lstStyle/>
-          <a:p>
-            <a:pPr algn="l"/>
-            <a:r>
-              <a:rPr sz="2500" b="1">
-                <a:solidFill>
-                  <a:srgbClr val="0E2D4B"/>
-                </a:solidFill>
-                <a:latin typeface="Noto Sans"/>
-              </a:rPr>
-              <a:t>Distribución por género</a:t>
-            </a:r>
-          </a:p>
-        </p:txBody>
-      </p:sp>
-      <p:sp>
-        <p:nvSpPr>
-          <p:cNvPr id="5" name="TextBox 4"/>
-          <p:cNvSpPr txBox="1"/>
-          <p:nvPr/>
-        </p:nvSpPr>
-        <p:spPr>
-          <a:xfrm>
-            <a:off x="11155680" y="384048"/>
-            <a:ext cx="502920" cy="365760"/>
-          </a:xfrm>
-          <a:prstGeom prst="rect">
-            <a:avLst/>
-          </a:prstGeom>
-          <a:noFill/>
-        </p:spPr>
-        <p:txBody>
-          <a:bodyPr wrap="square" anchor="ctr" lIns="18288" rIns="18288" tIns="18288" bIns="18288">
-            <a:spAutoFit/>
-          </a:bodyPr>
-          <a:lstStyle/>
-          <a:p>
-            <a:pPr algn="r"/>
-            <a:r>
-              <a:rPr sz="950" b="1">
-                <a:solidFill>
-                  <a:srgbClr val="596C82"/>
-                </a:solidFill>
-                <a:latin typeface="Noto Sans"/>
-              </a:rPr>
-              <a:t>04</a:t>
-            </a:r>
-          </a:p>
-        </p:txBody>
-      </p:sp>
-      <p:sp>
-        <p:nvSpPr>
-          <p:cNvPr id="6" name="TextBox 5"/>
-          <p:cNvSpPr txBox="1"/>
-          <p:nvPr/>
-        </p:nvSpPr>
-        <p:spPr>
-          <a:xfrm>
-            <a:off x="713232" y="950976"/>
-            <a:ext cx="10424160" cy="347472"/>
-          </a:xfrm>
-          <a:prstGeom prst="rect">
-            <a:avLst/>
-          </a:prstGeom>
-          <a:noFill/>
-        </p:spPr>
-        <p:txBody>
-          <a:bodyPr wrap="square" anchor="ctr" lIns="18288" rIns="18288" tIns="18288" bIns="18288">
-            <a:spAutoFit/>
-          </a:bodyPr>
-          <a:lstStyle/>
-          <a:p>
-            <a:pPr algn="l"/>
-            <a:r>
-              <a:rPr sz="1060" b="0">
-                <a:solidFill>
-                  <a:srgbClr val="596C82"/>
-                </a:solidFill>
-                <a:latin typeface="Noto Sans"/>
-              </a:rPr>
-              <a:t>Mostramos el total y algunas diferencias dentro de familias vinculadas al análisis regional.</a:t>
-            </a:r>
-          </a:p>
-        </p:txBody>
-      </p:sp>
-      <p:sp>
-        <p:nvSpPr>
-          <p:cNvPr id="7" name="TextBox 6"/>
-          <p:cNvSpPr txBox="1"/>
-          <p:nvPr/>
-        </p:nvSpPr>
-        <p:spPr>
-          <a:xfrm>
-            <a:off x="621792" y="6556248"/>
-            <a:ext cx="6766560" cy="182880"/>
-          </a:xfrm>
-          <a:prstGeom prst="rect">
-            <a:avLst/>
-          </a:prstGeom>
-          <a:noFill/>
-        </p:spPr>
-        <p:txBody>
-          <a:bodyPr wrap="square" anchor="ctr" lIns="18288" rIns="18288" tIns="18288" bIns="18288">
-            <a:spAutoFit/>
-          </a:bodyPr>
-          <a:lstStyle/>
-          <a:p>
-            <a:pPr algn="l"/>
-            <a:r>
-              <a:rPr sz="730" b="0">
-                <a:solidFill>
-                  <a:srgbClr val="758495"/>
-                </a:solidFill>
-                <a:latin typeface="Noto Sans"/>
-              </a:rPr>
-              <a:t>EduBío 360 · Estadística Descriptiva · Biobío 2021</a:t>
-            </a:r>
-          </a:p>
-        </p:txBody>
-      </p:sp>
-      <p:sp>
-        <p:nvSpPr>
-          <p:cNvPr id="8" name="Rounded Rectangle 7"/>
-          <p:cNvSpPr/>
-          <p:nvPr/>
-        </p:nvSpPr>
-        <p:spPr>
-          <a:xfrm>
-            <a:off x="713232" y="1536192"/>
-            <a:ext cx="2286000" cy="1225296"/>
-          </a:xfrm>
-          <a:prstGeom prst="roundRect">
-            <a:avLst/>
-          </a:prstGeom>
-          <a:solidFill>
-            <a:srgbClr val="143D5E"/>
-          </a:solidFill>
-          <a:ln>
-            <a:noFill/>
-          </a:ln>
-        </p:spPr>
-        <p:style>
-          <a:lnRef idx="1">
-            <a:schemeClr val="accent1"/>
-          </a:lnRef>
-          <a:fillRef idx="3">
-            <a:schemeClr val="accent1"/>
-          </a:fillRef>
-          <a:effectRef idx="2">
-            <a:schemeClr val="accent1"/>
-          </a:effectRef>
-          <a:fontRef idx="minor">
-            <a:schemeClr val="lt1"/>
-          </a:fontRef>
-        </p:style>
-        <p:txBody>
-          <a:bodyPr rtlCol="0" anchor="ctr"/>
-          <a:lstStyle/>
-          <a:p>
-            <a:pPr algn="ctr"/>
-          </a:p>
-        </p:txBody>
-      </p:sp>
-      <p:sp>
-        <p:nvSpPr>
-          <p:cNvPr id="9" name="TextBox 8"/>
-          <p:cNvSpPr txBox="1"/>
-          <p:nvPr/>
-        </p:nvSpPr>
-        <p:spPr>
-          <a:xfrm>
-            <a:off x="786384" y="1673351"/>
-            <a:ext cx="2139696" cy="457200"/>
-          </a:xfrm>
-          <a:prstGeom prst="rect">
-            <a:avLst/>
-          </a:prstGeom>
-          <a:noFill/>
-        </p:spPr>
-        <p:txBody>
-          <a:bodyPr wrap="square" anchor="ctr" lIns="18288" rIns="18288" tIns="18288" bIns="18288">
-            <a:spAutoFit/>
-          </a:bodyPr>
-          <a:lstStyle/>
-          <a:p>
-            <a:pPr algn="ctr"/>
-            <a:r>
-              <a:rPr sz="1900" b="1">
-                <a:solidFill>
-                  <a:srgbClr val="00AD9F"/>
-                </a:solidFill>
-                <a:latin typeface="Noto Sans"/>
-              </a:rPr>
-              <a:t>54,3%</a:t>
-            </a:r>
-          </a:p>
-        </p:txBody>
-      </p:sp>
-      <p:sp>
-        <p:nvSpPr>
-          <p:cNvPr id="10" name="TextBox 9"/>
-          <p:cNvSpPr txBox="1"/>
-          <p:nvPr/>
-        </p:nvSpPr>
-        <p:spPr>
-          <a:xfrm>
-            <a:off x="786384" y="2194560"/>
-            <a:ext cx="2139696" cy="246888"/>
-          </a:xfrm>
-          <a:prstGeom prst="rect">
-            <a:avLst/>
-          </a:prstGeom>
-          <a:noFill/>
-        </p:spPr>
-        <p:txBody>
-          <a:bodyPr wrap="square" anchor="ctr" lIns="18288" rIns="18288" tIns="18288" bIns="18288">
-            <a:spAutoFit/>
-          </a:bodyPr>
-          <a:lstStyle/>
-          <a:p>
-            <a:pPr algn="ctr"/>
-            <a:r>
-              <a:rPr sz="800" b="1">
-                <a:solidFill>
-                  <a:srgbClr val="DAE4ED"/>
-                </a:solidFill>
-                <a:latin typeface="Noto Sans"/>
-              </a:rPr>
-              <a:t>FEMENINO</a:t>
-            </a:r>
-          </a:p>
-        </p:txBody>
-      </p:sp>
-      <p:sp>
-        <p:nvSpPr>
-          <p:cNvPr id="11" name="Rounded Rectangle 10"/>
-          <p:cNvSpPr/>
-          <p:nvPr/>
-        </p:nvSpPr>
-        <p:spPr>
-          <a:xfrm>
-            <a:off x="3246120" y="1536192"/>
-            <a:ext cx="2286000" cy="1225296"/>
-          </a:xfrm>
-          <a:prstGeom prst="roundRect">
-            <a:avLst/>
-          </a:prstGeom>
-          <a:solidFill>
-            <a:srgbClr val="143D5E"/>
-          </a:solidFill>
-          <a:ln>
-            <a:noFill/>
-          </a:ln>
-        </p:spPr>
-        <p:style>
-          <a:lnRef idx="1">
-            <a:schemeClr val="accent1"/>
-          </a:lnRef>
-          <a:fillRef idx="3">
-            <a:schemeClr val="accent1"/>
-          </a:fillRef>
-          <a:effectRef idx="2">
-            <a:schemeClr val="accent1"/>
-          </a:effectRef>
-          <a:fontRef idx="minor">
-            <a:schemeClr val="lt1"/>
-          </a:fontRef>
-        </p:style>
-        <p:txBody>
-          <a:bodyPr rtlCol="0" anchor="ctr"/>
-          <a:lstStyle/>
-          <a:p>
-            <a:pPr algn="ctr"/>
-          </a:p>
-        </p:txBody>
-      </p:sp>
-      <p:sp>
-        <p:nvSpPr>
-          <p:cNvPr id="12" name="TextBox 11"/>
-          <p:cNvSpPr txBox="1"/>
-          <p:nvPr/>
-        </p:nvSpPr>
-        <p:spPr>
-          <a:xfrm>
-            <a:off x="3319272" y="1673351"/>
-            <a:ext cx="2139696" cy="457200"/>
-          </a:xfrm>
-          <a:prstGeom prst="rect">
-            <a:avLst/>
-          </a:prstGeom>
-          <a:noFill/>
-        </p:spPr>
-        <p:txBody>
-          <a:bodyPr wrap="square" anchor="ctr" lIns="18288" rIns="18288" tIns="18288" bIns="18288">
-            <a:spAutoFit/>
-          </a:bodyPr>
-          <a:lstStyle/>
-          <a:p>
-            <a:pPr algn="ctr"/>
-            <a:r>
-              <a:rPr sz="1900" b="1">
-                <a:solidFill>
-                  <a:srgbClr val="077596"/>
-                </a:solidFill>
-                <a:latin typeface="Noto Sans"/>
-              </a:rPr>
-              <a:t>45,7%</a:t>
-            </a:r>
-          </a:p>
-        </p:txBody>
-      </p:sp>
-      <p:sp>
-        <p:nvSpPr>
-          <p:cNvPr id="13" name="TextBox 12"/>
-          <p:cNvSpPr txBox="1"/>
-          <p:nvPr/>
-        </p:nvSpPr>
-        <p:spPr>
-          <a:xfrm>
-            <a:off x="3319272" y="2194560"/>
-            <a:ext cx="2139696" cy="246888"/>
-          </a:xfrm>
-          <a:prstGeom prst="rect">
-            <a:avLst/>
-          </a:prstGeom>
-          <a:noFill/>
-        </p:spPr>
-        <p:txBody>
-          <a:bodyPr wrap="square" anchor="ctr" lIns="18288" rIns="18288" tIns="18288" bIns="18288">
-            <a:spAutoFit/>
-          </a:bodyPr>
-          <a:lstStyle/>
-          <a:p>
-            <a:pPr algn="ctr"/>
-            <a:r>
-              <a:rPr sz="800" b="1">
-                <a:solidFill>
-                  <a:srgbClr val="DAE4ED"/>
-                </a:solidFill>
-                <a:latin typeface="Noto Sans"/>
-              </a:rPr>
-              <a:t>MASCULINO</a:t>
-            </a:r>
-          </a:p>
-        </p:txBody>
-      </p:sp>
-      <p:sp>
-        <p:nvSpPr>
-          <p:cNvPr id="14" name="TextBox 13"/>
-          <p:cNvSpPr txBox="1"/>
-          <p:nvPr/>
-        </p:nvSpPr>
-        <p:spPr>
-          <a:xfrm>
-            <a:off x="5897880" y="1481328"/>
-            <a:ext cx="5029200" cy="310896"/>
-          </a:xfrm>
-          <a:prstGeom prst="rect">
-            <a:avLst/>
-          </a:prstGeom>
-          <a:noFill/>
-        </p:spPr>
-        <p:txBody>
-          <a:bodyPr wrap="square" anchor="ctr" lIns="18288" rIns="18288" tIns="18288" bIns="18288">
-            <a:spAutoFit/>
-          </a:bodyPr>
-          <a:lstStyle/>
-          <a:p>
-            <a:pPr algn="l"/>
-            <a:r>
-              <a:rPr sz="1100" b="1">
-                <a:solidFill>
-                  <a:srgbClr val="0E2D4B"/>
-                </a:solidFill>
-                <a:latin typeface="Noto Sans"/>
-              </a:rPr>
-              <a:t>Participación femenina dentro de familias seleccionadas</a:t>
-            </a:r>
-          </a:p>
-        </p:txBody>
-      </p:sp>
-      <p:sp>
-        <p:nvSpPr>
-          <p:cNvPr id="15" name="TextBox 14"/>
-          <p:cNvSpPr txBox="1"/>
-          <p:nvPr/>
-        </p:nvSpPr>
-        <p:spPr>
-          <a:xfrm>
-            <a:off x="5897880" y="1965960"/>
-            <a:ext cx="2331720" cy="274320"/>
-          </a:xfrm>
-          <a:prstGeom prst="rect">
-            <a:avLst/>
-          </a:prstGeom>
-          <a:noFill/>
-        </p:spPr>
-        <p:txBody>
-          <a:bodyPr wrap="square" anchor="ctr" lIns="18288" rIns="18288" tIns="18288" bIns="18288">
-            <a:spAutoFit/>
-          </a:bodyPr>
-          <a:lstStyle/>
-          <a:p>
-            <a:pPr algn="l"/>
-            <a:r>
-              <a:rPr sz="880" b="1">
-                <a:solidFill>
-                  <a:srgbClr val="0E2D4B"/>
-                </a:solidFill>
-                <a:latin typeface="Noto Sans"/>
-              </a:rPr>
-              <a:t>Industria y manufactura</a:t>
-            </a:r>
-          </a:p>
-        </p:txBody>
-      </p:sp>
-      <p:sp>
-        <p:nvSpPr>
-          <p:cNvPr id="16" name="Rounded Rectangle 15"/>
-          <p:cNvSpPr/>
-          <p:nvPr/>
-        </p:nvSpPr>
-        <p:spPr>
-          <a:xfrm>
-            <a:off x="8293608" y="1993392"/>
-            <a:ext cx="1965960" cy="292608"/>
-          </a:xfrm>
-          <a:prstGeom prst="roundRect">
-            <a:avLst/>
-          </a:prstGeom>
-          <a:solidFill>
-            <a:srgbClr val="E0E7EE"/>
-          </a:solidFill>
-          <a:ln>
-            <a:noFill/>
-          </a:ln>
-        </p:spPr>
-        <p:style>
-          <a:lnRef idx="1">
-            <a:schemeClr val="accent1"/>
-          </a:lnRef>
-          <a:fillRef idx="3">
-            <a:schemeClr val="accent1"/>
-          </a:fillRef>
-          <a:effectRef idx="2">
-            <a:schemeClr val="accent1"/>
-          </a:effectRef>
-          <a:fontRef idx="minor">
-            <a:schemeClr val="lt1"/>
-          </a:fontRef>
-        </p:style>
-        <p:txBody>
-          <a:bodyPr rtlCol="0" anchor="ctr"/>
-          <a:lstStyle/>
-          <a:p>
-            <a:pPr algn="ctr"/>
-          </a:p>
-        </p:txBody>
-      </p:sp>
-      <p:sp>
-        <p:nvSpPr>
-          <p:cNvPr id="17" name="Rounded Rectangle 16"/>
-          <p:cNvSpPr/>
-          <p:nvPr/>
-        </p:nvSpPr>
-        <p:spPr>
-          <a:xfrm>
-            <a:off x="8293608" y="1993392"/>
-            <a:ext cx="337555" cy="292608"/>
-          </a:xfrm>
-          <a:prstGeom prst="roundRect">
-            <a:avLst/>
-          </a:prstGeom>
-          <a:solidFill>
-            <a:srgbClr val="F59753"/>
-          </a:solidFill>
-          <a:ln>
-            <a:noFill/>
-          </a:ln>
-        </p:spPr>
-        <p:style>
-          <a:lnRef idx="1">
-            <a:schemeClr val="accent1"/>
-          </a:lnRef>
-          <a:fillRef idx="3">
-            <a:schemeClr val="accent1"/>
-          </a:fillRef>
-          <a:effectRef idx="2">
-            <a:schemeClr val="accent1"/>
-          </a:effectRef>
-          <a:fontRef idx="minor">
-            <a:schemeClr val="lt1"/>
-          </a:fontRef>
-        </p:style>
-        <p:txBody>
-          <a:bodyPr rtlCol="0" anchor="ctr"/>
-          <a:lstStyle/>
-          <a:p>
-            <a:pPr algn="ctr"/>
-          </a:p>
-        </p:txBody>
-      </p:sp>
-      <p:sp>
-        <p:nvSpPr>
-          <p:cNvPr id="18" name="Rounded Rectangle 17"/>
-          <p:cNvSpPr/>
-          <p:nvPr/>
-        </p:nvSpPr>
-        <p:spPr>
-          <a:xfrm>
-            <a:off x="10424159" y="1993392"/>
-            <a:ext cx="868680" cy="310896"/>
-          </a:xfrm>
-          <a:prstGeom prst="roundRect">
-            <a:avLst/>
-          </a:prstGeom>
-          <a:solidFill>
-            <a:srgbClr val="0E2D4B"/>
-          </a:solidFill>
-          <a:ln>
-            <a:noFill/>
-          </a:ln>
-        </p:spPr>
-        <p:style>
-          <a:lnRef idx="1">
-            <a:schemeClr val="accent1"/>
-          </a:lnRef>
-          <a:fillRef idx="3">
-            <a:schemeClr val="accent1"/>
-          </a:fillRef>
-          <a:effectRef idx="2">
-            <a:schemeClr val="accent1"/>
-          </a:effectRef>
-          <a:fontRef idx="minor">
-            <a:schemeClr val="lt1"/>
-          </a:fontRef>
-        </p:style>
-        <p:txBody>
-          <a:bodyPr rtlCol="0" anchor="ctr"/>
-          <a:lstStyle/>
-          <a:p>
-            <a:pPr algn="ctr"/>
-          </a:p>
-        </p:txBody>
-      </p:sp>
-      <p:sp>
-        <p:nvSpPr>
-          <p:cNvPr id="19" name="TextBox 18"/>
-          <p:cNvSpPr txBox="1"/>
-          <p:nvPr/>
-        </p:nvSpPr>
-        <p:spPr>
-          <a:xfrm>
-            <a:off x="10460735" y="2011680"/>
-            <a:ext cx="795528" cy="256032"/>
-          </a:xfrm>
-          <a:prstGeom prst="rect">
-            <a:avLst/>
-          </a:prstGeom>
-          <a:noFill/>
-        </p:spPr>
-        <p:txBody>
-          <a:bodyPr wrap="square" anchor="ctr" lIns="18288" rIns="18288" tIns="18288" bIns="18288">
-            <a:spAutoFit/>
-          </a:bodyPr>
-          <a:lstStyle/>
-          <a:p>
-            <a:pPr algn="ctr"/>
-            <a:r>
-              <a:rPr sz="819" b="1">
-                <a:solidFill>
-                  <a:srgbClr val="FFFFFF"/>
-                </a:solidFill>
-                <a:latin typeface="Noto Sans"/>
-              </a:rPr>
-              <a:t>17.2%</a:t>
-            </a:r>
-          </a:p>
-        </p:txBody>
-      </p:sp>
-      <p:sp>
-        <p:nvSpPr>
-          <p:cNvPr id="20" name="TextBox 19"/>
-          <p:cNvSpPr txBox="1"/>
-          <p:nvPr/>
-        </p:nvSpPr>
-        <p:spPr>
-          <a:xfrm>
-            <a:off x="10442448" y="2011680"/>
-            <a:ext cx="832104" cy="256032"/>
-          </a:xfrm>
-          <a:prstGeom prst="rect">
-            <a:avLst/>
-          </a:prstGeom>
-          <a:noFill/>
-        </p:spPr>
-        <p:txBody>
-          <a:bodyPr wrap="square" anchor="ctr" lIns="18288" rIns="18288" tIns="18288" bIns="18288">
-            <a:spAutoFit/>
-          </a:bodyPr>
-          <a:lstStyle/>
-          <a:p>
-            <a:pPr algn="ctr"/>
-            <a:r>
-              <a:rPr sz="830" b="1">
-                <a:solidFill>
-                  <a:srgbClr val="F59753"/>
-                </a:solidFill>
-                <a:latin typeface="Noto Sans"/>
-              </a:rPr>
-              <a:t>17.2%</a:t>
-            </a:r>
-          </a:p>
-        </p:txBody>
-      </p:sp>
-      <p:sp>
-        <p:nvSpPr>
-          <p:cNvPr id="21" name="TextBox 20"/>
-          <p:cNvSpPr txBox="1"/>
-          <p:nvPr/>
-        </p:nvSpPr>
-        <p:spPr>
-          <a:xfrm>
-            <a:off x="5897880" y="2651760"/>
-            <a:ext cx="2331720" cy="274320"/>
-          </a:xfrm>
-          <a:prstGeom prst="rect">
-            <a:avLst/>
-          </a:prstGeom>
-          <a:noFill/>
-        </p:spPr>
-        <p:txBody>
-          <a:bodyPr wrap="square" anchor="ctr" lIns="18288" rIns="18288" tIns="18288" bIns="18288">
-            <a:spAutoFit/>
-          </a:bodyPr>
-          <a:lstStyle/>
-          <a:p>
-            <a:pPr algn="l"/>
-            <a:r>
-              <a:rPr sz="880" b="1">
-                <a:solidFill>
-                  <a:srgbClr val="0E2D4B"/>
-                </a:solidFill>
-                <a:latin typeface="Noto Sans"/>
-              </a:rPr>
-              <a:t>Digital y TIC</a:t>
-            </a:r>
-          </a:p>
-        </p:txBody>
-      </p:sp>
-      <p:sp>
-        <p:nvSpPr>
-          <p:cNvPr id="22" name="Rounded Rectangle 21"/>
-          <p:cNvSpPr/>
-          <p:nvPr/>
-        </p:nvSpPr>
-        <p:spPr>
-          <a:xfrm>
-            <a:off x="8293608" y="2679192"/>
-            <a:ext cx="1965960" cy="292608"/>
-          </a:xfrm>
-          <a:prstGeom prst="roundRect">
-            <a:avLst/>
-          </a:prstGeom>
-          <a:solidFill>
-            <a:srgbClr val="E0E7EE"/>
-          </a:solidFill>
-          <a:ln>
-            <a:noFill/>
-          </a:ln>
-        </p:spPr>
-        <p:style>
-          <a:lnRef idx="1">
-            <a:schemeClr val="accent1"/>
-          </a:lnRef>
-          <a:fillRef idx="3">
-            <a:schemeClr val="accent1"/>
-          </a:fillRef>
-          <a:effectRef idx="2">
-            <a:schemeClr val="accent1"/>
-          </a:effectRef>
-          <a:fontRef idx="minor">
-            <a:schemeClr val="lt1"/>
-          </a:fontRef>
-        </p:style>
-        <p:txBody>
-          <a:bodyPr rtlCol="0" anchor="ctr"/>
-          <a:lstStyle/>
-          <a:p>
-            <a:pPr algn="ctr"/>
-          </a:p>
-        </p:txBody>
-      </p:sp>
-      <p:sp>
-        <p:nvSpPr>
-          <p:cNvPr id="23" name="Rounded Rectangle 22"/>
-          <p:cNvSpPr/>
-          <p:nvPr/>
-        </p:nvSpPr>
-        <p:spPr>
-          <a:xfrm>
-            <a:off x="8293608" y="2679192"/>
-            <a:ext cx="226085" cy="292608"/>
-          </a:xfrm>
-          <a:prstGeom prst="roundRect">
-            <a:avLst/>
-          </a:prstGeom>
-          <a:solidFill>
-            <a:srgbClr val="00AD9F"/>
-          </a:solidFill>
-          <a:ln>
-            <a:noFill/>
-          </a:ln>
-        </p:spPr>
-        <p:style>
-          <a:lnRef idx="1">
-            <a:schemeClr val="accent1"/>
-          </a:lnRef>
-          <a:fillRef idx="3">
-            <a:schemeClr val="accent1"/>
-          </a:fillRef>
-          <a:effectRef idx="2">
-            <a:schemeClr val="accent1"/>
-          </a:effectRef>
-          <a:fontRef idx="minor">
-            <a:schemeClr val="lt1"/>
-          </a:fontRef>
-        </p:style>
-        <p:txBody>
-          <a:bodyPr rtlCol="0" anchor="ctr"/>
-          <a:lstStyle/>
-          <a:p>
-            <a:pPr algn="ctr"/>
-          </a:p>
-        </p:txBody>
-      </p:sp>
-      <p:sp>
-        <p:nvSpPr>
-          <p:cNvPr id="24" name="Rounded Rectangle 23"/>
-          <p:cNvSpPr/>
-          <p:nvPr/>
-        </p:nvSpPr>
-        <p:spPr>
-          <a:xfrm>
-            <a:off x="10424159" y="2679192"/>
-            <a:ext cx="868680" cy="310896"/>
-          </a:xfrm>
-          <a:prstGeom prst="roundRect">
-            <a:avLst/>
-          </a:prstGeom>
-          <a:solidFill>
-            <a:srgbClr val="0E2D4B"/>
-          </a:solidFill>
-          <a:ln>
-            <a:noFill/>
-          </a:ln>
-        </p:spPr>
-        <p:style>
-          <a:lnRef idx="1">
-            <a:schemeClr val="accent1"/>
-          </a:lnRef>
-          <a:fillRef idx="3">
-            <a:schemeClr val="accent1"/>
-          </a:fillRef>
-          <a:effectRef idx="2">
-            <a:schemeClr val="accent1"/>
-          </a:effectRef>
-          <a:fontRef idx="minor">
-            <a:schemeClr val="lt1"/>
-          </a:fontRef>
-        </p:style>
-        <p:txBody>
-          <a:bodyPr rtlCol="0" anchor="ctr"/>
-          <a:lstStyle/>
-          <a:p>
-            <a:pPr algn="ctr"/>
-          </a:p>
-        </p:txBody>
-      </p:sp>
-      <p:sp>
-        <p:nvSpPr>
-          <p:cNvPr id="25" name="TextBox 24"/>
-          <p:cNvSpPr txBox="1"/>
-          <p:nvPr/>
-        </p:nvSpPr>
-        <p:spPr>
-          <a:xfrm>
-            <a:off x="10460735" y="2697480"/>
-            <a:ext cx="795528" cy="256032"/>
-          </a:xfrm>
-          <a:prstGeom prst="rect">
-            <a:avLst/>
-          </a:prstGeom>
-          <a:noFill/>
-        </p:spPr>
-        <p:txBody>
-          <a:bodyPr wrap="square" anchor="ctr" lIns="18288" rIns="18288" tIns="18288" bIns="18288">
-            <a:spAutoFit/>
-          </a:bodyPr>
-          <a:lstStyle/>
-          <a:p>
-            <a:pPr algn="ctr"/>
-            <a:r>
-              <a:rPr sz="819" b="1">
-                <a:solidFill>
-                  <a:srgbClr val="FFFFFF"/>
-                </a:solidFill>
-                <a:latin typeface="Noto Sans"/>
-              </a:rPr>
-              <a:t>11.5%</a:t>
-            </a:r>
-          </a:p>
-        </p:txBody>
-      </p:sp>
-      <p:sp>
-        <p:nvSpPr>
-          <p:cNvPr id="26" name="TextBox 25"/>
-          <p:cNvSpPr txBox="1"/>
-          <p:nvPr/>
-        </p:nvSpPr>
-        <p:spPr>
-          <a:xfrm>
-            <a:off x="10442448" y="2697480"/>
-            <a:ext cx="832104" cy="256032"/>
-          </a:xfrm>
-          <a:prstGeom prst="rect">
-            <a:avLst/>
-          </a:prstGeom>
-          <a:noFill/>
-        </p:spPr>
-        <p:txBody>
-          <a:bodyPr wrap="square" anchor="ctr" lIns="18288" rIns="18288" tIns="18288" bIns="18288">
-            <a:spAutoFit/>
-          </a:bodyPr>
-          <a:lstStyle/>
-          <a:p>
-            <a:pPr algn="ctr"/>
-            <a:r>
-              <a:rPr sz="830" b="1">
-                <a:solidFill>
-                  <a:srgbClr val="00AD9F"/>
-                </a:solidFill>
-                <a:latin typeface="Noto Sans"/>
-              </a:rPr>
-              <a:t>11.5%</a:t>
-            </a:r>
-          </a:p>
-        </p:txBody>
-      </p:sp>
-      <p:sp>
-        <p:nvSpPr>
-          <p:cNvPr id="27" name="TextBox 26"/>
-          <p:cNvSpPr txBox="1"/>
-          <p:nvPr/>
-        </p:nvSpPr>
-        <p:spPr>
-          <a:xfrm>
-            <a:off x="5897880" y="3337560"/>
-            <a:ext cx="2331720" cy="274320"/>
-          </a:xfrm>
-          <a:prstGeom prst="rect">
-            <a:avLst/>
-          </a:prstGeom>
-          <a:noFill/>
-        </p:spPr>
-        <p:txBody>
-          <a:bodyPr wrap="square" anchor="ctr" lIns="18288" rIns="18288" tIns="18288" bIns="18288">
-            <a:spAutoFit/>
-          </a:bodyPr>
-          <a:lstStyle/>
-          <a:p>
-            <a:pPr algn="l"/>
-            <a:r>
-              <a:rPr sz="880" b="1">
-                <a:solidFill>
-                  <a:srgbClr val="0E2D4B"/>
-                </a:solidFill>
-                <a:latin typeface="Noto Sans"/>
-              </a:rPr>
-              <a:t>Automatización y robótica</a:t>
-            </a:r>
-          </a:p>
-        </p:txBody>
-      </p:sp>
-      <p:sp>
-        <p:nvSpPr>
-          <p:cNvPr id="28" name="Rounded Rectangle 27"/>
-          <p:cNvSpPr/>
-          <p:nvPr/>
-        </p:nvSpPr>
-        <p:spPr>
-          <a:xfrm>
-            <a:off x="8293608" y="3364992"/>
-            <a:ext cx="1965960" cy="292608"/>
-          </a:xfrm>
-          <a:prstGeom prst="roundRect">
-            <a:avLst/>
-          </a:prstGeom>
-          <a:solidFill>
-            <a:srgbClr val="E0E7EE"/>
-          </a:solidFill>
-          <a:ln>
-            <a:noFill/>
-          </a:ln>
-        </p:spPr>
-        <p:style>
-          <a:lnRef idx="1">
-            <a:schemeClr val="accent1"/>
-          </a:lnRef>
-          <a:fillRef idx="3">
-            <a:schemeClr val="accent1"/>
-          </a:fillRef>
-          <a:effectRef idx="2">
-            <a:schemeClr val="accent1"/>
-          </a:effectRef>
-          <a:fontRef idx="minor">
-            <a:schemeClr val="lt1"/>
-          </a:fontRef>
-        </p:style>
-        <p:txBody>
-          <a:bodyPr rtlCol="0" anchor="ctr"/>
-          <a:lstStyle/>
-          <a:p>
-            <a:pPr algn="ctr"/>
-          </a:p>
-        </p:txBody>
-      </p:sp>
-      <p:sp>
-        <p:nvSpPr>
-          <p:cNvPr id="29" name="Rounded Rectangle 28"/>
-          <p:cNvSpPr/>
-          <p:nvPr/>
-        </p:nvSpPr>
-        <p:spPr>
-          <a:xfrm>
-            <a:off x="8293608" y="3364992"/>
-            <a:ext cx="113829" cy="292608"/>
-          </a:xfrm>
-          <a:prstGeom prst="roundRect">
-            <a:avLst/>
-          </a:prstGeom>
-          <a:solidFill>
-            <a:srgbClr val="077596"/>
-          </a:solidFill>
-          <a:ln>
-            <a:noFill/>
-          </a:ln>
-        </p:spPr>
-        <p:style>
-          <a:lnRef idx="1">
-            <a:schemeClr val="accent1"/>
-          </a:lnRef>
-          <a:fillRef idx="3">
-            <a:schemeClr val="accent1"/>
-          </a:fillRef>
-          <a:effectRef idx="2">
-            <a:schemeClr val="accent1"/>
-          </a:effectRef>
-          <a:fontRef idx="minor">
-            <a:schemeClr val="lt1"/>
-          </a:fontRef>
-        </p:style>
-        <p:txBody>
-          <a:bodyPr rtlCol="0" anchor="ctr"/>
-          <a:lstStyle/>
-          <a:p>
-            <a:pPr algn="ctr"/>
-          </a:p>
-        </p:txBody>
-      </p:sp>
-      <p:sp>
-        <p:nvSpPr>
-          <p:cNvPr id="30" name="Rounded Rectangle 29"/>
-          <p:cNvSpPr/>
-          <p:nvPr/>
-        </p:nvSpPr>
-        <p:spPr>
-          <a:xfrm>
-            <a:off x="10424159" y="3364992"/>
-            <a:ext cx="868680" cy="310896"/>
-          </a:xfrm>
-          <a:prstGeom prst="roundRect">
-            <a:avLst/>
-          </a:prstGeom>
-          <a:solidFill>
-            <a:srgbClr val="0E2D4B"/>
-          </a:solidFill>
-          <a:ln>
-            <a:noFill/>
-          </a:ln>
-        </p:spPr>
-        <p:style>
-          <a:lnRef idx="1">
-            <a:schemeClr val="accent1"/>
-          </a:lnRef>
-          <a:fillRef idx="3">
-            <a:schemeClr val="accent1"/>
-          </a:fillRef>
-          <a:effectRef idx="2">
-            <a:schemeClr val="accent1"/>
-          </a:effectRef>
-          <a:fontRef idx="minor">
-            <a:schemeClr val="lt1"/>
-          </a:fontRef>
-        </p:style>
-        <p:txBody>
-          <a:bodyPr rtlCol="0" anchor="ctr"/>
-          <a:lstStyle/>
-          <a:p>
-            <a:pPr algn="ctr"/>
-          </a:p>
-        </p:txBody>
-      </p:sp>
-      <p:sp>
-        <p:nvSpPr>
-          <p:cNvPr id="31" name="TextBox 30"/>
-          <p:cNvSpPr txBox="1"/>
-          <p:nvPr/>
-        </p:nvSpPr>
-        <p:spPr>
-          <a:xfrm>
-            <a:off x="10460735" y="3383280"/>
-            <a:ext cx="795528" cy="256032"/>
-          </a:xfrm>
-          <a:prstGeom prst="rect">
-            <a:avLst/>
-          </a:prstGeom>
-          <a:noFill/>
-        </p:spPr>
-        <p:txBody>
-          <a:bodyPr wrap="square" anchor="ctr" lIns="18288" rIns="18288" tIns="18288" bIns="18288">
-            <a:spAutoFit/>
-          </a:bodyPr>
-          <a:lstStyle/>
-          <a:p>
-            <a:pPr algn="ctr"/>
-            <a:r>
-              <a:rPr sz="819" b="1">
-                <a:solidFill>
-                  <a:srgbClr val="FFFFFF"/>
-                </a:solidFill>
-                <a:latin typeface="Noto Sans"/>
-              </a:rPr>
-              <a:t>5.8%</a:t>
-            </a:r>
-          </a:p>
-        </p:txBody>
-      </p:sp>
-      <p:sp>
-        <p:nvSpPr>
-          <p:cNvPr id="32" name="TextBox 31"/>
-          <p:cNvSpPr txBox="1"/>
-          <p:nvPr/>
-        </p:nvSpPr>
-        <p:spPr>
-          <a:xfrm>
-            <a:off x="10442448" y="3383280"/>
-            <a:ext cx="832104" cy="256032"/>
-          </a:xfrm>
-          <a:prstGeom prst="rect">
-            <a:avLst/>
-          </a:prstGeom>
-          <a:noFill/>
-        </p:spPr>
-        <p:txBody>
-          <a:bodyPr wrap="square" anchor="ctr" lIns="18288" rIns="18288" tIns="18288" bIns="18288">
-            <a:spAutoFit/>
-          </a:bodyPr>
-          <a:lstStyle/>
-          <a:p>
-            <a:pPr algn="ctr"/>
-            <a:r>
-              <a:rPr sz="830" b="1">
-                <a:solidFill>
-                  <a:srgbClr val="077596"/>
-                </a:solidFill>
-                <a:latin typeface="Noto Sans"/>
-              </a:rPr>
-              <a:t>5.8%</a:t>
-            </a:r>
-          </a:p>
-        </p:txBody>
-      </p:sp>
-      <p:sp>
-        <p:nvSpPr>
-          <p:cNvPr id="33" name="Rounded Rectangle 32"/>
-          <p:cNvSpPr/>
-          <p:nvPr/>
-        </p:nvSpPr>
-        <p:spPr>
-          <a:xfrm>
-            <a:off x="713232" y="3246120"/>
-            <a:ext cx="4818888" cy="1463040"/>
-          </a:xfrm>
-          <a:prstGeom prst="roundRect">
-            <a:avLst/>
-          </a:prstGeom>
-          <a:solidFill>
-            <a:srgbClr val="F6F9FC"/>
-          </a:solidFill>
-          <a:ln w="8890">
-            <a:solidFill>
-              <a:srgbClr val="DFE6ED"/>
-            </a:solidFill>
-          </a:ln>
-        </p:spPr>
-        <p:style>
-          <a:lnRef idx="1">
-            <a:schemeClr val="accent1"/>
-          </a:lnRef>
-          <a:fillRef idx="3">
-            <a:schemeClr val="accent1"/>
-          </a:fillRef>
-          <a:effectRef idx="2">
-            <a:schemeClr val="accent1"/>
-          </a:effectRef>
-          <a:fontRef idx="minor">
-            <a:schemeClr val="lt1"/>
-          </a:fontRef>
-        </p:style>
-        <p:txBody>
-          <a:bodyPr rtlCol="0" anchor="ctr"/>
-          <a:lstStyle/>
-          <a:p>
-            <a:pPr algn="ctr"/>
-          </a:p>
-        </p:txBody>
-      </p:sp>
-      <p:sp>
-        <p:nvSpPr>
-          <p:cNvPr id="34" name="Rectangle 33"/>
-          <p:cNvSpPr/>
-          <p:nvPr/>
-        </p:nvSpPr>
-        <p:spPr>
-          <a:xfrm>
-            <a:off x="713232" y="3246120"/>
-            <a:ext cx="32004" cy="1463040"/>
-          </a:xfrm>
-          <a:prstGeom prst="rect">
-            <a:avLst/>
-          </a:prstGeom>
-          <a:solidFill>
-            <a:srgbClr val="00AD9F"/>
-          </a:solidFill>
-          <a:ln>
-            <a:noFill/>
-          </a:ln>
-        </p:spPr>
-        <p:style>
-          <a:lnRef idx="1">
-            <a:schemeClr val="accent1"/>
-          </a:lnRef>
-          <a:fillRef idx="3">
-            <a:schemeClr val="accent1"/>
-          </a:fillRef>
-          <a:effectRef idx="2">
-            <a:schemeClr val="accent1"/>
-          </a:effectRef>
-          <a:fontRef idx="minor">
-            <a:schemeClr val="lt1"/>
-          </a:fontRef>
-        </p:style>
-        <p:txBody>
-          <a:bodyPr rtlCol="0" anchor="ctr"/>
-          <a:lstStyle/>
-          <a:p>
-            <a:pPr algn="ctr"/>
-          </a:p>
-        </p:txBody>
-      </p:sp>
-      <p:sp>
-        <p:nvSpPr>
-          <p:cNvPr id="35" name="TextBox 34"/>
-          <p:cNvSpPr txBox="1"/>
-          <p:nvPr/>
-        </p:nvSpPr>
-        <p:spPr>
-          <a:xfrm>
-            <a:off x="941832" y="3355848"/>
-            <a:ext cx="4407407" cy="219456"/>
-          </a:xfrm>
-          <a:prstGeom prst="rect">
-            <a:avLst/>
-          </a:prstGeom>
-          <a:noFill/>
-        </p:spPr>
-        <p:txBody>
-          <a:bodyPr wrap="square" anchor="ctr" lIns="18288" rIns="18288" tIns="18288" bIns="18288">
-            <a:spAutoFit/>
-          </a:bodyPr>
-          <a:lstStyle/>
-          <a:p>
-            <a:pPr algn="l"/>
-            <a:r>
-              <a:rPr sz="980" b="1">
-                <a:solidFill>
-                  <a:srgbClr val="243B54"/>
-                </a:solidFill>
-                <a:latin typeface="Noto Sans"/>
-              </a:rPr>
-              <a:t>LECTURA DESCRIPTIVA</a:t>
-            </a:r>
-          </a:p>
-        </p:txBody>
-      </p:sp>
-      <p:sp>
-        <p:nvSpPr>
-          <p:cNvPr id="36" name="TextBox 35"/>
-          <p:cNvSpPr txBox="1"/>
-          <p:nvPr/>
-        </p:nvSpPr>
-        <p:spPr>
-          <a:xfrm>
-            <a:off x="941832" y="3593591"/>
-            <a:ext cx="4407407" cy="1042416"/>
-          </a:xfrm>
-          <a:prstGeom prst="rect">
-            <a:avLst/>
-          </a:prstGeom>
-          <a:noFill/>
-        </p:spPr>
-        <p:txBody>
-          <a:bodyPr wrap="square" anchor="ctr" lIns="18288" rIns="18288" tIns="18288" bIns="18288">
-            <a:spAutoFit/>
-          </a:bodyPr>
-          <a:lstStyle/>
-          <a:p>
-            <a:pPr algn="l"/>
-            <a:r>
-              <a:rPr sz="890" b="0">
-                <a:solidFill>
-                  <a:srgbClr val="596C82"/>
-                </a:solidFill>
-                <a:latin typeface="Noto Sans"/>
-              </a:rPr>
-              <a:t>En el total hay más mujeres que hombres. Sin embargo, algunas familias tecnológicas presentan una participación femenina mucho menor.</a:t>
-            </a:r>
-          </a:p>
-        </p:txBody>
-      </p:sp>
-      <p:sp>
-        <p:nvSpPr>
-          <p:cNvPr id="37" name="Rounded Rectangle 36"/>
-          <p:cNvSpPr/>
-          <p:nvPr/>
-        </p:nvSpPr>
-        <p:spPr>
-          <a:xfrm>
-            <a:off x="5897880" y="4343400"/>
-            <a:ext cx="4846320" cy="1097280"/>
-          </a:xfrm>
-          <a:prstGeom prst="roundRect">
-            <a:avLst/>
-          </a:prstGeom>
-          <a:solidFill>
-            <a:srgbClr val="F6F9FC"/>
-          </a:solidFill>
-          <a:ln w="8890">
-            <a:solidFill>
-              <a:srgbClr val="DFE6ED"/>
-            </a:solidFill>
-          </a:ln>
-        </p:spPr>
-        <p:style>
-          <a:lnRef idx="1">
-            <a:schemeClr val="accent1"/>
-          </a:lnRef>
-          <a:fillRef idx="3">
-            <a:schemeClr val="accent1"/>
-          </a:fillRef>
-          <a:effectRef idx="2">
-            <a:schemeClr val="accent1"/>
-          </a:effectRef>
-          <a:fontRef idx="minor">
-            <a:schemeClr val="lt1"/>
-          </a:fontRef>
-        </p:style>
-        <p:txBody>
-          <a:bodyPr rtlCol="0" anchor="ctr"/>
-          <a:lstStyle/>
-          <a:p>
-            <a:pPr algn="ctr"/>
-          </a:p>
-        </p:txBody>
-      </p:sp>
-      <p:sp>
-        <p:nvSpPr>
-          <p:cNvPr id="38" name="Rectangle 37"/>
-          <p:cNvSpPr/>
-          <p:nvPr/>
-        </p:nvSpPr>
-        <p:spPr>
-          <a:xfrm>
-            <a:off x="5897880" y="4343400"/>
-            <a:ext cx="32004" cy="1097280"/>
-          </a:xfrm>
-          <a:prstGeom prst="rect">
-            <a:avLst/>
-          </a:prstGeom>
-          <a:solidFill>
-            <a:srgbClr val="F59753"/>
-          </a:solidFill>
-          <a:ln>
-            <a:noFill/>
-          </a:ln>
-        </p:spPr>
-        <p:style>
-          <a:lnRef idx="1">
-            <a:schemeClr val="accent1"/>
-          </a:lnRef>
-          <a:fillRef idx="3">
-            <a:schemeClr val="accent1"/>
-          </a:fillRef>
-          <a:effectRef idx="2">
-            <a:schemeClr val="accent1"/>
-          </a:effectRef>
-          <a:fontRef idx="minor">
-            <a:schemeClr val="lt1"/>
-          </a:fontRef>
-        </p:style>
-        <p:txBody>
-          <a:bodyPr rtlCol="0" anchor="ctr"/>
-          <a:lstStyle/>
-          <a:p>
-            <a:pPr algn="ctr"/>
-          </a:p>
-        </p:txBody>
-      </p:sp>
-      <p:sp>
-        <p:nvSpPr>
-          <p:cNvPr id="39" name="TextBox 38"/>
-          <p:cNvSpPr txBox="1"/>
-          <p:nvPr/>
-        </p:nvSpPr>
-        <p:spPr>
-          <a:xfrm>
-            <a:off x="6126480" y="4453128"/>
-            <a:ext cx="4434840" cy="219456"/>
-          </a:xfrm>
-          <a:prstGeom prst="rect">
-            <a:avLst/>
-          </a:prstGeom>
-          <a:noFill/>
-        </p:spPr>
-        <p:txBody>
-          <a:bodyPr wrap="square" anchor="ctr" lIns="18288" rIns="18288" tIns="18288" bIns="18288">
-            <a:spAutoFit/>
-          </a:bodyPr>
-          <a:lstStyle/>
-          <a:p>
-            <a:pPr algn="l"/>
-            <a:r>
-              <a:rPr sz="980" b="1">
-                <a:solidFill>
-                  <a:srgbClr val="243B54"/>
-                </a:solidFill>
-                <a:latin typeface="Noto Sans"/>
-              </a:rPr>
-              <a:t>LÍMITE DE LA BASE</a:t>
-            </a:r>
-          </a:p>
-        </p:txBody>
-      </p:sp>
-      <p:sp>
-        <p:nvSpPr>
-          <p:cNvPr id="40" name="TextBox 39"/>
-          <p:cNvSpPr txBox="1"/>
-          <p:nvPr/>
-        </p:nvSpPr>
-        <p:spPr>
-          <a:xfrm>
-            <a:off x="6126480" y="4690872"/>
-            <a:ext cx="4434840" cy="676656"/>
-          </a:xfrm>
-          <a:prstGeom prst="rect">
-            <a:avLst/>
-          </a:prstGeom>
-          <a:noFill/>
-        </p:spPr>
-        <p:txBody>
-          <a:bodyPr wrap="square" anchor="ctr" lIns="18288" rIns="18288" tIns="18288" bIns="18288">
-            <a:spAutoFit/>
-          </a:bodyPr>
-          <a:lstStyle/>
-          <a:p>
-            <a:pPr algn="l"/>
-            <a:r>
-              <a:rPr sz="890" b="0">
-                <a:solidFill>
-                  <a:srgbClr val="596C82"/>
-                </a:solidFill>
-                <a:latin typeface="Noto Sans"/>
-              </a:rPr>
-              <a:t>Podemos describir la diferencia. La base no permite afirmar por qué ocurre ni atribuirla a la estructura productiva.</a:t>
-            </a:r>
-          </a:p>
-        </p:txBody>
-      </p:sp>
-    </p:spTree>
-  </p:cSld>
-  <p:clrMapOvr>
-    <a:masterClrMapping/>
-  </p:clrMapOvr>
-</p:sld>
-</file>
-
-<file path=ppt/slides/slide5.xml><?xml version="1.0" encoding="utf-8"?>
-<p:sld xmlns:a="http://schemas.openxmlformats.org/drawingml/2006/main" xmlns:p="http://schemas.openxmlformats.org/presentationml/2006/main" xmlns:r="http://schemas.openxmlformats.org/officeDocument/2006/relationships">
-  <p:cSld>
-    <p:bg>
-      <p:bgPr>
-        <a:solidFill>
-          <a:srgbClr val="FFFFFF"/>
-        </a:solidFill>
-        <a:effectLst/>
-      </p:bgPr>
-    </p:bg>
-    <p:spTree>
-      <p:nvGrpSpPr>
-        <p:cNvPr id="1" name=""/>
-        <p:cNvGrpSpPr/>
-        <p:nvPr/>
-      </p:nvGrpSpPr>
-      <p:grpSpPr/>
-      <p:sp>
-        <p:nvSpPr>
-          <p:cNvPr id="2" name="Rectangle 1"/>
-          <p:cNvSpPr/>
-          <p:nvPr/>
-        </p:nvSpPr>
-        <p:spPr>
-          <a:xfrm>
-            <a:off x="0" y="0"/>
-            <a:ext cx="12191695" cy="50292"/>
-          </a:xfrm>
-          <a:prstGeom prst="rect">
-            <a:avLst/>
-          </a:prstGeom>
-          <a:solidFill>
-            <a:srgbClr val="00899A"/>
-          </a:solidFill>
-          <a:ln>
-            <a:noFill/>
-          </a:ln>
-        </p:spPr>
-        <p:style>
-          <a:lnRef idx="1">
-            <a:schemeClr val="accent1"/>
-          </a:lnRef>
-          <a:fillRef idx="3">
-            <a:schemeClr val="accent1"/>
-          </a:fillRef>
-          <a:effectRef idx="2">
-            <a:schemeClr val="accent1"/>
-          </a:effectRef>
-          <a:fontRef idx="minor">
-            <a:schemeClr val="lt1"/>
-          </a:fontRef>
-        </p:style>
-        <p:txBody>
-          <a:bodyPr rtlCol="0" anchor="ctr"/>
-          <a:lstStyle/>
-          <a:p>
-            <a:pPr algn="ctr"/>
-          </a:p>
-        </p:txBody>
-      </p:sp>
-      <p:sp>
-        <p:nvSpPr>
-          <p:cNvPr id="3" name="Rectangle 2"/>
-          <p:cNvSpPr/>
-          <p:nvPr/>
-        </p:nvSpPr>
-        <p:spPr>
-          <a:xfrm>
-            <a:off x="530352" y="438912"/>
-            <a:ext cx="41148" cy="384048"/>
-          </a:xfrm>
-          <a:prstGeom prst="rect">
-            <a:avLst/>
-          </a:prstGeom>
-          <a:solidFill>
-            <a:srgbClr val="00AD9F"/>
-          </a:solidFill>
-          <a:ln>
-            <a:noFill/>
-          </a:ln>
-        </p:spPr>
-        <p:style>
-          <a:lnRef idx="1">
-            <a:schemeClr val="accent1"/>
-          </a:lnRef>
-          <a:fillRef idx="3">
-            <a:schemeClr val="accent1"/>
-          </a:fillRef>
-          <a:effectRef idx="2">
-            <a:schemeClr val="accent1"/>
-          </a:effectRef>
-          <a:fontRef idx="minor">
-            <a:schemeClr val="lt1"/>
-          </a:fontRef>
-        </p:style>
-        <p:txBody>
-          <a:bodyPr rtlCol="0" anchor="ctr"/>
-          <a:lstStyle/>
-          <a:p>
-            <a:pPr algn="ctr"/>
-          </a:p>
-        </p:txBody>
-      </p:sp>
-      <p:sp>
-        <p:nvSpPr>
-          <p:cNvPr id="4" name="TextBox 3"/>
-          <p:cNvSpPr txBox="1"/>
-          <p:nvPr/>
-        </p:nvSpPr>
-        <p:spPr>
-          <a:xfrm>
-            <a:off x="713232" y="384048"/>
-            <a:ext cx="10378440" cy="566928"/>
-          </a:xfrm>
-          <a:prstGeom prst="rect">
-            <a:avLst/>
-          </a:prstGeom>
-          <a:noFill/>
-        </p:spPr>
-        <p:txBody>
-          <a:bodyPr wrap="square" anchor="ctr" lIns="18288" rIns="18288" tIns="18288" bIns="18288">
-            <a:spAutoFit/>
-          </a:bodyPr>
-          <a:lstStyle/>
-          <a:p>
-            <a:pPr algn="l"/>
-            <a:r>
-              <a:rPr sz="2500" b="1">
-                <a:solidFill>
-                  <a:srgbClr val="0E2D4B"/>
-                </a:solidFill>
-                <a:latin typeface="Noto Sans"/>
-              </a:rPr>
-              <a:t>Edad promedio según tipo de institución</a:t>
-            </a:r>
-          </a:p>
-        </p:txBody>
-      </p:sp>
-      <p:sp>
-        <p:nvSpPr>
-          <p:cNvPr id="5" name="TextBox 4"/>
-          <p:cNvSpPr txBox="1"/>
-          <p:nvPr/>
-        </p:nvSpPr>
-        <p:spPr>
-          <a:xfrm>
-            <a:off x="11155680" y="384048"/>
-            <a:ext cx="502920" cy="365760"/>
-          </a:xfrm>
-          <a:prstGeom prst="rect">
-            <a:avLst/>
-          </a:prstGeom>
-          <a:noFill/>
-        </p:spPr>
-        <p:txBody>
-          <a:bodyPr wrap="square" anchor="ctr" lIns="18288" rIns="18288" tIns="18288" bIns="18288">
-            <a:spAutoFit/>
-          </a:bodyPr>
-          <a:lstStyle/>
-          <a:p>
-            <a:pPr algn="r"/>
-            <a:r>
-              <a:rPr sz="950" b="1">
-                <a:solidFill>
-                  <a:srgbClr val="596C82"/>
-                </a:solidFill>
-                <a:latin typeface="Noto Sans"/>
-              </a:rPr>
-              <a:t>05</a:t>
-            </a:r>
-          </a:p>
-        </p:txBody>
-      </p:sp>
-      <p:sp>
-        <p:nvSpPr>
-          <p:cNvPr id="6" name="TextBox 5"/>
-          <p:cNvSpPr txBox="1"/>
-          <p:nvPr/>
-        </p:nvSpPr>
-        <p:spPr>
-          <a:xfrm>
-            <a:off x="713232" y="950976"/>
-            <a:ext cx="10424160" cy="347472"/>
-          </a:xfrm>
-          <a:prstGeom prst="rect">
-            <a:avLst/>
-          </a:prstGeom>
-          <a:noFill/>
-        </p:spPr>
-        <p:txBody>
-          <a:bodyPr wrap="square" anchor="ctr" lIns="18288" rIns="18288" tIns="18288" bIns="18288">
-            <a:spAutoFit/>
-          </a:bodyPr>
-          <a:lstStyle/>
-          <a:p>
-            <a:pPr algn="l"/>
-            <a:r>
-              <a:rPr sz="1060" b="0">
-                <a:solidFill>
-                  <a:srgbClr val="596C82"/>
-                </a:solidFill>
-                <a:latin typeface="Noto Sans"/>
-              </a:rPr>
-              <a:t>Los institutos profesionales y CFT presentan edades medias mayores que las universidades.</a:t>
-            </a:r>
-          </a:p>
-        </p:txBody>
-      </p:sp>
-      <p:sp>
-        <p:nvSpPr>
-          <p:cNvPr id="7" name="TextBox 6"/>
-          <p:cNvSpPr txBox="1"/>
-          <p:nvPr/>
-        </p:nvSpPr>
-        <p:spPr>
-          <a:xfrm>
-            <a:off x="621792" y="6556248"/>
-            <a:ext cx="6766560" cy="182880"/>
-          </a:xfrm>
-          <a:prstGeom prst="rect">
-            <a:avLst/>
-          </a:prstGeom>
-          <a:noFill/>
-        </p:spPr>
-        <p:txBody>
-          <a:bodyPr wrap="square" anchor="ctr" lIns="18288" rIns="18288" tIns="18288" bIns="18288">
-            <a:spAutoFit/>
-          </a:bodyPr>
-          <a:lstStyle/>
-          <a:p>
-            <a:pPr algn="l"/>
-            <a:r>
-              <a:rPr sz="730" b="0">
-                <a:solidFill>
-                  <a:srgbClr val="758495"/>
-                </a:solidFill>
-                <a:latin typeface="Noto Sans"/>
-              </a:rPr>
-              <a:t>EduBío 360 · Estadística Descriptiva · Biobío 2021</a:t>
-            </a:r>
-          </a:p>
-        </p:txBody>
-      </p:sp>
-      <p:sp>
-        <p:nvSpPr>
-          <p:cNvPr id="8" name="Rounded Rectangle 7"/>
-          <p:cNvSpPr/>
-          <p:nvPr/>
-        </p:nvSpPr>
-        <p:spPr>
-          <a:xfrm>
-            <a:off x="658368" y="1481328"/>
-            <a:ext cx="10881360" cy="2834640"/>
-          </a:xfrm>
-          <a:prstGeom prst="roundRect">
-            <a:avLst/>
-          </a:prstGeom>
-          <a:solidFill>
-            <a:srgbClr val="F6F9FC"/>
-          </a:solidFill>
-          <a:ln w="8890">
-            <a:solidFill>
-              <a:srgbClr val="DFE6ED"/>
-            </a:solidFill>
-          </a:ln>
-        </p:spPr>
-        <p:style>
-          <a:lnRef idx="1">
-            <a:schemeClr val="accent1"/>
-          </a:lnRef>
-          <a:fillRef idx="3">
-            <a:schemeClr val="accent1"/>
-          </a:fillRef>
-          <a:effectRef idx="2">
-            <a:schemeClr val="accent1"/>
-          </a:effectRef>
-          <a:fontRef idx="minor">
-            <a:schemeClr val="lt1"/>
-          </a:fontRef>
-        </p:style>
-        <p:txBody>
-          <a:bodyPr rtlCol="0" anchor="ctr"/>
-          <a:lstStyle/>
-          <a:p>
-            <a:pPr algn="ctr"/>
-          </a:p>
-        </p:txBody>
-      </p:sp>
-      <p:sp>
-        <p:nvSpPr>
-          <p:cNvPr id="9" name="TextBox 8"/>
-          <p:cNvSpPr txBox="1"/>
-          <p:nvPr/>
-        </p:nvSpPr>
-        <p:spPr>
-          <a:xfrm>
-            <a:off x="932688" y="1773936"/>
-            <a:ext cx="2331720" cy="274320"/>
-          </a:xfrm>
-          <a:prstGeom prst="rect">
-            <a:avLst/>
-          </a:prstGeom>
-          <a:noFill/>
-        </p:spPr>
-        <p:txBody>
-          <a:bodyPr wrap="square" anchor="ctr" lIns="18288" rIns="18288" tIns="18288" bIns="18288">
-            <a:spAutoFit/>
-          </a:bodyPr>
-          <a:lstStyle/>
-          <a:p>
-            <a:pPr algn="l"/>
-            <a:r>
-              <a:rPr sz="880" b="1">
-                <a:solidFill>
-                  <a:srgbClr val="0E2D4B"/>
-                </a:solidFill>
-                <a:latin typeface="Noto Sans"/>
-              </a:rPr>
-              <a:t>Universidades CRUCH</a:t>
-            </a:r>
-          </a:p>
-        </p:txBody>
-      </p:sp>
-      <p:sp>
-        <p:nvSpPr>
-          <p:cNvPr id="10" name="Rounded Rectangle 9"/>
-          <p:cNvSpPr/>
-          <p:nvPr/>
-        </p:nvSpPr>
-        <p:spPr>
-          <a:xfrm>
-            <a:off x="3328416" y="1801368"/>
-            <a:ext cx="6446520" cy="292608"/>
-          </a:xfrm>
-          <a:prstGeom prst="roundRect">
-            <a:avLst/>
-          </a:prstGeom>
-          <a:solidFill>
-            <a:srgbClr val="E0E7EE"/>
-          </a:solidFill>
-          <a:ln>
-            <a:noFill/>
-          </a:ln>
-        </p:spPr>
-        <p:style>
-          <a:lnRef idx="1">
-            <a:schemeClr val="accent1"/>
-          </a:lnRef>
-          <a:fillRef idx="3">
-            <a:schemeClr val="accent1"/>
-          </a:fillRef>
-          <a:effectRef idx="2">
-            <a:schemeClr val="accent1"/>
-          </a:effectRef>
-          <a:fontRef idx="minor">
-            <a:schemeClr val="lt1"/>
-          </a:fontRef>
-        </p:style>
-        <p:txBody>
-          <a:bodyPr rtlCol="0" anchor="ctr"/>
-          <a:lstStyle/>
-          <a:p>
-            <a:pPr algn="ctr"/>
-          </a:p>
-        </p:txBody>
-      </p:sp>
-      <p:sp>
-        <p:nvSpPr>
-          <p:cNvPr id="11" name="Rounded Rectangle 10"/>
-          <p:cNvSpPr/>
-          <p:nvPr/>
-        </p:nvSpPr>
-        <p:spPr>
-          <a:xfrm>
-            <a:off x="3328416" y="1801368"/>
-            <a:ext cx="4899355" cy="292608"/>
-          </a:xfrm>
-          <a:prstGeom prst="roundRect">
-            <a:avLst/>
-          </a:prstGeom>
-          <a:solidFill>
-            <a:srgbClr val="077596"/>
-          </a:solidFill>
-          <a:ln>
-            <a:noFill/>
-          </a:ln>
-        </p:spPr>
-        <p:style>
-          <a:lnRef idx="1">
-            <a:schemeClr val="accent1"/>
-          </a:lnRef>
-          <a:fillRef idx="3">
-            <a:schemeClr val="accent1"/>
-          </a:fillRef>
-          <a:effectRef idx="2">
-            <a:schemeClr val="accent1"/>
-          </a:effectRef>
-          <a:fontRef idx="minor">
-            <a:schemeClr val="lt1"/>
-          </a:fontRef>
-        </p:style>
-        <p:txBody>
-          <a:bodyPr rtlCol="0" anchor="ctr"/>
-          <a:lstStyle/>
-          <a:p>
-            <a:pPr algn="ctr"/>
-          </a:p>
-        </p:txBody>
-      </p:sp>
-      <p:sp>
-        <p:nvSpPr>
-          <p:cNvPr id="12" name="Rounded Rectangle 11"/>
-          <p:cNvSpPr/>
-          <p:nvPr/>
-        </p:nvSpPr>
-        <p:spPr>
-          <a:xfrm>
-            <a:off x="9939528" y="1801368"/>
-            <a:ext cx="868680" cy="310896"/>
-          </a:xfrm>
-          <a:prstGeom prst="roundRect">
-            <a:avLst/>
-          </a:prstGeom>
-          <a:solidFill>
-            <a:srgbClr val="0E2D4B"/>
-          </a:solidFill>
-          <a:ln>
-            <a:noFill/>
-          </a:ln>
-        </p:spPr>
-        <p:style>
-          <a:lnRef idx="1">
-            <a:schemeClr val="accent1"/>
-          </a:lnRef>
-          <a:fillRef idx="3">
-            <a:schemeClr val="accent1"/>
-          </a:fillRef>
-          <a:effectRef idx="2">
-            <a:schemeClr val="accent1"/>
-          </a:effectRef>
-          <a:fontRef idx="minor">
-            <a:schemeClr val="lt1"/>
-          </a:fontRef>
-        </p:style>
-        <p:txBody>
-          <a:bodyPr rtlCol="0" anchor="ctr"/>
-          <a:lstStyle/>
-          <a:p>
-            <a:pPr algn="ctr"/>
-          </a:p>
-        </p:txBody>
-      </p:sp>
-      <p:sp>
-        <p:nvSpPr>
-          <p:cNvPr id="13" name="TextBox 12"/>
-          <p:cNvSpPr txBox="1"/>
-          <p:nvPr/>
-        </p:nvSpPr>
-        <p:spPr>
-          <a:xfrm>
-            <a:off x="9976103" y="1819656"/>
-            <a:ext cx="795528" cy="256032"/>
-          </a:xfrm>
-          <a:prstGeom prst="rect">
-            <a:avLst/>
-          </a:prstGeom>
-          <a:noFill/>
-        </p:spPr>
-        <p:txBody>
-          <a:bodyPr wrap="square" anchor="ctr" lIns="18288" rIns="18288" tIns="18288" bIns="18288">
-            <a:spAutoFit/>
-          </a:bodyPr>
-          <a:lstStyle/>
-          <a:p>
-            <a:pPr algn="ctr"/>
-            <a:r>
-              <a:rPr sz="819" b="1">
-                <a:solidFill>
-                  <a:srgbClr val="FFFFFF"/>
-                </a:solidFill>
-                <a:latin typeface="Noto Sans"/>
-              </a:rPr>
-              <a:t>22.8 a.</a:t>
-            </a:r>
-          </a:p>
-        </p:txBody>
-      </p:sp>
-      <p:sp>
-        <p:nvSpPr>
-          <p:cNvPr id="14" name="TextBox 13"/>
-          <p:cNvSpPr txBox="1"/>
-          <p:nvPr/>
-        </p:nvSpPr>
-        <p:spPr>
-          <a:xfrm>
-            <a:off x="9957816" y="1819656"/>
-            <a:ext cx="832104" cy="256032"/>
-          </a:xfrm>
-          <a:prstGeom prst="rect">
-            <a:avLst/>
-          </a:prstGeom>
-          <a:noFill/>
-        </p:spPr>
-        <p:txBody>
-          <a:bodyPr wrap="square" anchor="ctr" lIns="18288" rIns="18288" tIns="18288" bIns="18288">
-            <a:spAutoFit/>
-          </a:bodyPr>
-          <a:lstStyle/>
-          <a:p>
-            <a:pPr algn="ctr"/>
-            <a:r>
-              <a:rPr sz="830" b="1">
-                <a:solidFill>
-                  <a:srgbClr val="077596"/>
-                </a:solidFill>
-                <a:latin typeface="Noto Sans"/>
-              </a:rPr>
-              <a:t>22.8 a.</a:t>
-            </a:r>
-          </a:p>
-        </p:txBody>
-      </p:sp>
-      <p:sp>
-        <p:nvSpPr>
-          <p:cNvPr id="15" name="TextBox 14"/>
-          <p:cNvSpPr txBox="1"/>
-          <p:nvPr/>
-        </p:nvSpPr>
-        <p:spPr>
-          <a:xfrm>
-            <a:off x="932688" y="2359152"/>
-            <a:ext cx="2331720" cy="274320"/>
-          </a:xfrm>
-          <a:prstGeom prst="rect">
-            <a:avLst/>
-          </a:prstGeom>
-          <a:noFill/>
-        </p:spPr>
-        <p:txBody>
-          <a:bodyPr wrap="square" anchor="ctr" lIns="18288" rIns="18288" tIns="18288" bIns="18288">
-            <a:spAutoFit/>
-          </a:bodyPr>
-          <a:lstStyle/>
-          <a:p>
-            <a:pPr algn="l"/>
-            <a:r>
-              <a:rPr sz="880" b="1">
-                <a:solidFill>
-                  <a:srgbClr val="0E2D4B"/>
-                </a:solidFill>
-                <a:latin typeface="Noto Sans"/>
-              </a:rPr>
-              <a:t>Universidades Privadas</a:t>
-            </a:r>
-          </a:p>
-        </p:txBody>
-      </p:sp>
-      <p:sp>
-        <p:nvSpPr>
-          <p:cNvPr id="16" name="Rounded Rectangle 15"/>
-          <p:cNvSpPr/>
-          <p:nvPr/>
-        </p:nvSpPr>
-        <p:spPr>
-          <a:xfrm>
-            <a:off x="3328416" y="2386584"/>
-            <a:ext cx="6446520" cy="292608"/>
-          </a:xfrm>
-          <a:prstGeom prst="roundRect">
-            <a:avLst/>
-          </a:prstGeom>
-          <a:solidFill>
-            <a:srgbClr val="E0E7EE"/>
-          </a:solidFill>
-          <a:ln>
-            <a:noFill/>
-          </a:ln>
-        </p:spPr>
-        <p:style>
-          <a:lnRef idx="1">
-            <a:schemeClr val="accent1"/>
-          </a:lnRef>
-          <a:fillRef idx="3">
-            <a:schemeClr val="accent1"/>
-          </a:fillRef>
-          <a:effectRef idx="2">
-            <a:schemeClr val="accent1"/>
-          </a:effectRef>
-          <a:fontRef idx="minor">
-            <a:schemeClr val="lt1"/>
-          </a:fontRef>
-        </p:style>
-        <p:txBody>
-          <a:bodyPr rtlCol="0" anchor="ctr"/>
-          <a:lstStyle/>
-          <a:p>
-            <a:pPr algn="ctr"/>
-          </a:p>
-        </p:txBody>
-      </p:sp>
-      <p:sp>
-        <p:nvSpPr>
-          <p:cNvPr id="17" name="Rounded Rectangle 16"/>
-          <p:cNvSpPr/>
-          <p:nvPr/>
-        </p:nvSpPr>
-        <p:spPr>
-          <a:xfrm>
-            <a:off x="3328416" y="2386584"/>
-            <a:ext cx="5157216" cy="292608"/>
-          </a:xfrm>
-          <a:prstGeom prst="roundRect">
-            <a:avLst/>
-          </a:prstGeom>
-          <a:solidFill>
-            <a:srgbClr val="00899A"/>
-          </a:solidFill>
-          <a:ln>
-            <a:noFill/>
-          </a:ln>
-        </p:spPr>
-        <p:style>
-          <a:lnRef idx="1">
-            <a:schemeClr val="accent1"/>
-          </a:lnRef>
-          <a:fillRef idx="3">
-            <a:schemeClr val="accent1"/>
-          </a:fillRef>
-          <a:effectRef idx="2">
-            <a:schemeClr val="accent1"/>
-          </a:effectRef>
-          <a:fontRef idx="minor">
-            <a:schemeClr val="lt1"/>
-          </a:fontRef>
-        </p:style>
-        <p:txBody>
-          <a:bodyPr rtlCol="0" anchor="ctr"/>
-          <a:lstStyle/>
-          <a:p>
-            <a:pPr algn="ctr"/>
-          </a:p>
-        </p:txBody>
-      </p:sp>
-      <p:sp>
-        <p:nvSpPr>
-          <p:cNvPr id="18" name="Rounded Rectangle 17"/>
-          <p:cNvSpPr/>
-          <p:nvPr/>
-        </p:nvSpPr>
-        <p:spPr>
-          <a:xfrm>
-            <a:off x="9939528" y="2386584"/>
-            <a:ext cx="868680" cy="310896"/>
-          </a:xfrm>
-          <a:prstGeom prst="roundRect">
-            <a:avLst/>
-          </a:prstGeom>
-          <a:solidFill>
-            <a:srgbClr val="0E2D4B"/>
-          </a:solidFill>
-          <a:ln>
-            <a:noFill/>
-          </a:ln>
-        </p:spPr>
-        <p:style>
-          <a:lnRef idx="1">
-            <a:schemeClr val="accent1"/>
-          </a:lnRef>
-          <a:fillRef idx="3">
-            <a:schemeClr val="accent1"/>
-          </a:fillRef>
-          <a:effectRef idx="2">
-            <a:schemeClr val="accent1"/>
-          </a:effectRef>
-          <a:fontRef idx="minor">
-            <a:schemeClr val="lt1"/>
-          </a:fontRef>
-        </p:style>
-        <p:txBody>
-          <a:bodyPr rtlCol="0" anchor="ctr"/>
-          <a:lstStyle/>
-          <a:p>
-            <a:pPr algn="ctr"/>
-          </a:p>
-        </p:txBody>
-      </p:sp>
-      <p:sp>
-        <p:nvSpPr>
-          <p:cNvPr id="19" name="TextBox 18"/>
-          <p:cNvSpPr txBox="1"/>
-          <p:nvPr/>
-        </p:nvSpPr>
-        <p:spPr>
-          <a:xfrm>
-            <a:off x="9976103" y="2404872"/>
-            <a:ext cx="795528" cy="256032"/>
-          </a:xfrm>
-          <a:prstGeom prst="rect">
-            <a:avLst/>
-          </a:prstGeom>
-          <a:noFill/>
-        </p:spPr>
-        <p:txBody>
-          <a:bodyPr wrap="square" anchor="ctr" lIns="18288" rIns="18288" tIns="18288" bIns="18288">
-            <a:spAutoFit/>
-          </a:bodyPr>
-          <a:lstStyle/>
-          <a:p>
-            <a:pPr algn="ctr"/>
-            <a:r>
-              <a:rPr sz="819" b="1">
-                <a:solidFill>
-                  <a:srgbClr val="FFFFFF"/>
-                </a:solidFill>
-                <a:latin typeface="Noto Sans"/>
-              </a:rPr>
-              <a:t>24.0 a.</a:t>
-            </a:r>
-          </a:p>
-        </p:txBody>
-      </p:sp>
-      <p:sp>
-        <p:nvSpPr>
-          <p:cNvPr id="20" name="TextBox 19"/>
-          <p:cNvSpPr txBox="1"/>
-          <p:nvPr/>
-        </p:nvSpPr>
-        <p:spPr>
-          <a:xfrm>
-            <a:off x="9957816" y="2404872"/>
-            <a:ext cx="832104" cy="256032"/>
-          </a:xfrm>
-          <a:prstGeom prst="rect">
-            <a:avLst/>
-          </a:prstGeom>
-          <a:noFill/>
-        </p:spPr>
-        <p:txBody>
-          <a:bodyPr wrap="square" anchor="ctr" lIns="18288" rIns="18288" tIns="18288" bIns="18288">
-            <a:spAutoFit/>
-          </a:bodyPr>
-          <a:lstStyle/>
-          <a:p>
-            <a:pPr algn="ctr"/>
-            <a:r>
-              <a:rPr sz="830" b="1">
-                <a:solidFill>
-                  <a:srgbClr val="00899A"/>
-                </a:solidFill>
-                <a:latin typeface="Noto Sans"/>
-              </a:rPr>
-              <a:t>24.0 a.</a:t>
-            </a:r>
-          </a:p>
-        </p:txBody>
-      </p:sp>
-      <p:sp>
-        <p:nvSpPr>
-          <p:cNvPr id="21" name="TextBox 20"/>
-          <p:cNvSpPr txBox="1"/>
-          <p:nvPr/>
-        </p:nvSpPr>
-        <p:spPr>
-          <a:xfrm>
-            <a:off x="932688" y="2944368"/>
-            <a:ext cx="2331720" cy="274320"/>
-          </a:xfrm>
-          <a:prstGeom prst="rect">
-            <a:avLst/>
-          </a:prstGeom>
-          <a:noFill/>
-        </p:spPr>
-        <p:txBody>
-          <a:bodyPr wrap="square" anchor="ctr" lIns="18288" rIns="18288" tIns="18288" bIns="18288">
-            <a:spAutoFit/>
-          </a:bodyPr>
-          <a:lstStyle/>
-          <a:p>
-            <a:pPr algn="l"/>
-            <a:r>
-              <a:rPr sz="880" b="1">
-                <a:solidFill>
-                  <a:srgbClr val="0E2D4B"/>
-                </a:solidFill>
-                <a:latin typeface="Noto Sans"/>
-              </a:rPr>
-              <a:t>Centros de Formación Técnica (CFT)</a:t>
-            </a:r>
-          </a:p>
-        </p:txBody>
-      </p:sp>
-      <p:sp>
-        <p:nvSpPr>
-          <p:cNvPr id="22" name="Rounded Rectangle 21"/>
-          <p:cNvSpPr/>
-          <p:nvPr/>
-        </p:nvSpPr>
-        <p:spPr>
-          <a:xfrm>
-            <a:off x="3328416" y="2971800"/>
-            <a:ext cx="6446520" cy="292608"/>
-          </a:xfrm>
-          <a:prstGeom prst="roundRect">
-            <a:avLst/>
-          </a:prstGeom>
-          <a:solidFill>
-            <a:srgbClr val="E0E7EE"/>
-          </a:solidFill>
-          <a:ln>
-            <a:noFill/>
-          </a:ln>
-        </p:spPr>
-        <p:style>
-          <a:lnRef idx="1">
-            <a:schemeClr val="accent1"/>
-          </a:lnRef>
-          <a:fillRef idx="3">
-            <a:schemeClr val="accent1"/>
-          </a:fillRef>
-          <a:effectRef idx="2">
-            <a:schemeClr val="accent1"/>
-          </a:effectRef>
-          <a:fontRef idx="minor">
-            <a:schemeClr val="lt1"/>
-          </a:fontRef>
-        </p:style>
-        <p:txBody>
-          <a:bodyPr rtlCol="0" anchor="ctr"/>
-          <a:lstStyle/>
-          <a:p>
-            <a:pPr algn="ctr"/>
-          </a:p>
-        </p:txBody>
-      </p:sp>
-      <p:sp>
-        <p:nvSpPr>
-          <p:cNvPr id="23" name="Rounded Rectangle 22"/>
-          <p:cNvSpPr/>
-          <p:nvPr/>
-        </p:nvSpPr>
-        <p:spPr>
-          <a:xfrm>
-            <a:off x="3328416" y="2971800"/>
-            <a:ext cx="5522518" cy="292608"/>
-          </a:xfrm>
-          <a:prstGeom prst="roundRect">
-            <a:avLst/>
-          </a:prstGeom>
-          <a:solidFill>
-            <a:srgbClr val="3AA484"/>
-          </a:solidFill>
-          <a:ln>
-            <a:noFill/>
-          </a:ln>
-        </p:spPr>
-        <p:style>
-          <a:lnRef idx="1">
-            <a:schemeClr val="accent1"/>
-          </a:lnRef>
-          <a:fillRef idx="3">
-            <a:schemeClr val="accent1"/>
-          </a:fillRef>
-          <a:effectRef idx="2">
-            <a:schemeClr val="accent1"/>
-          </a:effectRef>
-          <a:fontRef idx="minor">
-            <a:schemeClr val="lt1"/>
-          </a:fontRef>
-        </p:style>
-        <p:txBody>
-          <a:bodyPr rtlCol="0" anchor="ctr"/>
-          <a:lstStyle/>
-          <a:p>
-            <a:pPr algn="ctr"/>
-          </a:p>
-        </p:txBody>
-      </p:sp>
-      <p:sp>
-        <p:nvSpPr>
-          <p:cNvPr id="24" name="Rounded Rectangle 23"/>
-          <p:cNvSpPr/>
-          <p:nvPr/>
-        </p:nvSpPr>
-        <p:spPr>
-          <a:xfrm>
-            <a:off x="9939528" y="2971800"/>
-            <a:ext cx="868680" cy="310896"/>
-          </a:xfrm>
-          <a:prstGeom prst="roundRect">
-            <a:avLst/>
-          </a:prstGeom>
-          <a:solidFill>
-            <a:srgbClr val="0E2D4B"/>
-          </a:solidFill>
-          <a:ln>
-            <a:noFill/>
-          </a:ln>
-        </p:spPr>
-        <p:style>
-          <a:lnRef idx="1">
-            <a:schemeClr val="accent1"/>
-          </a:lnRef>
-          <a:fillRef idx="3">
-            <a:schemeClr val="accent1"/>
-          </a:fillRef>
-          <a:effectRef idx="2">
-            <a:schemeClr val="accent1"/>
-          </a:effectRef>
-          <a:fontRef idx="minor">
-            <a:schemeClr val="lt1"/>
-          </a:fontRef>
-        </p:style>
-        <p:txBody>
-          <a:bodyPr rtlCol="0" anchor="ctr"/>
-          <a:lstStyle/>
-          <a:p>
-            <a:pPr algn="ctr"/>
-          </a:p>
-        </p:txBody>
-      </p:sp>
-      <p:sp>
-        <p:nvSpPr>
-          <p:cNvPr id="25" name="TextBox 24"/>
-          <p:cNvSpPr txBox="1"/>
-          <p:nvPr/>
-        </p:nvSpPr>
-        <p:spPr>
-          <a:xfrm>
-            <a:off x="9976103" y="2990088"/>
-            <a:ext cx="795528" cy="256032"/>
-          </a:xfrm>
-          <a:prstGeom prst="rect">
-            <a:avLst/>
-          </a:prstGeom>
-          <a:noFill/>
-        </p:spPr>
-        <p:txBody>
-          <a:bodyPr wrap="square" anchor="ctr" lIns="18288" rIns="18288" tIns="18288" bIns="18288">
-            <a:spAutoFit/>
-          </a:bodyPr>
-          <a:lstStyle/>
-          <a:p>
-            <a:pPr algn="ctr"/>
-            <a:r>
-              <a:rPr sz="819" b="1">
-                <a:solidFill>
-                  <a:srgbClr val="FFFFFF"/>
-                </a:solidFill>
-                <a:latin typeface="Noto Sans"/>
-              </a:rPr>
-              <a:t>25.7 a.</a:t>
-            </a:r>
-          </a:p>
-        </p:txBody>
-      </p:sp>
-      <p:sp>
-        <p:nvSpPr>
-          <p:cNvPr id="26" name="TextBox 25"/>
-          <p:cNvSpPr txBox="1"/>
-          <p:nvPr/>
-        </p:nvSpPr>
-        <p:spPr>
-          <a:xfrm>
-            <a:off x="9957816" y="2990088"/>
-            <a:ext cx="832104" cy="256032"/>
-          </a:xfrm>
-          <a:prstGeom prst="rect">
-            <a:avLst/>
-          </a:prstGeom>
-          <a:noFill/>
-        </p:spPr>
-        <p:txBody>
-          <a:bodyPr wrap="square" anchor="ctr" lIns="18288" rIns="18288" tIns="18288" bIns="18288">
-            <a:spAutoFit/>
-          </a:bodyPr>
-          <a:lstStyle/>
-          <a:p>
-            <a:pPr algn="ctr"/>
-            <a:r>
-              <a:rPr sz="830" b="1">
-                <a:solidFill>
-                  <a:srgbClr val="3AA484"/>
-                </a:solidFill>
-                <a:latin typeface="Noto Sans"/>
-              </a:rPr>
-              <a:t>25.7 a.</a:t>
-            </a:r>
-          </a:p>
-        </p:txBody>
-      </p:sp>
-      <p:sp>
-        <p:nvSpPr>
-          <p:cNvPr id="27" name="TextBox 26"/>
-          <p:cNvSpPr txBox="1"/>
-          <p:nvPr/>
-        </p:nvSpPr>
-        <p:spPr>
-          <a:xfrm>
-            <a:off x="932688" y="3529584"/>
-            <a:ext cx="2331720" cy="274320"/>
-          </a:xfrm>
-          <a:prstGeom prst="rect">
-            <a:avLst/>
-          </a:prstGeom>
-          <a:noFill/>
-        </p:spPr>
-        <p:txBody>
-          <a:bodyPr wrap="square" anchor="ctr" lIns="18288" rIns="18288" tIns="18288" bIns="18288">
-            <a:spAutoFit/>
-          </a:bodyPr>
-          <a:lstStyle/>
-          <a:p>
-            <a:pPr algn="l"/>
-            <a:r>
-              <a:rPr sz="880" b="1">
-                <a:solidFill>
-                  <a:srgbClr val="0E2D4B"/>
-                </a:solidFill>
-                <a:latin typeface="Noto Sans"/>
-              </a:rPr>
-              <a:t>Institutos Profesionales (IP)</a:t>
-            </a:r>
-          </a:p>
-        </p:txBody>
-      </p:sp>
-      <p:sp>
-        <p:nvSpPr>
-          <p:cNvPr id="28" name="Rounded Rectangle 27"/>
-          <p:cNvSpPr/>
-          <p:nvPr/>
-        </p:nvSpPr>
-        <p:spPr>
-          <a:xfrm>
-            <a:off x="3328416" y="3557015"/>
-            <a:ext cx="6446520" cy="292608"/>
-          </a:xfrm>
-          <a:prstGeom prst="roundRect">
-            <a:avLst/>
-          </a:prstGeom>
-          <a:solidFill>
-            <a:srgbClr val="E0E7EE"/>
-          </a:solidFill>
-          <a:ln>
-            <a:noFill/>
-          </a:ln>
-        </p:spPr>
-        <p:style>
-          <a:lnRef idx="1">
-            <a:schemeClr val="accent1"/>
-          </a:lnRef>
-          <a:fillRef idx="3">
-            <a:schemeClr val="accent1"/>
-          </a:fillRef>
-          <a:effectRef idx="2">
-            <a:schemeClr val="accent1"/>
-          </a:effectRef>
-          <a:fontRef idx="minor">
-            <a:schemeClr val="lt1"/>
-          </a:fontRef>
-        </p:style>
-        <p:txBody>
-          <a:bodyPr rtlCol="0" anchor="ctr"/>
-          <a:lstStyle/>
-          <a:p>
-            <a:pPr algn="ctr"/>
-          </a:p>
-        </p:txBody>
-      </p:sp>
-      <p:sp>
-        <p:nvSpPr>
-          <p:cNvPr id="29" name="Rounded Rectangle 28"/>
-          <p:cNvSpPr/>
-          <p:nvPr/>
-        </p:nvSpPr>
-        <p:spPr>
-          <a:xfrm>
-            <a:off x="3328416" y="3557015"/>
-            <a:ext cx="5694426" cy="292608"/>
-          </a:xfrm>
-          <a:prstGeom prst="roundRect">
-            <a:avLst/>
-          </a:prstGeom>
-          <a:solidFill>
-            <a:srgbClr val="F59753"/>
-          </a:solidFill>
-          <a:ln>
-            <a:noFill/>
-          </a:ln>
-        </p:spPr>
-        <p:style>
-          <a:lnRef idx="1">
-            <a:schemeClr val="accent1"/>
-          </a:lnRef>
-          <a:fillRef idx="3">
-            <a:schemeClr val="accent1"/>
-          </a:fillRef>
-          <a:effectRef idx="2">
-            <a:schemeClr val="accent1"/>
-          </a:effectRef>
-          <a:fontRef idx="minor">
-            <a:schemeClr val="lt1"/>
-          </a:fontRef>
-        </p:style>
-        <p:txBody>
-          <a:bodyPr rtlCol="0" anchor="ctr"/>
-          <a:lstStyle/>
-          <a:p>
-            <a:pPr algn="ctr"/>
-          </a:p>
-        </p:txBody>
-      </p:sp>
-      <p:sp>
-        <p:nvSpPr>
-          <p:cNvPr id="30" name="Rounded Rectangle 29"/>
-          <p:cNvSpPr/>
-          <p:nvPr/>
-        </p:nvSpPr>
-        <p:spPr>
-          <a:xfrm>
-            <a:off x="9939528" y="3557015"/>
-            <a:ext cx="868680" cy="310896"/>
-          </a:xfrm>
-          <a:prstGeom prst="roundRect">
-            <a:avLst/>
-          </a:prstGeom>
-          <a:solidFill>
-            <a:srgbClr val="0E2D4B"/>
-          </a:solidFill>
-          <a:ln>
-            <a:noFill/>
-          </a:ln>
-        </p:spPr>
-        <p:style>
-          <a:lnRef idx="1">
-            <a:schemeClr val="accent1"/>
-          </a:lnRef>
-          <a:fillRef idx="3">
-            <a:schemeClr val="accent1"/>
-          </a:fillRef>
-          <a:effectRef idx="2">
-            <a:schemeClr val="accent1"/>
-          </a:effectRef>
-          <a:fontRef idx="minor">
-            <a:schemeClr val="lt1"/>
-          </a:fontRef>
-        </p:style>
-        <p:txBody>
-          <a:bodyPr rtlCol="0" anchor="ctr"/>
-          <a:lstStyle/>
-          <a:p>
-            <a:pPr algn="ctr"/>
-          </a:p>
-        </p:txBody>
-      </p:sp>
-      <p:sp>
-        <p:nvSpPr>
-          <p:cNvPr id="31" name="TextBox 30"/>
-          <p:cNvSpPr txBox="1"/>
-          <p:nvPr/>
-        </p:nvSpPr>
-        <p:spPr>
-          <a:xfrm>
-            <a:off x="9976103" y="3575303"/>
-            <a:ext cx="795528" cy="256032"/>
-          </a:xfrm>
-          <a:prstGeom prst="rect">
-            <a:avLst/>
-          </a:prstGeom>
-          <a:noFill/>
-        </p:spPr>
-        <p:txBody>
-          <a:bodyPr wrap="square" anchor="ctr" lIns="18288" rIns="18288" tIns="18288" bIns="18288">
-            <a:spAutoFit/>
-          </a:bodyPr>
-          <a:lstStyle/>
-          <a:p>
-            <a:pPr algn="ctr"/>
-            <a:r>
-              <a:rPr sz="819" b="1">
-                <a:solidFill>
-                  <a:srgbClr val="FFFFFF"/>
-                </a:solidFill>
-                <a:latin typeface="Noto Sans"/>
-              </a:rPr>
-              <a:t>26.5 a.</a:t>
-            </a:r>
-          </a:p>
-        </p:txBody>
-      </p:sp>
-      <p:sp>
-        <p:nvSpPr>
-          <p:cNvPr id="32" name="TextBox 31"/>
-          <p:cNvSpPr txBox="1"/>
-          <p:nvPr/>
-        </p:nvSpPr>
-        <p:spPr>
-          <a:xfrm>
-            <a:off x="9957816" y="3575303"/>
-            <a:ext cx="832104" cy="256032"/>
-          </a:xfrm>
-          <a:prstGeom prst="rect">
-            <a:avLst/>
-          </a:prstGeom>
-          <a:noFill/>
-        </p:spPr>
-        <p:txBody>
-          <a:bodyPr wrap="square" anchor="ctr" lIns="18288" rIns="18288" tIns="18288" bIns="18288">
-            <a:spAutoFit/>
-          </a:bodyPr>
-          <a:lstStyle/>
-          <a:p>
-            <a:pPr algn="ctr"/>
-            <a:r>
-              <a:rPr sz="830" b="1">
-                <a:solidFill>
-                  <a:srgbClr val="F59753"/>
-                </a:solidFill>
-                <a:latin typeface="Noto Sans"/>
-              </a:rPr>
-              <a:t>26.5 a.</a:t>
-            </a:r>
-          </a:p>
-        </p:txBody>
-      </p:sp>
-      <p:sp>
-        <p:nvSpPr>
-          <p:cNvPr id="33" name="Rounded Rectangle 32"/>
-          <p:cNvSpPr/>
-          <p:nvPr/>
-        </p:nvSpPr>
-        <p:spPr>
-          <a:xfrm>
-            <a:off x="658368" y="4599432"/>
-            <a:ext cx="10881360" cy="1005840"/>
-          </a:xfrm>
-          <a:prstGeom prst="roundRect">
-            <a:avLst/>
-          </a:prstGeom>
-          <a:solidFill>
-            <a:srgbClr val="F6F9FC"/>
-          </a:solidFill>
-          <a:ln w="8890">
-            <a:solidFill>
-              <a:srgbClr val="DFE6ED"/>
-            </a:solidFill>
-          </a:ln>
-        </p:spPr>
-        <p:style>
-          <a:lnRef idx="1">
-            <a:schemeClr val="accent1"/>
-          </a:lnRef>
-          <a:fillRef idx="3">
-            <a:schemeClr val="accent1"/>
-          </a:fillRef>
-          <a:effectRef idx="2">
-            <a:schemeClr val="accent1"/>
-          </a:effectRef>
-          <a:fontRef idx="minor">
-            <a:schemeClr val="lt1"/>
-          </a:fontRef>
-        </p:style>
-        <p:txBody>
-          <a:bodyPr rtlCol="0" anchor="ctr"/>
-          <a:lstStyle/>
-          <a:p>
-            <a:pPr algn="ctr"/>
-          </a:p>
-        </p:txBody>
-      </p:sp>
-      <p:sp>
-        <p:nvSpPr>
-          <p:cNvPr id="34" name="Rectangle 33"/>
-          <p:cNvSpPr/>
-          <p:nvPr/>
-        </p:nvSpPr>
-        <p:spPr>
-          <a:xfrm>
-            <a:off x="658368" y="4599432"/>
-            <a:ext cx="32004" cy="1005840"/>
-          </a:xfrm>
-          <a:prstGeom prst="rect">
-            <a:avLst/>
-          </a:prstGeom>
-          <a:solidFill>
-            <a:srgbClr val="00AD9F"/>
-          </a:solidFill>
-          <a:ln>
-            <a:noFill/>
-          </a:ln>
-        </p:spPr>
-        <p:style>
-          <a:lnRef idx="1">
-            <a:schemeClr val="accent1"/>
-          </a:lnRef>
-          <a:fillRef idx="3">
-            <a:schemeClr val="accent1"/>
-          </a:fillRef>
-          <a:effectRef idx="2">
-            <a:schemeClr val="accent1"/>
-          </a:effectRef>
-          <a:fontRef idx="minor">
-            <a:schemeClr val="lt1"/>
-          </a:fontRef>
-        </p:style>
-        <p:txBody>
-          <a:bodyPr rtlCol="0" anchor="ctr"/>
-          <a:lstStyle/>
-          <a:p>
-            <a:pPr algn="ctr"/>
-          </a:p>
-        </p:txBody>
-      </p:sp>
-      <p:sp>
-        <p:nvSpPr>
-          <p:cNvPr id="35" name="TextBox 34"/>
-          <p:cNvSpPr txBox="1"/>
-          <p:nvPr/>
-        </p:nvSpPr>
-        <p:spPr>
-          <a:xfrm>
-            <a:off x="886968" y="4709160"/>
-            <a:ext cx="10469880" cy="219456"/>
-          </a:xfrm>
-          <a:prstGeom prst="rect">
-            <a:avLst/>
-          </a:prstGeom>
-          <a:noFill/>
-        </p:spPr>
-        <p:txBody>
-          <a:bodyPr wrap="square" anchor="ctr" lIns="18288" rIns="18288" tIns="18288" bIns="18288">
-            <a:spAutoFit/>
-          </a:bodyPr>
-          <a:lstStyle/>
-          <a:p>
-            <a:pPr algn="l"/>
-            <a:r>
-              <a:rPr sz="980" b="1">
-                <a:solidFill>
-                  <a:srgbClr val="243B54"/>
-                </a:solidFill>
-                <a:latin typeface="Noto Sans"/>
-              </a:rPr>
-              <a:t>ANÁLISIS DEMOGRÁFICO</a:t>
-            </a:r>
-          </a:p>
-        </p:txBody>
-      </p:sp>
-      <p:sp>
-        <p:nvSpPr>
-          <p:cNvPr id="36" name="TextBox 35"/>
-          <p:cNvSpPr txBox="1"/>
-          <p:nvPr/>
-        </p:nvSpPr>
-        <p:spPr>
-          <a:xfrm>
-            <a:off x="886968" y="4946904"/>
-            <a:ext cx="10469880" cy="585216"/>
-          </a:xfrm>
-          <a:prstGeom prst="rect">
-            <a:avLst/>
-          </a:prstGeom>
-          <a:noFill/>
-        </p:spPr>
-        <p:txBody>
-          <a:bodyPr wrap="square" anchor="ctr" lIns="18288" rIns="18288" tIns="18288" bIns="18288">
-            <a:spAutoFit/>
-          </a:bodyPr>
-          <a:lstStyle/>
-          <a:p>
-            <a:pPr algn="l"/>
-            <a:r>
-              <a:rPr sz="890" b="0">
-                <a:solidFill>
-                  <a:srgbClr val="596C82"/>
-                </a:solidFill>
-                <a:latin typeface="Noto Sans"/>
-              </a:rPr>
-              <a:t>La edad promedio aumenta desde las universidades CRUCH hacia CFT e IP. Esto describe una diferencia entre tipos de institución; no identifica su causa.</a:t>
             </a:r>
           </a:p>
         </p:txBody>
@@ -21374,15 +14522,8 @@
           </a:bodyPr>
           <a:lstStyle/>
           <a:p>
-            <a:pPr algn="r"/>
-            <a:r>
-              <a:rPr sz="950" b="1">
-                <a:solidFill>
-                  <a:srgbClr val="596C82"/>
-                </a:solidFill>
-                <a:latin typeface="Noto Sans"/>
-              </a:rPr>
-              <a:t>06</a:t>
+            <a:r>
+              <a:t>04</a:t>
             </a:r>
           </a:p>
         </p:txBody>
@@ -23031,15 +16172,8 @@
           </a:bodyPr>
           <a:lstStyle/>
           <a:p>
-            <a:pPr algn="r"/>
-            <a:r>
-              <a:rPr sz="950" b="1">
-                <a:solidFill>
-                  <a:srgbClr val="596C82"/>
-                </a:solidFill>
-                <a:latin typeface="Noto Sans"/>
-              </a:rPr>
-              <a:t>07</a:t>
+            <a:r>
+              <a:t>05</a:t>
             </a:r>
           </a:p>
         </p:txBody>
@@ -24162,15 +17296,8 @@
           </a:bodyPr>
           <a:lstStyle/>
           <a:p>
-            <a:pPr algn="r"/>
-            <a:r>
-              <a:rPr sz="950" b="1">
-                <a:solidFill>
-                  <a:srgbClr val="596C82"/>
-                </a:solidFill>
-                <a:latin typeface="Noto Sans"/>
-              </a:rPr>
-              <a:t>08</a:t>
+            <a:r>
+              <a:t>06</a:t>
             </a:r>
           </a:p>
         </p:txBody>
@@ -25890,15 +19017,8 @@
           </a:bodyPr>
           <a:lstStyle/>
           <a:p>
-            <a:pPr algn="r"/>
-            <a:r>
-              <a:rPr sz="950" b="1">
-                <a:solidFill>
-                  <a:srgbClr val="596C82"/>
-                </a:solidFill>
-                <a:latin typeface="Noto Sans"/>
-              </a:rPr>
-              <a:t>09</a:t>
+            <a:r>
+              <a:t>07</a:t>
             </a:r>
           </a:p>
         </p:txBody>
